--- a/발표자료/전국책.pptx
+++ b/발표자료/전국책.pptx
@@ -3274,16 +3274,16 @@
         </p:nvSpPr>
         <p:spPr>
           <a:xfrm>
-            <a:off x="457200" y="2103120"/>
-            <a:ext cx="11247120" cy="1463040"/>
-          </a:xfrm>
-          <a:prstGeom prst="rect">
-            <a:avLst/>
-          </a:prstGeom>
-          <a:noFill/>
-        </p:spPr>
-        <p:txBody>
-          <a:bodyPr wrap="square" lIns="45720" rIns="45720" tIns="18288" bIns="18288" anchor="t">
+            <a:off x="457200" y="1965960"/>
+            <a:ext cx="11247120" cy="1828800"/>
+          </a:xfrm>
+          <a:prstGeom prst="rect">
+            <a:avLst/>
+          </a:prstGeom>
+          <a:noFill/>
+        </p:spPr>
+        <p:txBody>
+          <a:bodyPr wrap="square" lIns="45720" rIns="45720" tIns="18288" bIns="18288" anchor="ctr">
             <a:spAutoFit/>
           </a:bodyPr>
           <a:lstStyle/>
@@ -3607,8 +3607,8 @@
         </p:nvSpPr>
         <p:spPr>
           <a:xfrm>
-            <a:off x="457200" y="2011680"/>
-            <a:ext cx="11247120" cy="1386840"/>
+            <a:off x="457200" y="1920240"/>
+            <a:ext cx="11247120" cy="1438656"/>
           </a:xfrm>
           <a:prstGeom prst="rect">
             <a:avLst/>
@@ -3649,8 +3649,8 @@
         </p:nvSpPr>
         <p:spPr>
           <a:xfrm>
-            <a:off x="640080" y="2103120"/>
-            <a:ext cx="10881360" cy="411480"/>
+            <a:off x="640080" y="1993392"/>
+            <a:ext cx="10881360" cy="384048"/>
           </a:xfrm>
           <a:prstGeom prst="rect">
             <a:avLst/>
@@ -3684,8 +3684,8 @@
         </p:nvSpPr>
         <p:spPr>
           <a:xfrm>
-            <a:off x="640080" y="2560320"/>
-            <a:ext cx="10881360" cy="746760"/>
+            <a:off x="640080" y="2395728"/>
+            <a:ext cx="10881360" cy="908304"/>
           </a:xfrm>
           <a:prstGeom prst="rect">
             <a:avLst/>
@@ -3731,8 +3731,8 @@
         </p:nvSpPr>
         <p:spPr>
           <a:xfrm>
-            <a:off x="457200" y="3535680"/>
-            <a:ext cx="11247120" cy="1386840"/>
+            <a:off x="457200" y="3486912"/>
+            <a:ext cx="11247120" cy="1438656"/>
           </a:xfrm>
           <a:prstGeom prst="rect">
             <a:avLst/>
@@ -3773,8 +3773,8 @@
         </p:nvSpPr>
         <p:spPr>
           <a:xfrm>
-            <a:off x="640080" y="3627120"/>
-            <a:ext cx="10881360" cy="411480"/>
+            <a:off x="640080" y="3560064"/>
+            <a:ext cx="10881360" cy="384048"/>
           </a:xfrm>
           <a:prstGeom prst="rect">
             <a:avLst/>
@@ -3808,8 +3808,8 @@
         </p:nvSpPr>
         <p:spPr>
           <a:xfrm>
-            <a:off x="640080" y="4084320"/>
-            <a:ext cx="10881360" cy="746760"/>
+            <a:off x="640080" y="3962400"/>
+            <a:ext cx="10881360" cy="908304"/>
           </a:xfrm>
           <a:prstGeom prst="rect">
             <a:avLst/>
@@ -3855,8 +3855,8 @@
         </p:nvSpPr>
         <p:spPr>
           <a:xfrm>
-            <a:off x="457200" y="5059680"/>
-            <a:ext cx="11247120" cy="1386840"/>
+            <a:off x="457200" y="5053584"/>
+            <a:ext cx="11247120" cy="1438656"/>
           </a:xfrm>
           <a:prstGeom prst="rect">
             <a:avLst/>
@@ -3897,8 +3897,8 @@
         </p:nvSpPr>
         <p:spPr>
           <a:xfrm>
-            <a:off x="640080" y="5151120"/>
-            <a:ext cx="10881360" cy="411480"/>
+            <a:off x="640080" y="5126736"/>
+            <a:ext cx="10881360" cy="384048"/>
           </a:xfrm>
           <a:prstGeom prst="rect">
             <a:avLst/>
@@ -3932,8 +3932,8 @@
         </p:nvSpPr>
         <p:spPr>
           <a:xfrm>
-            <a:off x="640080" y="5608320"/>
-            <a:ext cx="10881360" cy="746760"/>
+            <a:off x="640080" y="5529072"/>
+            <a:ext cx="10881360" cy="908304"/>
           </a:xfrm>
           <a:prstGeom prst="rect">
             <a:avLst/>
@@ -4137,8 +4137,8 @@
         </p:nvSpPr>
         <p:spPr>
           <a:xfrm>
-            <a:off x="457200" y="2011680"/>
-            <a:ext cx="1920240" cy="484631"/>
+            <a:off x="457200" y="1920240"/>
+            <a:ext cx="1920240" cy="369916"/>
           </a:xfrm>
           <a:prstGeom prst="rect">
             <a:avLst/>
@@ -4179,23 +4179,23 @@
         </p:nvSpPr>
         <p:spPr>
           <a:xfrm>
-            <a:off x="548640" y="2084832"/>
-            <a:ext cx="1828800" cy="347471"/>
-          </a:xfrm>
-          <a:prstGeom prst="rect">
-            <a:avLst/>
-          </a:prstGeom>
-          <a:noFill/>
-        </p:spPr>
-        <p:txBody>
-          <a:bodyPr wrap="square" lIns="45720" rIns="45720" tIns="18288" bIns="18288" anchor="t">
-            <a:spAutoFit/>
-          </a:bodyPr>
-          <a:lstStyle/>
-          <a:p>
-            <a:pPr algn="l"/>
-            <a:r>
-              <a:rPr sz="1300" b="1">
+            <a:off x="548640" y="1965960"/>
+            <a:ext cx="1828800" cy="324196"/>
+          </a:xfrm>
+          <a:prstGeom prst="rect">
+            <a:avLst/>
+          </a:prstGeom>
+          <a:noFill/>
+        </p:spPr>
+        <p:txBody>
+          <a:bodyPr wrap="square" lIns="45720" rIns="45720" tIns="18288" bIns="18288" anchor="ctr">
+            <a:spAutoFit/>
+          </a:bodyPr>
+          <a:lstStyle/>
+          <a:p>
+            <a:pPr algn="l"/>
+            <a:r>
+              <a:rPr sz="1200" b="1">
                 <a:solidFill>
                   <a:srgbClr val="8B1A1A"/>
                 </a:solidFill>
@@ -4214,23 +4214,23 @@
         </p:nvSpPr>
         <p:spPr>
           <a:xfrm>
-            <a:off x="2514600" y="2084832"/>
-            <a:ext cx="9601200" cy="438912"/>
-          </a:xfrm>
-          <a:prstGeom prst="rect">
-            <a:avLst/>
-          </a:prstGeom>
-          <a:noFill/>
-        </p:spPr>
-        <p:txBody>
-          <a:bodyPr wrap="square" lIns="45720" rIns="45720" tIns="18288" bIns="18288" anchor="t">
-            <a:spAutoFit/>
-          </a:bodyPr>
-          <a:lstStyle/>
-          <a:p>
-            <a:pPr algn="l"/>
-            <a:r>
-              <a:rPr sz="1300" b="0">
+            <a:off x="2514600" y="1965960"/>
+            <a:ext cx="9601200" cy="324196"/>
+          </a:xfrm>
+          <a:prstGeom prst="rect">
+            <a:avLst/>
+          </a:prstGeom>
+          <a:noFill/>
+        </p:spPr>
+        <p:txBody>
+          <a:bodyPr wrap="square" lIns="45720" rIns="45720" tIns="18288" bIns="18288" anchor="ctr">
+            <a:spAutoFit/>
+          </a:bodyPr>
+          <a:lstStyle/>
+          <a:p>
+            <a:pPr algn="l"/>
+            <a:r>
+              <a:rPr sz="1200" b="0">
                 <a:solidFill>
                   <a:srgbClr val="1F2A44"/>
                 </a:solidFill>
@@ -4249,8 +4249,8 @@
         </p:nvSpPr>
         <p:spPr>
           <a:xfrm>
-            <a:off x="457200" y="2542032"/>
-            <a:ext cx="1920240" cy="484631"/>
+            <a:off x="457200" y="2335876"/>
+            <a:ext cx="1920240" cy="369916"/>
           </a:xfrm>
           <a:prstGeom prst="rect">
             <a:avLst/>
@@ -4291,23 +4291,23 @@
         </p:nvSpPr>
         <p:spPr>
           <a:xfrm>
-            <a:off x="548640" y="2615184"/>
-            <a:ext cx="1828800" cy="347471"/>
-          </a:xfrm>
-          <a:prstGeom prst="rect">
-            <a:avLst/>
-          </a:prstGeom>
-          <a:noFill/>
-        </p:spPr>
-        <p:txBody>
-          <a:bodyPr wrap="square" lIns="45720" rIns="45720" tIns="18288" bIns="18288" anchor="t">
-            <a:spAutoFit/>
-          </a:bodyPr>
-          <a:lstStyle/>
-          <a:p>
-            <a:pPr algn="l"/>
-            <a:r>
-              <a:rPr sz="1300" b="1">
+            <a:off x="548640" y="2381596"/>
+            <a:ext cx="1828800" cy="324196"/>
+          </a:xfrm>
+          <a:prstGeom prst="rect">
+            <a:avLst/>
+          </a:prstGeom>
+          <a:noFill/>
+        </p:spPr>
+        <p:txBody>
+          <a:bodyPr wrap="square" lIns="45720" rIns="45720" tIns="18288" bIns="18288" anchor="ctr">
+            <a:spAutoFit/>
+          </a:bodyPr>
+          <a:lstStyle/>
+          <a:p>
+            <a:pPr algn="l"/>
+            <a:r>
+              <a:rPr sz="1200" b="1">
                 <a:solidFill>
                   <a:srgbClr val="8B1A1A"/>
                 </a:solidFill>
@@ -4326,23 +4326,23 @@
         </p:nvSpPr>
         <p:spPr>
           <a:xfrm>
-            <a:off x="2514600" y="2615184"/>
-            <a:ext cx="9601200" cy="438912"/>
-          </a:xfrm>
-          <a:prstGeom prst="rect">
-            <a:avLst/>
-          </a:prstGeom>
-          <a:noFill/>
-        </p:spPr>
-        <p:txBody>
-          <a:bodyPr wrap="square" lIns="45720" rIns="45720" tIns="18288" bIns="18288" anchor="t">
-            <a:spAutoFit/>
-          </a:bodyPr>
-          <a:lstStyle/>
-          <a:p>
-            <a:pPr algn="l"/>
-            <a:r>
-              <a:rPr sz="1300" b="0">
+            <a:off x="2514600" y="2381596"/>
+            <a:ext cx="9601200" cy="324196"/>
+          </a:xfrm>
+          <a:prstGeom prst="rect">
+            <a:avLst/>
+          </a:prstGeom>
+          <a:noFill/>
+        </p:spPr>
+        <p:txBody>
+          <a:bodyPr wrap="square" lIns="45720" rIns="45720" tIns="18288" bIns="18288" anchor="ctr">
+            <a:spAutoFit/>
+          </a:bodyPr>
+          <a:lstStyle/>
+          <a:p>
+            <a:pPr algn="l"/>
+            <a:r>
+              <a:rPr sz="1200" b="0">
                 <a:solidFill>
                   <a:srgbClr val="1F2A44"/>
                 </a:solidFill>
@@ -4361,8 +4361,8 @@
         </p:nvSpPr>
         <p:spPr>
           <a:xfrm>
-            <a:off x="457200" y="3072384"/>
-            <a:ext cx="1920240" cy="484631"/>
+            <a:off x="457200" y="2751512"/>
+            <a:ext cx="1920240" cy="369916"/>
           </a:xfrm>
           <a:prstGeom prst="rect">
             <a:avLst/>
@@ -4403,23 +4403,23 @@
         </p:nvSpPr>
         <p:spPr>
           <a:xfrm>
-            <a:off x="548640" y="3145536"/>
-            <a:ext cx="1828800" cy="347471"/>
-          </a:xfrm>
-          <a:prstGeom prst="rect">
-            <a:avLst/>
-          </a:prstGeom>
-          <a:noFill/>
-        </p:spPr>
-        <p:txBody>
-          <a:bodyPr wrap="square" lIns="45720" rIns="45720" tIns="18288" bIns="18288" anchor="t">
-            <a:spAutoFit/>
-          </a:bodyPr>
-          <a:lstStyle/>
-          <a:p>
-            <a:pPr algn="l"/>
-            <a:r>
-              <a:rPr sz="1300" b="1">
+            <a:off x="548640" y="2797232"/>
+            <a:ext cx="1828800" cy="324196"/>
+          </a:xfrm>
+          <a:prstGeom prst="rect">
+            <a:avLst/>
+          </a:prstGeom>
+          <a:noFill/>
+        </p:spPr>
+        <p:txBody>
+          <a:bodyPr wrap="square" lIns="45720" rIns="45720" tIns="18288" bIns="18288" anchor="ctr">
+            <a:spAutoFit/>
+          </a:bodyPr>
+          <a:lstStyle/>
+          <a:p>
+            <a:pPr algn="l"/>
+            <a:r>
+              <a:rPr sz="1200" b="1">
                 <a:solidFill>
                   <a:srgbClr val="8B1A1A"/>
                 </a:solidFill>
@@ -4438,23 +4438,23 @@
         </p:nvSpPr>
         <p:spPr>
           <a:xfrm>
-            <a:off x="2514600" y="3145536"/>
-            <a:ext cx="9601200" cy="438912"/>
-          </a:xfrm>
-          <a:prstGeom prst="rect">
-            <a:avLst/>
-          </a:prstGeom>
-          <a:noFill/>
-        </p:spPr>
-        <p:txBody>
-          <a:bodyPr wrap="square" lIns="45720" rIns="45720" tIns="18288" bIns="18288" anchor="t">
-            <a:spAutoFit/>
-          </a:bodyPr>
-          <a:lstStyle/>
-          <a:p>
-            <a:pPr algn="l"/>
-            <a:r>
-              <a:rPr sz="1300" b="0">
+            <a:off x="2514600" y="2797232"/>
+            <a:ext cx="9601200" cy="324196"/>
+          </a:xfrm>
+          <a:prstGeom prst="rect">
+            <a:avLst/>
+          </a:prstGeom>
+          <a:noFill/>
+        </p:spPr>
+        <p:txBody>
+          <a:bodyPr wrap="square" lIns="45720" rIns="45720" tIns="18288" bIns="18288" anchor="ctr">
+            <a:spAutoFit/>
+          </a:bodyPr>
+          <a:lstStyle/>
+          <a:p>
+            <a:pPr algn="l"/>
+            <a:r>
+              <a:rPr sz="1200" b="0">
                 <a:solidFill>
                   <a:srgbClr val="1F2A44"/>
                 </a:solidFill>
@@ -4473,8 +4473,8 @@
         </p:nvSpPr>
         <p:spPr>
           <a:xfrm>
-            <a:off x="457200" y="3602736"/>
-            <a:ext cx="1920240" cy="484631"/>
+            <a:off x="457200" y="3167149"/>
+            <a:ext cx="1920240" cy="369916"/>
           </a:xfrm>
           <a:prstGeom prst="rect">
             <a:avLst/>
@@ -4515,23 +4515,23 @@
         </p:nvSpPr>
         <p:spPr>
           <a:xfrm>
-            <a:off x="548640" y="3675887"/>
-            <a:ext cx="1828800" cy="347471"/>
-          </a:xfrm>
-          <a:prstGeom prst="rect">
-            <a:avLst/>
-          </a:prstGeom>
-          <a:noFill/>
-        </p:spPr>
-        <p:txBody>
-          <a:bodyPr wrap="square" lIns="45720" rIns="45720" tIns="18288" bIns="18288" anchor="t">
-            <a:spAutoFit/>
-          </a:bodyPr>
-          <a:lstStyle/>
-          <a:p>
-            <a:pPr algn="l"/>
-            <a:r>
-              <a:rPr sz="1300" b="1">
+            <a:off x="548640" y="3212869"/>
+            <a:ext cx="1828800" cy="324196"/>
+          </a:xfrm>
+          <a:prstGeom prst="rect">
+            <a:avLst/>
+          </a:prstGeom>
+          <a:noFill/>
+        </p:spPr>
+        <p:txBody>
+          <a:bodyPr wrap="square" lIns="45720" rIns="45720" tIns="18288" bIns="18288" anchor="ctr">
+            <a:spAutoFit/>
+          </a:bodyPr>
+          <a:lstStyle/>
+          <a:p>
+            <a:pPr algn="l"/>
+            <a:r>
+              <a:rPr sz="1200" b="1">
                 <a:solidFill>
                   <a:srgbClr val="8B1A1A"/>
                 </a:solidFill>
@@ -4550,23 +4550,23 @@
         </p:nvSpPr>
         <p:spPr>
           <a:xfrm>
-            <a:off x="2514600" y="3675887"/>
-            <a:ext cx="9601200" cy="438912"/>
-          </a:xfrm>
-          <a:prstGeom prst="rect">
-            <a:avLst/>
-          </a:prstGeom>
-          <a:noFill/>
-        </p:spPr>
-        <p:txBody>
-          <a:bodyPr wrap="square" lIns="45720" rIns="45720" tIns="18288" bIns="18288" anchor="t">
-            <a:spAutoFit/>
-          </a:bodyPr>
-          <a:lstStyle/>
-          <a:p>
-            <a:pPr algn="l"/>
-            <a:r>
-              <a:rPr sz="1300" b="0">
+            <a:off x="2514600" y="3212869"/>
+            <a:ext cx="9601200" cy="324196"/>
+          </a:xfrm>
+          <a:prstGeom prst="rect">
+            <a:avLst/>
+          </a:prstGeom>
+          <a:noFill/>
+        </p:spPr>
+        <p:txBody>
+          <a:bodyPr wrap="square" lIns="45720" rIns="45720" tIns="18288" bIns="18288" anchor="ctr">
+            <a:spAutoFit/>
+          </a:bodyPr>
+          <a:lstStyle/>
+          <a:p>
+            <a:pPr algn="l"/>
+            <a:r>
+              <a:rPr sz="1200" b="0">
                 <a:solidFill>
                   <a:srgbClr val="1F2A44"/>
                 </a:solidFill>
@@ -4585,8 +4585,8 @@
         </p:nvSpPr>
         <p:spPr>
           <a:xfrm>
-            <a:off x="457200" y="4133087"/>
-            <a:ext cx="1920240" cy="484631"/>
+            <a:off x="457200" y="3582785"/>
+            <a:ext cx="1920240" cy="369916"/>
           </a:xfrm>
           <a:prstGeom prst="rect">
             <a:avLst/>
@@ -4627,23 +4627,23 @@
         </p:nvSpPr>
         <p:spPr>
           <a:xfrm>
-            <a:off x="548640" y="4206240"/>
-            <a:ext cx="1828800" cy="347471"/>
-          </a:xfrm>
-          <a:prstGeom prst="rect">
-            <a:avLst/>
-          </a:prstGeom>
-          <a:noFill/>
-        </p:spPr>
-        <p:txBody>
-          <a:bodyPr wrap="square" lIns="45720" rIns="45720" tIns="18288" bIns="18288" anchor="t">
-            <a:spAutoFit/>
-          </a:bodyPr>
-          <a:lstStyle/>
-          <a:p>
-            <a:pPr algn="l"/>
-            <a:r>
-              <a:rPr sz="1300" b="1">
+            <a:off x="548640" y="3628505"/>
+            <a:ext cx="1828800" cy="324196"/>
+          </a:xfrm>
+          <a:prstGeom prst="rect">
+            <a:avLst/>
+          </a:prstGeom>
+          <a:noFill/>
+        </p:spPr>
+        <p:txBody>
+          <a:bodyPr wrap="square" lIns="45720" rIns="45720" tIns="18288" bIns="18288" anchor="ctr">
+            <a:spAutoFit/>
+          </a:bodyPr>
+          <a:lstStyle/>
+          <a:p>
+            <a:pPr algn="l"/>
+            <a:r>
+              <a:rPr sz="1200" b="1">
                 <a:solidFill>
                   <a:srgbClr val="8B1A1A"/>
                 </a:solidFill>
@@ -4662,23 +4662,23 @@
         </p:nvSpPr>
         <p:spPr>
           <a:xfrm>
-            <a:off x="2514600" y="4206240"/>
-            <a:ext cx="9601200" cy="438912"/>
-          </a:xfrm>
-          <a:prstGeom prst="rect">
-            <a:avLst/>
-          </a:prstGeom>
-          <a:noFill/>
-        </p:spPr>
-        <p:txBody>
-          <a:bodyPr wrap="square" lIns="45720" rIns="45720" tIns="18288" bIns="18288" anchor="t">
-            <a:spAutoFit/>
-          </a:bodyPr>
-          <a:lstStyle/>
-          <a:p>
-            <a:pPr algn="l"/>
-            <a:r>
-              <a:rPr sz="1300" b="0">
+            <a:off x="2514600" y="3628505"/>
+            <a:ext cx="9601200" cy="324196"/>
+          </a:xfrm>
+          <a:prstGeom prst="rect">
+            <a:avLst/>
+          </a:prstGeom>
+          <a:noFill/>
+        </p:spPr>
+        <p:txBody>
+          <a:bodyPr wrap="square" lIns="45720" rIns="45720" tIns="18288" bIns="18288" anchor="ctr">
+            <a:spAutoFit/>
+          </a:bodyPr>
+          <a:lstStyle/>
+          <a:p>
+            <a:pPr algn="l"/>
+            <a:r>
+              <a:rPr sz="1200" b="0">
                 <a:solidFill>
                   <a:srgbClr val="1F2A44"/>
                 </a:solidFill>
@@ -4697,8 +4697,8 @@
         </p:nvSpPr>
         <p:spPr>
           <a:xfrm>
-            <a:off x="457200" y="4663440"/>
-            <a:ext cx="1920240" cy="484631"/>
+            <a:off x="457200" y="3998421"/>
+            <a:ext cx="1920240" cy="369916"/>
           </a:xfrm>
           <a:prstGeom prst="rect">
             <a:avLst/>
@@ -4739,23 +4739,23 @@
         </p:nvSpPr>
         <p:spPr>
           <a:xfrm>
-            <a:off x="548640" y="4736592"/>
-            <a:ext cx="1828800" cy="347471"/>
-          </a:xfrm>
-          <a:prstGeom prst="rect">
-            <a:avLst/>
-          </a:prstGeom>
-          <a:noFill/>
-        </p:spPr>
-        <p:txBody>
-          <a:bodyPr wrap="square" lIns="45720" rIns="45720" tIns="18288" bIns="18288" anchor="t">
-            <a:spAutoFit/>
-          </a:bodyPr>
-          <a:lstStyle/>
-          <a:p>
-            <a:pPr algn="l"/>
-            <a:r>
-              <a:rPr sz="1300" b="1">
+            <a:off x="548640" y="4044141"/>
+            <a:ext cx="1828800" cy="324196"/>
+          </a:xfrm>
+          <a:prstGeom prst="rect">
+            <a:avLst/>
+          </a:prstGeom>
+          <a:noFill/>
+        </p:spPr>
+        <p:txBody>
+          <a:bodyPr wrap="square" lIns="45720" rIns="45720" tIns="18288" bIns="18288" anchor="ctr">
+            <a:spAutoFit/>
+          </a:bodyPr>
+          <a:lstStyle/>
+          <a:p>
+            <a:pPr algn="l"/>
+            <a:r>
+              <a:rPr sz="1200" b="1">
                 <a:solidFill>
                   <a:srgbClr val="8B1A1A"/>
                 </a:solidFill>
@@ -4774,23 +4774,23 @@
         </p:nvSpPr>
         <p:spPr>
           <a:xfrm>
-            <a:off x="2514600" y="4736592"/>
-            <a:ext cx="9601200" cy="438912"/>
-          </a:xfrm>
-          <a:prstGeom prst="rect">
-            <a:avLst/>
-          </a:prstGeom>
-          <a:noFill/>
-        </p:spPr>
-        <p:txBody>
-          <a:bodyPr wrap="square" lIns="45720" rIns="45720" tIns="18288" bIns="18288" anchor="t">
-            <a:spAutoFit/>
-          </a:bodyPr>
-          <a:lstStyle/>
-          <a:p>
-            <a:pPr algn="l"/>
-            <a:r>
-              <a:rPr sz="1300" b="0">
+            <a:off x="2514600" y="4044141"/>
+            <a:ext cx="9601200" cy="324196"/>
+          </a:xfrm>
+          <a:prstGeom prst="rect">
+            <a:avLst/>
+          </a:prstGeom>
+          <a:noFill/>
+        </p:spPr>
+        <p:txBody>
+          <a:bodyPr wrap="square" lIns="45720" rIns="45720" tIns="18288" bIns="18288" anchor="ctr">
+            <a:spAutoFit/>
+          </a:bodyPr>
+          <a:lstStyle/>
+          <a:p>
+            <a:pPr algn="l"/>
+            <a:r>
+              <a:rPr sz="1200" b="0">
                 <a:solidFill>
                   <a:srgbClr val="1F2A44"/>
                 </a:solidFill>
@@ -4809,8 +4809,8 @@
         </p:nvSpPr>
         <p:spPr>
           <a:xfrm>
-            <a:off x="457200" y="5193792"/>
-            <a:ext cx="1920240" cy="484631"/>
+            <a:off x="457200" y="4414058"/>
+            <a:ext cx="1920240" cy="369916"/>
           </a:xfrm>
           <a:prstGeom prst="rect">
             <a:avLst/>
@@ -4851,23 +4851,23 @@
         </p:nvSpPr>
         <p:spPr>
           <a:xfrm>
-            <a:off x="548640" y="5266944"/>
-            <a:ext cx="1828800" cy="347471"/>
-          </a:xfrm>
-          <a:prstGeom prst="rect">
-            <a:avLst/>
-          </a:prstGeom>
-          <a:noFill/>
-        </p:spPr>
-        <p:txBody>
-          <a:bodyPr wrap="square" lIns="45720" rIns="45720" tIns="18288" bIns="18288" anchor="t">
-            <a:spAutoFit/>
-          </a:bodyPr>
-          <a:lstStyle/>
-          <a:p>
-            <a:pPr algn="l"/>
-            <a:r>
-              <a:rPr sz="1300" b="1">
+            <a:off x="548640" y="4459778"/>
+            <a:ext cx="1828800" cy="324196"/>
+          </a:xfrm>
+          <a:prstGeom prst="rect">
+            <a:avLst/>
+          </a:prstGeom>
+          <a:noFill/>
+        </p:spPr>
+        <p:txBody>
+          <a:bodyPr wrap="square" lIns="45720" rIns="45720" tIns="18288" bIns="18288" anchor="ctr">
+            <a:spAutoFit/>
+          </a:bodyPr>
+          <a:lstStyle/>
+          <a:p>
+            <a:pPr algn="l"/>
+            <a:r>
+              <a:rPr sz="1200" b="1">
                 <a:solidFill>
                   <a:srgbClr val="8B1A1A"/>
                 </a:solidFill>
@@ -4886,23 +4886,23 @@
         </p:nvSpPr>
         <p:spPr>
           <a:xfrm>
-            <a:off x="2514600" y="5266944"/>
-            <a:ext cx="9601200" cy="438912"/>
-          </a:xfrm>
-          <a:prstGeom prst="rect">
-            <a:avLst/>
-          </a:prstGeom>
-          <a:noFill/>
-        </p:spPr>
-        <p:txBody>
-          <a:bodyPr wrap="square" lIns="45720" rIns="45720" tIns="18288" bIns="18288" anchor="t">
-            <a:spAutoFit/>
-          </a:bodyPr>
-          <a:lstStyle/>
-          <a:p>
-            <a:pPr algn="l"/>
-            <a:r>
-              <a:rPr sz="1300" b="0">
+            <a:off x="2514600" y="4459778"/>
+            <a:ext cx="9601200" cy="324196"/>
+          </a:xfrm>
+          <a:prstGeom prst="rect">
+            <a:avLst/>
+          </a:prstGeom>
+          <a:noFill/>
+        </p:spPr>
+        <p:txBody>
+          <a:bodyPr wrap="square" lIns="45720" rIns="45720" tIns="18288" bIns="18288" anchor="ctr">
+            <a:spAutoFit/>
+          </a:bodyPr>
+          <a:lstStyle/>
+          <a:p>
+            <a:pPr algn="l"/>
+            <a:r>
+              <a:rPr sz="1200" b="0">
                 <a:solidFill>
                   <a:srgbClr val="1F2A44"/>
                 </a:solidFill>
@@ -4921,8 +4921,8 @@
         </p:nvSpPr>
         <p:spPr>
           <a:xfrm>
-            <a:off x="457200" y="5724144"/>
-            <a:ext cx="1920240" cy="484631"/>
+            <a:off x="457200" y="4829694"/>
+            <a:ext cx="1920240" cy="369916"/>
           </a:xfrm>
           <a:prstGeom prst="rect">
             <a:avLst/>
@@ -4963,23 +4963,23 @@
         </p:nvSpPr>
         <p:spPr>
           <a:xfrm>
-            <a:off x="548640" y="5797296"/>
-            <a:ext cx="1828800" cy="347471"/>
-          </a:xfrm>
-          <a:prstGeom prst="rect">
-            <a:avLst/>
-          </a:prstGeom>
-          <a:noFill/>
-        </p:spPr>
-        <p:txBody>
-          <a:bodyPr wrap="square" lIns="45720" rIns="45720" tIns="18288" bIns="18288" anchor="t">
-            <a:spAutoFit/>
-          </a:bodyPr>
-          <a:lstStyle/>
-          <a:p>
-            <a:pPr algn="l"/>
-            <a:r>
-              <a:rPr sz="1300" b="1">
+            <a:off x="548640" y="4875414"/>
+            <a:ext cx="1828800" cy="324196"/>
+          </a:xfrm>
+          <a:prstGeom prst="rect">
+            <a:avLst/>
+          </a:prstGeom>
+          <a:noFill/>
+        </p:spPr>
+        <p:txBody>
+          <a:bodyPr wrap="square" lIns="45720" rIns="45720" tIns="18288" bIns="18288" anchor="ctr">
+            <a:spAutoFit/>
+          </a:bodyPr>
+          <a:lstStyle/>
+          <a:p>
+            <a:pPr algn="l"/>
+            <a:r>
+              <a:rPr sz="1200" b="1">
                 <a:solidFill>
                   <a:srgbClr val="8B1A1A"/>
                 </a:solidFill>
@@ -4998,23 +4998,23 @@
         </p:nvSpPr>
         <p:spPr>
           <a:xfrm>
-            <a:off x="2514600" y="5797296"/>
-            <a:ext cx="9601200" cy="438912"/>
-          </a:xfrm>
-          <a:prstGeom prst="rect">
-            <a:avLst/>
-          </a:prstGeom>
-          <a:noFill/>
-        </p:spPr>
-        <p:txBody>
-          <a:bodyPr wrap="square" lIns="45720" rIns="45720" tIns="18288" bIns="18288" anchor="t">
-            <a:spAutoFit/>
-          </a:bodyPr>
-          <a:lstStyle/>
-          <a:p>
-            <a:pPr algn="l"/>
-            <a:r>
-              <a:rPr sz="1300" b="0">
+            <a:off x="2514600" y="4875414"/>
+            <a:ext cx="9601200" cy="324196"/>
+          </a:xfrm>
+          <a:prstGeom prst="rect">
+            <a:avLst/>
+          </a:prstGeom>
+          <a:noFill/>
+        </p:spPr>
+        <p:txBody>
+          <a:bodyPr wrap="square" lIns="45720" rIns="45720" tIns="18288" bIns="18288" anchor="ctr">
+            <a:spAutoFit/>
+          </a:bodyPr>
+          <a:lstStyle/>
+          <a:p>
+            <a:pPr algn="l"/>
+            <a:r>
+              <a:rPr sz="1200" b="0">
                 <a:solidFill>
                   <a:srgbClr val="1F2A44"/>
                 </a:solidFill>
@@ -5033,8 +5033,8 @@
         </p:nvSpPr>
         <p:spPr>
           <a:xfrm>
-            <a:off x="457200" y="6254496"/>
-            <a:ext cx="1920240" cy="484631"/>
+            <a:off x="457200" y="5245330"/>
+            <a:ext cx="1920240" cy="369916"/>
           </a:xfrm>
           <a:prstGeom prst="rect">
             <a:avLst/>
@@ -5075,23 +5075,23 @@
         </p:nvSpPr>
         <p:spPr>
           <a:xfrm>
-            <a:off x="548640" y="6327648"/>
-            <a:ext cx="1828800" cy="347471"/>
-          </a:xfrm>
-          <a:prstGeom prst="rect">
-            <a:avLst/>
-          </a:prstGeom>
-          <a:noFill/>
-        </p:spPr>
-        <p:txBody>
-          <a:bodyPr wrap="square" lIns="45720" rIns="45720" tIns="18288" bIns="18288" anchor="t">
-            <a:spAutoFit/>
-          </a:bodyPr>
-          <a:lstStyle/>
-          <a:p>
-            <a:pPr algn="l"/>
-            <a:r>
-              <a:rPr sz="1300" b="1">
+            <a:off x="548640" y="5291050"/>
+            <a:ext cx="1828800" cy="324196"/>
+          </a:xfrm>
+          <a:prstGeom prst="rect">
+            <a:avLst/>
+          </a:prstGeom>
+          <a:noFill/>
+        </p:spPr>
+        <p:txBody>
+          <a:bodyPr wrap="square" lIns="45720" rIns="45720" tIns="18288" bIns="18288" anchor="ctr">
+            <a:spAutoFit/>
+          </a:bodyPr>
+          <a:lstStyle/>
+          <a:p>
+            <a:pPr algn="l"/>
+            <a:r>
+              <a:rPr sz="1200" b="1">
                 <a:solidFill>
                   <a:srgbClr val="8B1A1A"/>
                 </a:solidFill>
@@ -5110,23 +5110,23 @@
         </p:nvSpPr>
         <p:spPr>
           <a:xfrm>
-            <a:off x="2514600" y="6327648"/>
-            <a:ext cx="9601200" cy="438912"/>
-          </a:xfrm>
-          <a:prstGeom prst="rect">
-            <a:avLst/>
-          </a:prstGeom>
-          <a:noFill/>
-        </p:spPr>
-        <p:txBody>
-          <a:bodyPr wrap="square" lIns="45720" rIns="45720" tIns="18288" bIns="18288" anchor="t">
-            <a:spAutoFit/>
-          </a:bodyPr>
-          <a:lstStyle/>
-          <a:p>
-            <a:pPr algn="l"/>
-            <a:r>
-              <a:rPr sz="1300" b="0">
+            <a:off x="2514600" y="5291050"/>
+            <a:ext cx="9601200" cy="324196"/>
+          </a:xfrm>
+          <a:prstGeom prst="rect">
+            <a:avLst/>
+          </a:prstGeom>
+          <a:noFill/>
+        </p:spPr>
+        <p:txBody>
+          <a:bodyPr wrap="square" lIns="45720" rIns="45720" tIns="18288" bIns="18288" anchor="ctr">
+            <a:spAutoFit/>
+          </a:bodyPr>
+          <a:lstStyle/>
+          <a:p>
+            <a:pPr algn="l"/>
+            <a:r>
+              <a:rPr sz="1200" b="0">
                 <a:solidFill>
                   <a:srgbClr val="1F2A44"/>
                 </a:solidFill>
@@ -5145,8 +5145,8 @@
         </p:nvSpPr>
         <p:spPr>
           <a:xfrm>
-            <a:off x="457200" y="6784848"/>
-            <a:ext cx="1920240" cy="484631"/>
+            <a:off x="457200" y="5660967"/>
+            <a:ext cx="1920240" cy="369916"/>
           </a:xfrm>
           <a:prstGeom prst="rect">
             <a:avLst/>
@@ -5187,23 +5187,23 @@
         </p:nvSpPr>
         <p:spPr>
           <a:xfrm>
-            <a:off x="548640" y="6858000"/>
-            <a:ext cx="1828800" cy="347471"/>
-          </a:xfrm>
-          <a:prstGeom prst="rect">
-            <a:avLst/>
-          </a:prstGeom>
-          <a:noFill/>
-        </p:spPr>
-        <p:txBody>
-          <a:bodyPr wrap="square" lIns="45720" rIns="45720" tIns="18288" bIns="18288" anchor="t">
-            <a:spAutoFit/>
-          </a:bodyPr>
-          <a:lstStyle/>
-          <a:p>
-            <a:pPr algn="l"/>
-            <a:r>
-              <a:rPr sz="1300" b="1">
+            <a:off x="548640" y="5706687"/>
+            <a:ext cx="1828800" cy="324196"/>
+          </a:xfrm>
+          <a:prstGeom prst="rect">
+            <a:avLst/>
+          </a:prstGeom>
+          <a:noFill/>
+        </p:spPr>
+        <p:txBody>
+          <a:bodyPr wrap="square" lIns="45720" rIns="45720" tIns="18288" bIns="18288" anchor="ctr">
+            <a:spAutoFit/>
+          </a:bodyPr>
+          <a:lstStyle/>
+          <a:p>
+            <a:pPr algn="l"/>
+            <a:r>
+              <a:rPr sz="1200" b="1">
                 <a:solidFill>
                   <a:srgbClr val="8B1A1A"/>
                 </a:solidFill>
@@ -5222,23 +5222,23 @@
         </p:nvSpPr>
         <p:spPr>
           <a:xfrm>
-            <a:off x="2514600" y="6858000"/>
-            <a:ext cx="9601200" cy="438912"/>
-          </a:xfrm>
-          <a:prstGeom prst="rect">
-            <a:avLst/>
-          </a:prstGeom>
-          <a:noFill/>
-        </p:spPr>
-        <p:txBody>
-          <a:bodyPr wrap="square" lIns="45720" rIns="45720" tIns="18288" bIns="18288" anchor="t">
-            <a:spAutoFit/>
-          </a:bodyPr>
-          <a:lstStyle/>
-          <a:p>
-            <a:pPr algn="l"/>
-            <a:r>
-              <a:rPr sz="1300" b="0">
+            <a:off x="2514600" y="5706687"/>
+            <a:ext cx="9601200" cy="324196"/>
+          </a:xfrm>
+          <a:prstGeom prst="rect">
+            <a:avLst/>
+          </a:prstGeom>
+          <a:noFill/>
+        </p:spPr>
+        <p:txBody>
+          <a:bodyPr wrap="square" lIns="45720" rIns="45720" tIns="18288" bIns="18288" anchor="ctr">
+            <a:spAutoFit/>
+          </a:bodyPr>
+          <a:lstStyle/>
+          <a:p>
+            <a:pPr algn="l"/>
+            <a:r>
+              <a:rPr sz="1200" b="0">
                 <a:solidFill>
                   <a:srgbClr val="1F2A44"/>
                 </a:solidFill>
@@ -5257,8 +5257,8 @@
         </p:nvSpPr>
         <p:spPr>
           <a:xfrm>
-            <a:off x="457200" y="7315200"/>
-            <a:ext cx="1920240" cy="484631"/>
+            <a:off x="457200" y="6076603"/>
+            <a:ext cx="1920240" cy="369916"/>
           </a:xfrm>
           <a:prstGeom prst="rect">
             <a:avLst/>
@@ -5299,23 +5299,23 @@
         </p:nvSpPr>
         <p:spPr>
           <a:xfrm>
-            <a:off x="548640" y="7388352"/>
-            <a:ext cx="1828800" cy="347471"/>
-          </a:xfrm>
-          <a:prstGeom prst="rect">
-            <a:avLst/>
-          </a:prstGeom>
-          <a:noFill/>
-        </p:spPr>
-        <p:txBody>
-          <a:bodyPr wrap="square" lIns="45720" rIns="45720" tIns="18288" bIns="18288" anchor="t">
-            <a:spAutoFit/>
-          </a:bodyPr>
-          <a:lstStyle/>
-          <a:p>
-            <a:pPr algn="l"/>
-            <a:r>
-              <a:rPr sz="1300" b="1">
+            <a:off x="548640" y="6122323"/>
+            <a:ext cx="1828800" cy="324196"/>
+          </a:xfrm>
+          <a:prstGeom prst="rect">
+            <a:avLst/>
+          </a:prstGeom>
+          <a:noFill/>
+        </p:spPr>
+        <p:txBody>
+          <a:bodyPr wrap="square" lIns="45720" rIns="45720" tIns="18288" bIns="18288" anchor="ctr">
+            <a:spAutoFit/>
+          </a:bodyPr>
+          <a:lstStyle/>
+          <a:p>
+            <a:pPr algn="l"/>
+            <a:r>
+              <a:rPr sz="1200" b="1">
                 <a:solidFill>
                   <a:srgbClr val="8B1A1A"/>
                 </a:solidFill>
@@ -5334,23 +5334,23 @@
         </p:nvSpPr>
         <p:spPr>
           <a:xfrm>
-            <a:off x="2514600" y="7388352"/>
-            <a:ext cx="9601200" cy="438912"/>
-          </a:xfrm>
-          <a:prstGeom prst="rect">
-            <a:avLst/>
-          </a:prstGeom>
-          <a:noFill/>
-        </p:spPr>
-        <p:txBody>
-          <a:bodyPr wrap="square" lIns="45720" rIns="45720" tIns="18288" bIns="18288" anchor="t">
-            <a:spAutoFit/>
-          </a:bodyPr>
-          <a:lstStyle/>
-          <a:p>
-            <a:pPr algn="l"/>
-            <a:r>
-              <a:rPr sz="1300" b="0">
+            <a:off x="2514600" y="6122323"/>
+            <a:ext cx="9601200" cy="324196"/>
+          </a:xfrm>
+          <a:prstGeom prst="rect">
+            <a:avLst/>
+          </a:prstGeom>
+          <a:noFill/>
+        </p:spPr>
+        <p:txBody>
+          <a:bodyPr wrap="square" lIns="45720" rIns="45720" tIns="18288" bIns="18288" anchor="ctr">
+            <a:spAutoFit/>
+          </a:bodyPr>
+          <a:lstStyle/>
+          <a:p>
+            <a:pPr algn="l"/>
+            <a:r>
+              <a:rPr sz="1200" b="0">
                 <a:solidFill>
                   <a:srgbClr val="1F2A44"/>
                 </a:solidFill>
@@ -5527,8 +5527,8 @@
         </p:nvSpPr>
         <p:spPr>
           <a:xfrm>
-            <a:off x="457200" y="2011680"/>
-            <a:ext cx="11247120" cy="1386840"/>
+            <a:off x="457200" y="1920240"/>
+            <a:ext cx="11247120" cy="1438656"/>
           </a:xfrm>
           <a:prstGeom prst="rect">
             <a:avLst/>
@@ -5569,8 +5569,8 @@
         </p:nvSpPr>
         <p:spPr>
           <a:xfrm>
-            <a:off x="640080" y="2103120"/>
-            <a:ext cx="10881360" cy="411480"/>
+            <a:off x="640080" y="1993392"/>
+            <a:ext cx="10881360" cy="384048"/>
           </a:xfrm>
           <a:prstGeom prst="rect">
             <a:avLst/>
@@ -5604,8 +5604,8 @@
         </p:nvSpPr>
         <p:spPr>
           <a:xfrm>
-            <a:off x="640080" y="2560320"/>
-            <a:ext cx="10881360" cy="746760"/>
+            <a:off x="640080" y="2395728"/>
+            <a:ext cx="10881360" cy="908304"/>
           </a:xfrm>
           <a:prstGeom prst="rect">
             <a:avLst/>
@@ -5675,8 +5675,8 @@
         </p:nvSpPr>
         <p:spPr>
           <a:xfrm>
-            <a:off x="457200" y="3535680"/>
-            <a:ext cx="11247120" cy="1386840"/>
+            <a:off x="457200" y="3486912"/>
+            <a:ext cx="11247120" cy="1438656"/>
           </a:xfrm>
           <a:prstGeom prst="rect">
             <a:avLst/>
@@ -5717,8 +5717,8 @@
         </p:nvSpPr>
         <p:spPr>
           <a:xfrm>
-            <a:off x="640080" y="3627120"/>
-            <a:ext cx="10881360" cy="411480"/>
+            <a:off x="640080" y="3560064"/>
+            <a:ext cx="10881360" cy="384048"/>
           </a:xfrm>
           <a:prstGeom prst="rect">
             <a:avLst/>
@@ -5752,8 +5752,8 @@
         </p:nvSpPr>
         <p:spPr>
           <a:xfrm>
-            <a:off x="640080" y="4084320"/>
-            <a:ext cx="10881360" cy="746760"/>
+            <a:off x="640080" y="3962400"/>
+            <a:ext cx="10881360" cy="908304"/>
           </a:xfrm>
           <a:prstGeom prst="rect">
             <a:avLst/>
@@ -5811,8 +5811,8 @@
         </p:nvSpPr>
         <p:spPr>
           <a:xfrm>
-            <a:off x="457200" y="5059680"/>
-            <a:ext cx="11247120" cy="1386840"/>
+            <a:off x="457200" y="5053584"/>
+            <a:ext cx="11247120" cy="1438656"/>
           </a:xfrm>
           <a:prstGeom prst="rect">
             <a:avLst/>
@@ -5853,8 +5853,8 @@
         </p:nvSpPr>
         <p:spPr>
           <a:xfrm>
-            <a:off x="640080" y="5151120"/>
-            <a:ext cx="10881360" cy="411480"/>
+            <a:off x="640080" y="5126736"/>
+            <a:ext cx="10881360" cy="384048"/>
           </a:xfrm>
           <a:prstGeom prst="rect">
             <a:avLst/>
@@ -5888,8 +5888,8 @@
         </p:nvSpPr>
         <p:spPr>
           <a:xfrm>
-            <a:off x="640080" y="5608320"/>
-            <a:ext cx="10881360" cy="746760"/>
+            <a:off x="640080" y="5529072"/>
+            <a:ext cx="10881360" cy="908304"/>
           </a:xfrm>
           <a:prstGeom prst="rect">
             <a:avLst/>
@@ -6093,8 +6093,8 @@
         </p:nvSpPr>
         <p:spPr>
           <a:xfrm>
-            <a:off x="457200" y="2011680"/>
-            <a:ext cx="11247120" cy="1386840"/>
+            <a:off x="457200" y="1920240"/>
+            <a:ext cx="11247120" cy="1438656"/>
           </a:xfrm>
           <a:prstGeom prst="rect">
             <a:avLst/>
@@ -6135,8 +6135,8 @@
         </p:nvSpPr>
         <p:spPr>
           <a:xfrm>
-            <a:off x="640080" y="2103120"/>
-            <a:ext cx="10881360" cy="411480"/>
+            <a:off x="640080" y="1993392"/>
+            <a:ext cx="10881360" cy="384048"/>
           </a:xfrm>
           <a:prstGeom prst="rect">
             <a:avLst/>
@@ -6170,8 +6170,8 @@
         </p:nvSpPr>
         <p:spPr>
           <a:xfrm>
-            <a:off x="640080" y="2560320"/>
-            <a:ext cx="10881360" cy="746760"/>
+            <a:off x="640080" y="2395728"/>
+            <a:ext cx="10881360" cy="908304"/>
           </a:xfrm>
           <a:prstGeom prst="rect">
             <a:avLst/>
@@ -6229,8 +6229,8 @@
         </p:nvSpPr>
         <p:spPr>
           <a:xfrm>
-            <a:off x="457200" y="3535680"/>
-            <a:ext cx="11247120" cy="1386840"/>
+            <a:off x="457200" y="3486912"/>
+            <a:ext cx="11247120" cy="1438656"/>
           </a:xfrm>
           <a:prstGeom prst="rect">
             <a:avLst/>
@@ -6271,8 +6271,8 @@
         </p:nvSpPr>
         <p:spPr>
           <a:xfrm>
-            <a:off x="640080" y="3627120"/>
-            <a:ext cx="10881360" cy="411480"/>
+            <a:off x="640080" y="3560064"/>
+            <a:ext cx="10881360" cy="384048"/>
           </a:xfrm>
           <a:prstGeom prst="rect">
             <a:avLst/>
@@ -6306,8 +6306,8 @@
         </p:nvSpPr>
         <p:spPr>
           <a:xfrm>
-            <a:off x="640080" y="4084320"/>
-            <a:ext cx="10881360" cy="746760"/>
+            <a:off x="640080" y="3962400"/>
+            <a:ext cx="10881360" cy="908304"/>
           </a:xfrm>
           <a:prstGeom prst="rect">
             <a:avLst/>
@@ -6353,8 +6353,8 @@
         </p:nvSpPr>
         <p:spPr>
           <a:xfrm>
-            <a:off x="457200" y="5059680"/>
-            <a:ext cx="11247120" cy="1386840"/>
+            <a:off x="457200" y="5053584"/>
+            <a:ext cx="11247120" cy="1438656"/>
           </a:xfrm>
           <a:prstGeom prst="rect">
             <a:avLst/>
@@ -6395,8 +6395,8 @@
         </p:nvSpPr>
         <p:spPr>
           <a:xfrm>
-            <a:off x="640080" y="5151120"/>
-            <a:ext cx="10881360" cy="411480"/>
+            <a:off x="640080" y="5126736"/>
+            <a:ext cx="10881360" cy="384048"/>
           </a:xfrm>
           <a:prstGeom prst="rect">
             <a:avLst/>
@@ -6430,8 +6430,8 @@
         </p:nvSpPr>
         <p:spPr>
           <a:xfrm>
-            <a:off x="640080" y="5608320"/>
-            <a:ext cx="10881360" cy="746760"/>
+            <a:off x="640080" y="5529072"/>
+            <a:ext cx="10881360" cy="908304"/>
           </a:xfrm>
           <a:prstGeom prst="rect">
             <a:avLst/>
@@ -6647,8 +6647,8 @@
         </p:nvSpPr>
         <p:spPr>
           <a:xfrm>
-            <a:off x="457200" y="2011680"/>
-            <a:ext cx="11247120" cy="1386840"/>
+            <a:off x="457200" y="1920240"/>
+            <a:ext cx="11247120" cy="1438656"/>
           </a:xfrm>
           <a:prstGeom prst="rect">
             <a:avLst/>
@@ -6689,8 +6689,8 @@
         </p:nvSpPr>
         <p:spPr>
           <a:xfrm>
-            <a:off x="640080" y="2103120"/>
-            <a:ext cx="10881360" cy="411480"/>
+            <a:off x="640080" y="1993392"/>
+            <a:ext cx="10881360" cy="384048"/>
           </a:xfrm>
           <a:prstGeom prst="rect">
             <a:avLst/>
@@ -6724,8 +6724,8 @@
         </p:nvSpPr>
         <p:spPr>
           <a:xfrm>
-            <a:off x="640080" y="2560320"/>
-            <a:ext cx="10881360" cy="746760"/>
+            <a:off x="640080" y="2395728"/>
+            <a:ext cx="10881360" cy="908304"/>
           </a:xfrm>
           <a:prstGeom prst="rect">
             <a:avLst/>
@@ -6783,8 +6783,8 @@
         </p:nvSpPr>
         <p:spPr>
           <a:xfrm>
-            <a:off x="457200" y="3535680"/>
-            <a:ext cx="11247120" cy="1386840"/>
+            <a:off x="457200" y="3486912"/>
+            <a:ext cx="11247120" cy="1438656"/>
           </a:xfrm>
           <a:prstGeom prst="rect">
             <a:avLst/>
@@ -6825,8 +6825,8 @@
         </p:nvSpPr>
         <p:spPr>
           <a:xfrm>
-            <a:off x="640080" y="3627120"/>
-            <a:ext cx="10881360" cy="411480"/>
+            <a:off x="640080" y="3560064"/>
+            <a:ext cx="10881360" cy="384048"/>
           </a:xfrm>
           <a:prstGeom prst="rect">
             <a:avLst/>
@@ -6860,8 +6860,8 @@
         </p:nvSpPr>
         <p:spPr>
           <a:xfrm>
-            <a:off x="640080" y="4084320"/>
-            <a:ext cx="10881360" cy="746760"/>
+            <a:off x="640080" y="3962400"/>
+            <a:ext cx="10881360" cy="908304"/>
           </a:xfrm>
           <a:prstGeom prst="rect">
             <a:avLst/>
@@ -6919,8 +6919,8 @@
         </p:nvSpPr>
         <p:spPr>
           <a:xfrm>
-            <a:off x="457200" y="5059680"/>
-            <a:ext cx="11247120" cy="1386840"/>
+            <a:off x="457200" y="5053584"/>
+            <a:ext cx="11247120" cy="1438656"/>
           </a:xfrm>
           <a:prstGeom prst="rect">
             <a:avLst/>
@@ -6961,8 +6961,8 @@
         </p:nvSpPr>
         <p:spPr>
           <a:xfrm>
-            <a:off x="640080" y="5151120"/>
-            <a:ext cx="10881360" cy="411480"/>
+            <a:off x="640080" y="5126736"/>
+            <a:ext cx="10881360" cy="384048"/>
           </a:xfrm>
           <a:prstGeom prst="rect">
             <a:avLst/>
@@ -6996,8 +6996,8 @@
         </p:nvSpPr>
         <p:spPr>
           <a:xfrm>
-            <a:off x="640080" y="5608320"/>
-            <a:ext cx="10881360" cy="746760"/>
+            <a:off x="640080" y="5529072"/>
+            <a:ext cx="10881360" cy="908304"/>
           </a:xfrm>
           <a:prstGeom prst="rect">
             <a:avLst/>
@@ -7213,8 +7213,8 @@
         </p:nvSpPr>
         <p:spPr>
           <a:xfrm>
-            <a:off x="457200" y="2011680"/>
-            <a:ext cx="11247120" cy="1386840"/>
+            <a:off x="457200" y="1920240"/>
+            <a:ext cx="11247120" cy="1438656"/>
           </a:xfrm>
           <a:prstGeom prst="rect">
             <a:avLst/>
@@ -7255,8 +7255,8 @@
         </p:nvSpPr>
         <p:spPr>
           <a:xfrm>
-            <a:off x="640080" y="2103120"/>
-            <a:ext cx="10881360" cy="411480"/>
+            <a:off x="640080" y="1993392"/>
+            <a:ext cx="10881360" cy="384048"/>
           </a:xfrm>
           <a:prstGeom prst="rect">
             <a:avLst/>
@@ -7290,8 +7290,8 @@
         </p:nvSpPr>
         <p:spPr>
           <a:xfrm>
-            <a:off x="640080" y="2560320"/>
-            <a:ext cx="10881360" cy="746760"/>
+            <a:off x="640080" y="2395728"/>
+            <a:ext cx="10881360" cy="908304"/>
           </a:xfrm>
           <a:prstGeom prst="rect">
             <a:avLst/>
@@ -7337,8 +7337,8 @@
         </p:nvSpPr>
         <p:spPr>
           <a:xfrm>
-            <a:off x="457200" y="3535680"/>
-            <a:ext cx="11247120" cy="1386840"/>
+            <a:off x="457200" y="3486912"/>
+            <a:ext cx="11247120" cy="1438656"/>
           </a:xfrm>
           <a:prstGeom prst="rect">
             <a:avLst/>
@@ -7379,8 +7379,8 @@
         </p:nvSpPr>
         <p:spPr>
           <a:xfrm>
-            <a:off x="640080" y="3627120"/>
-            <a:ext cx="10881360" cy="411480"/>
+            <a:off x="640080" y="3560064"/>
+            <a:ext cx="10881360" cy="384048"/>
           </a:xfrm>
           <a:prstGeom prst="rect">
             <a:avLst/>
@@ -7414,8 +7414,8 @@
         </p:nvSpPr>
         <p:spPr>
           <a:xfrm>
-            <a:off x="640080" y="4084320"/>
-            <a:ext cx="10881360" cy="746760"/>
+            <a:off x="640080" y="3962400"/>
+            <a:ext cx="10881360" cy="908304"/>
           </a:xfrm>
           <a:prstGeom prst="rect">
             <a:avLst/>
@@ -7461,8 +7461,8 @@
         </p:nvSpPr>
         <p:spPr>
           <a:xfrm>
-            <a:off x="457200" y="5059680"/>
-            <a:ext cx="11247120" cy="1386840"/>
+            <a:off x="457200" y="5053584"/>
+            <a:ext cx="11247120" cy="1438656"/>
           </a:xfrm>
           <a:prstGeom prst="rect">
             <a:avLst/>
@@ -7503,8 +7503,8 @@
         </p:nvSpPr>
         <p:spPr>
           <a:xfrm>
-            <a:off x="640080" y="5151120"/>
-            <a:ext cx="10881360" cy="411480"/>
+            <a:off x="640080" y="5126736"/>
+            <a:ext cx="10881360" cy="384048"/>
           </a:xfrm>
           <a:prstGeom prst="rect">
             <a:avLst/>
@@ -7538,8 +7538,8 @@
         </p:nvSpPr>
         <p:spPr>
           <a:xfrm>
-            <a:off x="640080" y="5608320"/>
-            <a:ext cx="10881360" cy="746760"/>
+            <a:off x="640080" y="5529072"/>
+            <a:ext cx="10881360" cy="908304"/>
           </a:xfrm>
           <a:prstGeom prst="rect">
             <a:avLst/>
@@ -7743,8 +7743,8 @@
         </p:nvSpPr>
         <p:spPr>
           <a:xfrm>
-            <a:off x="457200" y="2011680"/>
-            <a:ext cx="11247120" cy="1386840"/>
+            <a:off x="457200" y="1920240"/>
+            <a:ext cx="11247120" cy="1438656"/>
           </a:xfrm>
           <a:prstGeom prst="rect">
             <a:avLst/>
@@ -7785,8 +7785,8 @@
         </p:nvSpPr>
         <p:spPr>
           <a:xfrm>
-            <a:off x="640080" y="2103120"/>
-            <a:ext cx="10881360" cy="411480"/>
+            <a:off x="640080" y="1993392"/>
+            <a:ext cx="10881360" cy="384048"/>
           </a:xfrm>
           <a:prstGeom prst="rect">
             <a:avLst/>
@@ -7820,8 +7820,8 @@
         </p:nvSpPr>
         <p:spPr>
           <a:xfrm>
-            <a:off x="640080" y="2560320"/>
-            <a:ext cx="10881360" cy="746760"/>
+            <a:off x="640080" y="2395728"/>
+            <a:ext cx="10881360" cy="908304"/>
           </a:xfrm>
           <a:prstGeom prst="rect">
             <a:avLst/>
@@ -7867,8 +7867,8 @@
         </p:nvSpPr>
         <p:spPr>
           <a:xfrm>
-            <a:off x="457200" y="3535680"/>
-            <a:ext cx="11247120" cy="1386840"/>
+            <a:off x="457200" y="3486912"/>
+            <a:ext cx="11247120" cy="1438656"/>
           </a:xfrm>
           <a:prstGeom prst="rect">
             <a:avLst/>
@@ -7909,8 +7909,8 @@
         </p:nvSpPr>
         <p:spPr>
           <a:xfrm>
-            <a:off x="640080" y="3627120"/>
-            <a:ext cx="10881360" cy="411480"/>
+            <a:off x="640080" y="3560064"/>
+            <a:ext cx="10881360" cy="384048"/>
           </a:xfrm>
           <a:prstGeom prst="rect">
             <a:avLst/>
@@ -7944,8 +7944,8 @@
         </p:nvSpPr>
         <p:spPr>
           <a:xfrm>
-            <a:off x="640080" y="4084320"/>
-            <a:ext cx="10881360" cy="746760"/>
+            <a:off x="640080" y="3962400"/>
+            <a:ext cx="10881360" cy="908304"/>
           </a:xfrm>
           <a:prstGeom prst="rect">
             <a:avLst/>
@@ -8003,8 +8003,8 @@
         </p:nvSpPr>
         <p:spPr>
           <a:xfrm>
-            <a:off x="457200" y="5059680"/>
-            <a:ext cx="11247120" cy="1386840"/>
+            <a:off x="457200" y="5053584"/>
+            <a:ext cx="11247120" cy="1438656"/>
           </a:xfrm>
           <a:prstGeom prst="rect">
             <a:avLst/>
@@ -8045,8 +8045,8 @@
         </p:nvSpPr>
         <p:spPr>
           <a:xfrm>
-            <a:off x="640080" y="5151120"/>
-            <a:ext cx="10881360" cy="411480"/>
+            <a:off x="640080" y="5126736"/>
+            <a:ext cx="10881360" cy="384048"/>
           </a:xfrm>
           <a:prstGeom prst="rect">
             <a:avLst/>
@@ -8080,8 +8080,8 @@
         </p:nvSpPr>
         <p:spPr>
           <a:xfrm>
-            <a:off x="640080" y="5608320"/>
-            <a:ext cx="10881360" cy="746760"/>
+            <a:off x="640080" y="5529072"/>
+            <a:ext cx="10881360" cy="908304"/>
           </a:xfrm>
           <a:prstGeom prst="rect">
             <a:avLst/>
@@ -8285,8 +8285,8 @@
         </p:nvSpPr>
         <p:spPr>
           <a:xfrm>
-            <a:off x="457200" y="2011680"/>
-            <a:ext cx="11247120" cy="1386840"/>
+            <a:off x="457200" y="1920240"/>
+            <a:ext cx="11247120" cy="1438656"/>
           </a:xfrm>
           <a:prstGeom prst="rect">
             <a:avLst/>
@@ -8327,8 +8327,8 @@
         </p:nvSpPr>
         <p:spPr>
           <a:xfrm>
-            <a:off x="640080" y="2103120"/>
-            <a:ext cx="10881360" cy="411480"/>
+            <a:off x="640080" y="1993392"/>
+            <a:ext cx="10881360" cy="384048"/>
           </a:xfrm>
           <a:prstGeom prst="rect">
             <a:avLst/>
@@ -8362,8 +8362,8 @@
         </p:nvSpPr>
         <p:spPr>
           <a:xfrm>
-            <a:off x="640080" y="2560320"/>
-            <a:ext cx="10881360" cy="746760"/>
+            <a:off x="640080" y="2395728"/>
+            <a:ext cx="10881360" cy="908304"/>
           </a:xfrm>
           <a:prstGeom prst="rect">
             <a:avLst/>
@@ -8409,8 +8409,8 @@
         </p:nvSpPr>
         <p:spPr>
           <a:xfrm>
-            <a:off x="457200" y="3535680"/>
-            <a:ext cx="11247120" cy="1386840"/>
+            <a:off x="457200" y="3486912"/>
+            <a:ext cx="11247120" cy="1438656"/>
           </a:xfrm>
           <a:prstGeom prst="rect">
             <a:avLst/>
@@ -8451,8 +8451,8 @@
         </p:nvSpPr>
         <p:spPr>
           <a:xfrm>
-            <a:off x="640080" y="3627120"/>
-            <a:ext cx="10881360" cy="411480"/>
+            <a:off x="640080" y="3560064"/>
+            <a:ext cx="10881360" cy="384048"/>
           </a:xfrm>
           <a:prstGeom prst="rect">
             <a:avLst/>
@@ -8486,8 +8486,8 @@
         </p:nvSpPr>
         <p:spPr>
           <a:xfrm>
-            <a:off x="640080" y="4084320"/>
-            <a:ext cx="10881360" cy="746760"/>
+            <a:off x="640080" y="3962400"/>
+            <a:ext cx="10881360" cy="908304"/>
           </a:xfrm>
           <a:prstGeom prst="rect">
             <a:avLst/>
@@ -8545,8 +8545,8 @@
         </p:nvSpPr>
         <p:spPr>
           <a:xfrm>
-            <a:off x="457200" y="5059680"/>
-            <a:ext cx="11247120" cy="1386840"/>
+            <a:off x="457200" y="5053584"/>
+            <a:ext cx="11247120" cy="1438656"/>
           </a:xfrm>
           <a:prstGeom prst="rect">
             <a:avLst/>
@@ -8587,8 +8587,8 @@
         </p:nvSpPr>
         <p:spPr>
           <a:xfrm>
-            <a:off x="640080" y="5151120"/>
-            <a:ext cx="10881360" cy="411480"/>
+            <a:off x="640080" y="5126736"/>
+            <a:ext cx="10881360" cy="384048"/>
           </a:xfrm>
           <a:prstGeom prst="rect">
             <a:avLst/>
@@ -8622,8 +8622,8 @@
         </p:nvSpPr>
         <p:spPr>
           <a:xfrm>
-            <a:off x="640080" y="5608320"/>
-            <a:ext cx="10881360" cy="746760"/>
+            <a:off x="640080" y="5529072"/>
+            <a:ext cx="10881360" cy="908304"/>
           </a:xfrm>
           <a:prstGeom prst="rect">
             <a:avLst/>
@@ -8827,8 +8827,8 @@
         </p:nvSpPr>
         <p:spPr>
           <a:xfrm>
-            <a:off x="457200" y="2011680"/>
-            <a:ext cx="11247120" cy="1386840"/>
+            <a:off x="457200" y="1920240"/>
+            <a:ext cx="11247120" cy="1438656"/>
           </a:xfrm>
           <a:prstGeom prst="rect">
             <a:avLst/>
@@ -8869,8 +8869,8 @@
         </p:nvSpPr>
         <p:spPr>
           <a:xfrm>
-            <a:off x="640080" y="2103120"/>
-            <a:ext cx="10881360" cy="411480"/>
+            <a:off x="640080" y="1993392"/>
+            <a:ext cx="10881360" cy="384048"/>
           </a:xfrm>
           <a:prstGeom prst="rect">
             <a:avLst/>
@@ -8904,8 +8904,8 @@
         </p:nvSpPr>
         <p:spPr>
           <a:xfrm>
-            <a:off x="640080" y="2560320"/>
-            <a:ext cx="10881360" cy="746760"/>
+            <a:off x="640080" y="2395728"/>
+            <a:ext cx="10881360" cy="908304"/>
           </a:xfrm>
           <a:prstGeom prst="rect">
             <a:avLst/>
@@ -8963,8 +8963,8 @@
         </p:nvSpPr>
         <p:spPr>
           <a:xfrm>
-            <a:off x="457200" y="3535680"/>
-            <a:ext cx="11247120" cy="1386840"/>
+            <a:off x="457200" y="3486912"/>
+            <a:ext cx="11247120" cy="1438656"/>
           </a:xfrm>
           <a:prstGeom prst="rect">
             <a:avLst/>
@@ -9005,8 +9005,8 @@
         </p:nvSpPr>
         <p:spPr>
           <a:xfrm>
-            <a:off x="640080" y="3627120"/>
-            <a:ext cx="10881360" cy="411480"/>
+            <a:off x="640080" y="3560064"/>
+            <a:ext cx="10881360" cy="384048"/>
           </a:xfrm>
           <a:prstGeom prst="rect">
             <a:avLst/>
@@ -9040,8 +9040,8 @@
         </p:nvSpPr>
         <p:spPr>
           <a:xfrm>
-            <a:off x="640080" y="4084320"/>
-            <a:ext cx="10881360" cy="746760"/>
+            <a:off x="640080" y="3962400"/>
+            <a:ext cx="10881360" cy="908304"/>
           </a:xfrm>
           <a:prstGeom prst="rect">
             <a:avLst/>
@@ -9099,8 +9099,8 @@
         </p:nvSpPr>
         <p:spPr>
           <a:xfrm>
-            <a:off x="457200" y="5059680"/>
-            <a:ext cx="11247120" cy="1386840"/>
+            <a:off x="457200" y="5053584"/>
+            <a:ext cx="11247120" cy="1438656"/>
           </a:xfrm>
           <a:prstGeom prst="rect">
             <a:avLst/>
@@ -9141,8 +9141,8 @@
         </p:nvSpPr>
         <p:spPr>
           <a:xfrm>
-            <a:off x="640080" y="5151120"/>
-            <a:ext cx="10881360" cy="411480"/>
+            <a:off x="640080" y="5126736"/>
+            <a:ext cx="10881360" cy="384048"/>
           </a:xfrm>
           <a:prstGeom prst="rect">
             <a:avLst/>
@@ -9176,8 +9176,8 @@
         </p:nvSpPr>
         <p:spPr>
           <a:xfrm>
-            <a:off x="640080" y="5608320"/>
-            <a:ext cx="10881360" cy="746760"/>
+            <a:off x="640080" y="5529072"/>
+            <a:ext cx="10881360" cy="908304"/>
           </a:xfrm>
           <a:prstGeom prst="rect">
             <a:avLst/>
@@ -9393,8 +9393,8 @@
         </p:nvSpPr>
         <p:spPr>
           <a:xfrm>
-            <a:off x="457200" y="2011680"/>
-            <a:ext cx="11247120" cy="1386840"/>
+            <a:off x="457200" y="1920240"/>
+            <a:ext cx="11247120" cy="1438656"/>
           </a:xfrm>
           <a:prstGeom prst="rect">
             <a:avLst/>
@@ -9435,8 +9435,8 @@
         </p:nvSpPr>
         <p:spPr>
           <a:xfrm>
-            <a:off x="640080" y="2103120"/>
-            <a:ext cx="10881360" cy="411480"/>
+            <a:off x="640080" y="1993392"/>
+            <a:ext cx="10881360" cy="384048"/>
           </a:xfrm>
           <a:prstGeom prst="rect">
             <a:avLst/>
@@ -9470,8 +9470,8 @@
         </p:nvSpPr>
         <p:spPr>
           <a:xfrm>
-            <a:off x="640080" y="2560320"/>
-            <a:ext cx="10881360" cy="746760"/>
+            <a:off x="640080" y="2395728"/>
+            <a:ext cx="10881360" cy="908304"/>
           </a:xfrm>
           <a:prstGeom prst="rect">
             <a:avLst/>
@@ -9529,8 +9529,8 @@
         </p:nvSpPr>
         <p:spPr>
           <a:xfrm>
-            <a:off x="457200" y="3535680"/>
-            <a:ext cx="11247120" cy="1386840"/>
+            <a:off x="457200" y="3486912"/>
+            <a:ext cx="11247120" cy="1438656"/>
           </a:xfrm>
           <a:prstGeom prst="rect">
             <a:avLst/>
@@ -9571,8 +9571,8 @@
         </p:nvSpPr>
         <p:spPr>
           <a:xfrm>
-            <a:off x="640080" y="3627120"/>
-            <a:ext cx="10881360" cy="411480"/>
+            <a:off x="640080" y="3560064"/>
+            <a:ext cx="10881360" cy="384048"/>
           </a:xfrm>
           <a:prstGeom prst="rect">
             <a:avLst/>
@@ -9606,8 +9606,8 @@
         </p:nvSpPr>
         <p:spPr>
           <a:xfrm>
-            <a:off x="640080" y="4084320"/>
-            <a:ext cx="10881360" cy="746760"/>
+            <a:off x="640080" y="3962400"/>
+            <a:ext cx="10881360" cy="908304"/>
           </a:xfrm>
           <a:prstGeom prst="rect">
             <a:avLst/>
@@ -9665,8 +9665,8 @@
         </p:nvSpPr>
         <p:spPr>
           <a:xfrm>
-            <a:off x="457200" y="5059680"/>
-            <a:ext cx="11247120" cy="1386840"/>
+            <a:off x="457200" y="5053584"/>
+            <a:ext cx="11247120" cy="1438656"/>
           </a:xfrm>
           <a:prstGeom prst="rect">
             <a:avLst/>
@@ -9707,8 +9707,8 @@
         </p:nvSpPr>
         <p:spPr>
           <a:xfrm>
-            <a:off x="640080" y="5151120"/>
-            <a:ext cx="10881360" cy="411480"/>
+            <a:off x="640080" y="5126736"/>
+            <a:ext cx="10881360" cy="384048"/>
           </a:xfrm>
           <a:prstGeom prst="rect">
             <a:avLst/>
@@ -9742,8 +9742,8 @@
         </p:nvSpPr>
         <p:spPr>
           <a:xfrm>
-            <a:off x="640080" y="5608320"/>
-            <a:ext cx="10881360" cy="746760"/>
+            <a:off x="640080" y="5529072"/>
+            <a:ext cx="10881360" cy="908304"/>
           </a:xfrm>
           <a:prstGeom prst="rect">
             <a:avLst/>
@@ -11027,8 +11027,8 @@
         </p:nvSpPr>
         <p:spPr>
           <a:xfrm>
-            <a:off x="457200" y="2011680"/>
-            <a:ext cx="11247120" cy="1386840"/>
+            <a:off x="457200" y="1920240"/>
+            <a:ext cx="11247120" cy="1438656"/>
           </a:xfrm>
           <a:prstGeom prst="rect">
             <a:avLst/>
@@ -11069,8 +11069,8 @@
         </p:nvSpPr>
         <p:spPr>
           <a:xfrm>
-            <a:off x="640080" y="2103120"/>
-            <a:ext cx="10881360" cy="411480"/>
+            <a:off x="640080" y="1993392"/>
+            <a:ext cx="10881360" cy="384048"/>
           </a:xfrm>
           <a:prstGeom prst="rect">
             <a:avLst/>
@@ -11104,8 +11104,8 @@
         </p:nvSpPr>
         <p:spPr>
           <a:xfrm>
-            <a:off x="640080" y="2560320"/>
-            <a:ext cx="10881360" cy="746760"/>
+            <a:off x="640080" y="2395728"/>
+            <a:ext cx="10881360" cy="908304"/>
           </a:xfrm>
           <a:prstGeom prst="rect">
             <a:avLst/>
@@ -11151,8 +11151,8 @@
         </p:nvSpPr>
         <p:spPr>
           <a:xfrm>
-            <a:off x="457200" y="3535680"/>
-            <a:ext cx="11247120" cy="1386840"/>
+            <a:off x="457200" y="3486912"/>
+            <a:ext cx="11247120" cy="1438656"/>
           </a:xfrm>
           <a:prstGeom prst="rect">
             <a:avLst/>
@@ -11193,8 +11193,8 @@
         </p:nvSpPr>
         <p:spPr>
           <a:xfrm>
-            <a:off x="640080" y="3627120"/>
-            <a:ext cx="10881360" cy="411480"/>
+            <a:off x="640080" y="3560064"/>
+            <a:ext cx="10881360" cy="384048"/>
           </a:xfrm>
           <a:prstGeom prst="rect">
             <a:avLst/>
@@ -11228,8 +11228,8 @@
         </p:nvSpPr>
         <p:spPr>
           <a:xfrm>
-            <a:off x="640080" y="4084320"/>
-            <a:ext cx="10881360" cy="746760"/>
+            <a:off x="640080" y="3962400"/>
+            <a:ext cx="10881360" cy="908304"/>
           </a:xfrm>
           <a:prstGeom prst="rect">
             <a:avLst/>
@@ -11287,8 +11287,8 @@
         </p:nvSpPr>
         <p:spPr>
           <a:xfrm>
-            <a:off x="457200" y="5059680"/>
-            <a:ext cx="11247120" cy="1386840"/>
+            <a:off x="457200" y="5053584"/>
+            <a:ext cx="11247120" cy="1438656"/>
           </a:xfrm>
           <a:prstGeom prst="rect">
             <a:avLst/>
@@ -11329,8 +11329,8 @@
         </p:nvSpPr>
         <p:spPr>
           <a:xfrm>
-            <a:off x="640080" y="5151120"/>
-            <a:ext cx="10881360" cy="411480"/>
+            <a:off x="640080" y="5126736"/>
+            <a:ext cx="10881360" cy="384048"/>
           </a:xfrm>
           <a:prstGeom prst="rect">
             <a:avLst/>
@@ -11364,8 +11364,8 @@
         </p:nvSpPr>
         <p:spPr>
           <a:xfrm>
-            <a:off x="640080" y="5608320"/>
-            <a:ext cx="10881360" cy="746760"/>
+            <a:off x="640080" y="5529072"/>
+            <a:ext cx="10881360" cy="908304"/>
           </a:xfrm>
           <a:prstGeom prst="rect">
             <a:avLst/>
@@ -11581,8 +11581,8 @@
         </p:nvSpPr>
         <p:spPr>
           <a:xfrm>
-            <a:off x="457200" y="2011680"/>
-            <a:ext cx="11247120" cy="1386840"/>
+            <a:off x="457200" y="1920240"/>
+            <a:ext cx="11247120" cy="1438656"/>
           </a:xfrm>
           <a:prstGeom prst="rect">
             <a:avLst/>
@@ -11623,8 +11623,8 @@
         </p:nvSpPr>
         <p:spPr>
           <a:xfrm>
-            <a:off x="640080" y="2103120"/>
-            <a:ext cx="10881360" cy="411480"/>
+            <a:off x="640080" y="1993392"/>
+            <a:ext cx="10881360" cy="384048"/>
           </a:xfrm>
           <a:prstGeom prst="rect">
             <a:avLst/>
@@ -11658,8 +11658,8 @@
         </p:nvSpPr>
         <p:spPr>
           <a:xfrm>
-            <a:off x="640080" y="2560320"/>
-            <a:ext cx="10881360" cy="746760"/>
+            <a:off x="640080" y="2395728"/>
+            <a:ext cx="10881360" cy="908304"/>
           </a:xfrm>
           <a:prstGeom prst="rect">
             <a:avLst/>
@@ -11717,8 +11717,8 @@
         </p:nvSpPr>
         <p:spPr>
           <a:xfrm>
-            <a:off x="457200" y="3535680"/>
-            <a:ext cx="11247120" cy="1386840"/>
+            <a:off x="457200" y="3486912"/>
+            <a:ext cx="11247120" cy="1438656"/>
           </a:xfrm>
           <a:prstGeom prst="rect">
             <a:avLst/>
@@ -11759,8 +11759,8 @@
         </p:nvSpPr>
         <p:spPr>
           <a:xfrm>
-            <a:off x="640080" y="3627120"/>
-            <a:ext cx="10881360" cy="411480"/>
+            <a:off x="640080" y="3560064"/>
+            <a:ext cx="10881360" cy="384048"/>
           </a:xfrm>
           <a:prstGeom prst="rect">
             <a:avLst/>
@@ -11794,8 +11794,8 @@
         </p:nvSpPr>
         <p:spPr>
           <a:xfrm>
-            <a:off x="640080" y="4084320"/>
-            <a:ext cx="10881360" cy="746760"/>
+            <a:off x="640080" y="3962400"/>
+            <a:ext cx="10881360" cy="908304"/>
           </a:xfrm>
           <a:prstGeom prst="rect">
             <a:avLst/>
@@ -11853,8 +11853,8 @@
         </p:nvSpPr>
         <p:spPr>
           <a:xfrm>
-            <a:off x="457200" y="5059680"/>
-            <a:ext cx="11247120" cy="1386840"/>
+            <a:off x="457200" y="5053584"/>
+            <a:ext cx="11247120" cy="1438656"/>
           </a:xfrm>
           <a:prstGeom prst="rect">
             <a:avLst/>
@@ -11895,8 +11895,8 @@
         </p:nvSpPr>
         <p:spPr>
           <a:xfrm>
-            <a:off x="640080" y="5151120"/>
-            <a:ext cx="10881360" cy="411480"/>
+            <a:off x="640080" y="5126736"/>
+            <a:ext cx="10881360" cy="384048"/>
           </a:xfrm>
           <a:prstGeom prst="rect">
             <a:avLst/>
@@ -11930,8 +11930,8 @@
         </p:nvSpPr>
         <p:spPr>
           <a:xfrm>
-            <a:off x="640080" y="5608320"/>
-            <a:ext cx="10881360" cy="746760"/>
+            <a:off x="640080" y="5529072"/>
+            <a:ext cx="10881360" cy="908304"/>
           </a:xfrm>
           <a:prstGeom prst="rect">
             <a:avLst/>
@@ -12147,8 +12147,8 @@
         </p:nvSpPr>
         <p:spPr>
           <a:xfrm>
-            <a:off x="457200" y="2011680"/>
-            <a:ext cx="11247120" cy="1386840"/>
+            <a:off x="457200" y="1920240"/>
+            <a:ext cx="11247120" cy="1438656"/>
           </a:xfrm>
           <a:prstGeom prst="rect">
             <a:avLst/>
@@ -12189,8 +12189,8 @@
         </p:nvSpPr>
         <p:spPr>
           <a:xfrm>
-            <a:off x="640080" y="2103120"/>
-            <a:ext cx="10881360" cy="411480"/>
+            <a:off x="640080" y="1993392"/>
+            <a:ext cx="10881360" cy="384048"/>
           </a:xfrm>
           <a:prstGeom prst="rect">
             <a:avLst/>
@@ -12224,8 +12224,8 @@
         </p:nvSpPr>
         <p:spPr>
           <a:xfrm>
-            <a:off x="640080" y="2560320"/>
-            <a:ext cx="10881360" cy="746760"/>
+            <a:off x="640080" y="2395728"/>
+            <a:ext cx="10881360" cy="908304"/>
           </a:xfrm>
           <a:prstGeom prst="rect">
             <a:avLst/>
@@ -12283,8 +12283,8 @@
         </p:nvSpPr>
         <p:spPr>
           <a:xfrm>
-            <a:off x="457200" y="3535680"/>
-            <a:ext cx="11247120" cy="1386840"/>
+            <a:off x="457200" y="3486912"/>
+            <a:ext cx="11247120" cy="1438656"/>
           </a:xfrm>
           <a:prstGeom prst="rect">
             <a:avLst/>
@@ -12325,8 +12325,8 @@
         </p:nvSpPr>
         <p:spPr>
           <a:xfrm>
-            <a:off x="640080" y="3627120"/>
-            <a:ext cx="10881360" cy="411480"/>
+            <a:off x="640080" y="3560064"/>
+            <a:ext cx="10881360" cy="384048"/>
           </a:xfrm>
           <a:prstGeom prst="rect">
             <a:avLst/>
@@ -12360,8 +12360,8 @@
         </p:nvSpPr>
         <p:spPr>
           <a:xfrm>
-            <a:off x="640080" y="4084320"/>
-            <a:ext cx="10881360" cy="746760"/>
+            <a:off x="640080" y="3962400"/>
+            <a:ext cx="10881360" cy="908304"/>
           </a:xfrm>
           <a:prstGeom prst="rect">
             <a:avLst/>
@@ -12419,8 +12419,8 @@
         </p:nvSpPr>
         <p:spPr>
           <a:xfrm>
-            <a:off x="457200" y="5059680"/>
-            <a:ext cx="11247120" cy="1386840"/>
+            <a:off x="457200" y="5053584"/>
+            <a:ext cx="11247120" cy="1438656"/>
           </a:xfrm>
           <a:prstGeom prst="rect">
             <a:avLst/>
@@ -12461,8 +12461,8 @@
         </p:nvSpPr>
         <p:spPr>
           <a:xfrm>
-            <a:off x="640080" y="5151120"/>
-            <a:ext cx="10881360" cy="411480"/>
+            <a:off x="640080" y="5126736"/>
+            <a:ext cx="10881360" cy="384048"/>
           </a:xfrm>
           <a:prstGeom prst="rect">
             <a:avLst/>
@@ -12496,8 +12496,8 @@
         </p:nvSpPr>
         <p:spPr>
           <a:xfrm>
-            <a:off x="640080" y="5608320"/>
-            <a:ext cx="10881360" cy="746760"/>
+            <a:off x="640080" y="5529072"/>
+            <a:ext cx="10881360" cy="908304"/>
           </a:xfrm>
           <a:prstGeom prst="rect">
             <a:avLst/>
@@ -12713,8 +12713,8 @@
         </p:nvSpPr>
         <p:spPr>
           <a:xfrm>
-            <a:off x="457200" y="2011680"/>
-            <a:ext cx="11247120" cy="1386840"/>
+            <a:off x="457200" y="1920240"/>
+            <a:ext cx="11247120" cy="1438656"/>
           </a:xfrm>
           <a:prstGeom prst="rect">
             <a:avLst/>
@@ -12755,8 +12755,8 @@
         </p:nvSpPr>
         <p:spPr>
           <a:xfrm>
-            <a:off x="640080" y="2103120"/>
-            <a:ext cx="10881360" cy="411480"/>
+            <a:off x="640080" y="1993392"/>
+            <a:ext cx="10881360" cy="384048"/>
           </a:xfrm>
           <a:prstGeom prst="rect">
             <a:avLst/>
@@ -12790,8 +12790,8 @@
         </p:nvSpPr>
         <p:spPr>
           <a:xfrm>
-            <a:off x="640080" y="2560320"/>
-            <a:ext cx="10881360" cy="746760"/>
+            <a:off x="640080" y="2395728"/>
+            <a:ext cx="10881360" cy="908304"/>
           </a:xfrm>
           <a:prstGeom prst="rect">
             <a:avLst/>
@@ -12837,8 +12837,8 @@
         </p:nvSpPr>
         <p:spPr>
           <a:xfrm>
-            <a:off x="457200" y="3535680"/>
-            <a:ext cx="11247120" cy="1386840"/>
+            <a:off x="457200" y="3486912"/>
+            <a:ext cx="11247120" cy="1438656"/>
           </a:xfrm>
           <a:prstGeom prst="rect">
             <a:avLst/>
@@ -12879,8 +12879,8 @@
         </p:nvSpPr>
         <p:spPr>
           <a:xfrm>
-            <a:off x="640080" y="3627120"/>
-            <a:ext cx="10881360" cy="411480"/>
+            <a:off x="640080" y="3560064"/>
+            <a:ext cx="10881360" cy="384048"/>
           </a:xfrm>
           <a:prstGeom prst="rect">
             <a:avLst/>
@@ -12914,8 +12914,8 @@
         </p:nvSpPr>
         <p:spPr>
           <a:xfrm>
-            <a:off x="640080" y="4084320"/>
-            <a:ext cx="10881360" cy="746760"/>
+            <a:off x="640080" y="3962400"/>
+            <a:ext cx="10881360" cy="908304"/>
           </a:xfrm>
           <a:prstGeom prst="rect">
             <a:avLst/>
@@ -12961,8 +12961,8 @@
         </p:nvSpPr>
         <p:spPr>
           <a:xfrm>
-            <a:off x="457200" y="5059680"/>
-            <a:ext cx="11247120" cy="1386840"/>
+            <a:off x="457200" y="5053584"/>
+            <a:ext cx="11247120" cy="1438656"/>
           </a:xfrm>
           <a:prstGeom prst="rect">
             <a:avLst/>
@@ -13003,8 +13003,8 @@
         </p:nvSpPr>
         <p:spPr>
           <a:xfrm>
-            <a:off x="640080" y="5151120"/>
-            <a:ext cx="10881360" cy="411480"/>
+            <a:off x="640080" y="5126736"/>
+            <a:ext cx="10881360" cy="384048"/>
           </a:xfrm>
           <a:prstGeom prst="rect">
             <a:avLst/>
@@ -13038,8 +13038,8 @@
         </p:nvSpPr>
         <p:spPr>
           <a:xfrm>
-            <a:off x="640080" y="5608320"/>
-            <a:ext cx="10881360" cy="746760"/>
+            <a:off x="640080" y="5529072"/>
+            <a:ext cx="10881360" cy="908304"/>
           </a:xfrm>
           <a:prstGeom prst="rect">
             <a:avLst/>
@@ -13243,8 +13243,8 @@
         </p:nvSpPr>
         <p:spPr>
           <a:xfrm>
-            <a:off x="457200" y="2011680"/>
-            <a:ext cx="11247120" cy="1386840"/>
+            <a:off x="457200" y="1920240"/>
+            <a:ext cx="11247120" cy="1438656"/>
           </a:xfrm>
           <a:prstGeom prst="rect">
             <a:avLst/>
@@ -13285,8 +13285,8 @@
         </p:nvSpPr>
         <p:spPr>
           <a:xfrm>
-            <a:off x="640080" y="2103120"/>
-            <a:ext cx="10881360" cy="411480"/>
+            <a:off x="640080" y="1993392"/>
+            <a:ext cx="10881360" cy="384048"/>
           </a:xfrm>
           <a:prstGeom prst="rect">
             <a:avLst/>
@@ -13320,8 +13320,8 @@
         </p:nvSpPr>
         <p:spPr>
           <a:xfrm>
-            <a:off x="640080" y="2560320"/>
-            <a:ext cx="10881360" cy="746760"/>
+            <a:off x="640080" y="2395728"/>
+            <a:ext cx="10881360" cy="908304"/>
           </a:xfrm>
           <a:prstGeom prst="rect">
             <a:avLst/>
@@ -13367,8 +13367,8 @@
         </p:nvSpPr>
         <p:spPr>
           <a:xfrm>
-            <a:off x="457200" y="3535680"/>
-            <a:ext cx="11247120" cy="1386840"/>
+            <a:off x="457200" y="3486912"/>
+            <a:ext cx="11247120" cy="1438656"/>
           </a:xfrm>
           <a:prstGeom prst="rect">
             <a:avLst/>
@@ -13409,8 +13409,8 @@
         </p:nvSpPr>
         <p:spPr>
           <a:xfrm>
-            <a:off x="640080" y="3627120"/>
-            <a:ext cx="10881360" cy="411480"/>
+            <a:off x="640080" y="3560064"/>
+            <a:ext cx="10881360" cy="384048"/>
           </a:xfrm>
           <a:prstGeom prst="rect">
             <a:avLst/>
@@ -13444,8 +13444,8 @@
         </p:nvSpPr>
         <p:spPr>
           <a:xfrm>
-            <a:off x="640080" y="4084320"/>
-            <a:ext cx="10881360" cy="746760"/>
+            <a:off x="640080" y="3962400"/>
+            <a:ext cx="10881360" cy="908304"/>
           </a:xfrm>
           <a:prstGeom prst="rect">
             <a:avLst/>
@@ -13491,8 +13491,8 @@
         </p:nvSpPr>
         <p:spPr>
           <a:xfrm>
-            <a:off x="457200" y="5059680"/>
-            <a:ext cx="11247120" cy="1386840"/>
+            <a:off x="457200" y="5053584"/>
+            <a:ext cx="11247120" cy="1438656"/>
           </a:xfrm>
           <a:prstGeom prst="rect">
             <a:avLst/>
@@ -13533,8 +13533,8 @@
         </p:nvSpPr>
         <p:spPr>
           <a:xfrm>
-            <a:off x="640080" y="5151120"/>
-            <a:ext cx="10881360" cy="411480"/>
+            <a:off x="640080" y="5126736"/>
+            <a:ext cx="10881360" cy="384048"/>
           </a:xfrm>
           <a:prstGeom prst="rect">
             <a:avLst/>
@@ -13568,8 +13568,8 @@
         </p:nvSpPr>
         <p:spPr>
           <a:xfrm>
-            <a:off x="640080" y="5608320"/>
-            <a:ext cx="10881360" cy="746760"/>
+            <a:off x="640080" y="5529072"/>
+            <a:ext cx="10881360" cy="908304"/>
           </a:xfrm>
           <a:prstGeom prst="rect">
             <a:avLst/>
@@ -13785,8 +13785,8 @@
         </p:nvSpPr>
         <p:spPr>
           <a:xfrm>
-            <a:off x="457200" y="2011680"/>
-            <a:ext cx="11247120" cy="1386840"/>
+            <a:off x="457200" y="1920240"/>
+            <a:ext cx="11247120" cy="1438656"/>
           </a:xfrm>
           <a:prstGeom prst="rect">
             <a:avLst/>
@@ -13827,8 +13827,8 @@
         </p:nvSpPr>
         <p:spPr>
           <a:xfrm>
-            <a:off x="640080" y="2103120"/>
-            <a:ext cx="10881360" cy="411480"/>
+            <a:off x="640080" y="1993392"/>
+            <a:ext cx="10881360" cy="384048"/>
           </a:xfrm>
           <a:prstGeom prst="rect">
             <a:avLst/>
@@ -13862,8 +13862,8 @@
         </p:nvSpPr>
         <p:spPr>
           <a:xfrm>
-            <a:off x="640080" y="2560320"/>
-            <a:ext cx="10881360" cy="746760"/>
+            <a:off x="640080" y="2395728"/>
+            <a:ext cx="10881360" cy="908304"/>
           </a:xfrm>
           <a:prstGeom prst="rect">
             <a:avLst/>
@@ -13921,8 +13921,8 @@
         </p:nvSpPr>
         <p:spPr>
           <a:xfrm>
-            <a:off x="457200" y="3535680"/>
-            <a:ext cx="11247120" cy="1386840"/>
+            <a:off x="457200" y="3486912"/>
+            <a:ext cx="11247120" cy="1438656"/>
           </a:xfrm>
           <a:prstGeom prst="rect">
             <a:avLst/>
@@ -13963,8 +13963,8 @@
         </p:nvSpPr>
         <p:spPr>
           <a:xfrm>
-            <a:off x="640080" y="3627120"/>
-            <a:ext cx="10881360" cy="411480"/>
+            <a:off x="640080" y="3560064"/>
+            <a:ext cx="10881360" cy="384048"/>
           </a:xfrm>
           <a:prstGeom prst="rect">
             <a:avLst/>
@@ -13998,8 +13998,8 @@
         </p:nvSpPr>
         <p:spPr>
           <a:xfrm>
-            <a:off x="640080" y="4084320"/>
-            <a:ext cx="10881360" cy="746760"/>
+            <a:off x="640080" y="3962400"/>
+            <a:ext cx="10881360" cy="908304"/>
           </a:xfrm>
           <a:prstGeom prst="rect">
             <a:avLst/>
@@ -14045,8 +14045,8 @@
         </p:nvSpPr>
         <p:spPr>
           <a:xfrm>
-            <a:off x="457200" y="5059680"/>
-            <a:ext cx="11247120" cy="1386840"/>
+            <a:off x="457200" y="5053584"/>
+            <a:ext cx="11247120" cy="1438656"/>
           </a:xfrm>
           <a:prstGeom prst="rect">
             <a:avLst/>
@@ -14087,8 +14087,8 @@
         </p:nvSpPr>
         <p:spPr>
           <a:xfrm>
-            <a:off x="640080" y="5151120"/>
-            <a:ext cx="10881360" cy="411480"/>
+            <a:off x="640080" y="5126736"/>
+            <a:ext cx="10881360" cy="384048"/>
           </a:xfrm>
           <a:prstGeom prst="rect">
             <a:avLst/>
@@ -14122,8 +14122,8 @@
         </p:nvSpPr>
         <p:spPr>
           <a:xfrm>
-            <a:off x="640080" y="5608320"/>
-            <a:ext cx="10881360" cy="746760"/>
+            <a:off x="640080" y="5529072"/>
+            <a:ext cx="10881360" cy="908304"/>
           </a:xfrm>
           <a:prstGeom prst="rect">
             <a:avLst/>
@@ -14339,8 +14339,8 @@
         </p:nvSpPr>
         <p:spPr>
           <a:xfrm>
-            <a:off x="457200" y="2011680"/>
-            <a:ext cx="11247120" cy="1386840"/>
+            <a:off x="457200" y="1920240"/>
+            <a:ext cx="11247120" cy="1438656"/>
           </a:xfrm>
           <a:prstGeom prst="rect">
             <a:avLst/>
@@ -14381,8 +14381,8 @@
         </p:nvSpPr>
         <p:spPr>
           <a:xfrm>
-            <a:off x="640080" y="2103120"/>
-            <a:ext cx="10881360" cy="411480"/>
+            <a:off x="640080" y="1993392"/>
+            <a:ext cx="10881360" cy="384048"/>
           </a:xfrm>
           <a:prstGeom prst="rect">
             <a:avLst/>
@@ -14416,8 +14416,8 @@
         </p:nvSpPr>
         <p:spPr>
           <a:xfrm>
-            <a:off x="640080" y="2560320"/>
-            <a:ext cx="10881360" cy="746760"/>
+            <a:off x="640080" y="2395728"/>
+            <a:ext cx="10881360" cy="908304"/>
           </a:xfrm>
           <a:prstGeom prst="rect">
             <a:avLst/>
@@ -14487,8 +14487,8 @@
         </p:nvSpPr>
         <p:spPr>
           <a:xfrm>
-            <a:off x="457200" y="3535680"/>
-            <a:ext cx="11247120" cy="1386840"/>
+            <a:off x="457200" y="3486912"/>
+            <a:ext cx="11247120" cy="1438656"/>
           </a:xfrm>
           <a:prstGeom prst="rect">
             <a:avLst/>
@@ -14529,8 +14529,8 @@
         </p:nvSpPr>
         <p:spPr>
           <a:xfrm>
-            <a:off x="640080" y="3627120"/>
-            <a:ext cx="10881360" cy="411480"/>
+            <a:off x="640080" y="3560064"/>
+            <a:ext cx="10881360" cy="384048"/>
           </a:xfrm>
           <a:prstGeom prst="rect">
             <a:avLst/>
@@ -14564,8 +14564,8 @@
         </p:nvSpPr>
         <p:spPr>
           <a:xfrm>
-            <a:off x="640080" y="4084320"/>
-            <a:ext cx="10881360" cy="746760"/>
+            <a:off x="640080" y="3962400"/>
+            <a:ext cx="10881360" cy="908304"/>
           </a:xfrm>
           <a:prstGeom prst="rect">
             <a:avLst/>
@@ -14611,8 +14611,8 @@
         </p:nvSpPr>
         <p:spPr>
           <a:xfrm>
-            <a:off x="457200" y="5059680"/>
-            <a:ext cx="11247120" cy="1386840"/>
+            <a:off x="457200" y="5053584"/>
+            <a:ext cx="11247120" cy="1438656"/>
           </a:xfrm>
           <a:prstGeom prst="rect">
             <a:avLst/>
@@ -14653,8 +14653,8 @@
         </p:nvSpPr>
         <p:spPr>
           <a:xfrm>
-            <a:off x="640080" y="5151120"/>
-            <a:ext cx="10881360" cy="411480"/>
+            <a:off x="640080" y="5126736"/>
+            <a:ext cx="10881360" cy="384048"/>
           </a:xfrm>
           <a:prstGeom prst="rect">
             <a:avLst/>
@@ -14688,8 +14688,8 @@
         </p:nvSpPr>
         <p:spPr>
           <a:xfrm>
-            <a:off x="640080" y="5608320"/>
-            <a:ext cx="10881360" cy="746760"/>
+            <a:off x="640080" y="5529072"/>
+            <a:ext cx="10881360" cy="908304"/>
           </a:xfrm>
           <a:prstGeom prst="rect">
             <a:avLst/>
@@ -14893,8 +14893,8 @@
         </p:nvSpPr>
         <p:spPr>
           <a:xfrm>
-            <a:off x="457200" y="2011680"/>
-            <a:ext cx="11247120" cy="1386840"/>
+            <a:off x="457200" y="1920240"/>
+            <a:ext cx="11247120" cy="1438656"/>
           </a:xfrm>
           <a:prstGeom prst="rect">
             <a:avLst/>
@@ -14935,8 +14935,8 @@
         </p:nvSpPr>
         <p:spPr>
           <a:xfrm>
-            <a:off x="640080" y="2103120"/>
-            <a:ext cx="10881360" cy="411480"/>
+            <a:off x="640080" y="1993392"/>
+            <a:ext cx="10881360" cy="384048"/>
           </a:xfrm>
           <a:prstGeom prst="rect">
             <a:avLst/>
@@ -14970,8 +14970,8 @@
         </p:nvSpPr>
         <p:spPr>
           <a:xfrm>
-            <a:off x="640080" y="2560320"/>
-            <a:ext cx="10881360" cy="746760"/>
+            <a:off x="640080" y="2395728"/>
+            <a:ext cx="10881360" cy="908304"/>
           </a:xfrm>
           <a:prstGeom prst="rect">
             <a:avLst/>
@@ -15029,8 +15029,8 @@
         </p:nvSpPr>
         <p:spPr>
           <a:xfrm>
-            <a:off x="457200" y="3535680"/>
-            <a:ext cx="11247120" cy="1386840"/>
+            <a:off x="457200" y="3486912"/>
+            <a:ext cx="11247120" cy="1438656"/>
           </a:xfrm>
           <a:prstGeom prst="rect">
             <a:avLst/>
@@ -15071,8 +15071,8 @@
         </p:nvSpPr>
         <p:spPr>
           <a:xfrm>
-            <a:off x="640080" y="3627120"/>
-            <a:ext cx="10881360" cy="411480"/>
+            <a:off x="640080" y="3560064"/>
+            <a:ext cx="10881360" cy="384048"/>
           </a:xfrm>
           <a:prstGeom prst="rect">
             <a:avLst/>
@@ -15106,8 +15106,8 @@
         </p:nvSpPr>
         <p:spPr>
           <a:xfrm>
-            <a:off x="640080" y="4084320"/>
-            <a:ext cx="10881360" cy="746760"/>
+            <a:off x="640080" y="3962400"/>
+            <a:ext cx="10881360" cy="908304"/>
           </a:xfrm>
           <a:prstGeom prst="rect">
             <a:avLst/>
@@ -15165,8 +15165,8 @@
         </p:nvSpPr>
         <p:spPr>
           <a:xfrm>
-            <a:off x="457200" y="5059680"/>
-            <a:ext cx="11247120" cy="1386840"/>
+            <a:off x="457200" y="5053584"/>
+            <a:ext cx="11247120" cy="1438656"/>
           </a:xfrm>
           <a:prstGeom prst="rect">
             <a:avLst/>
@@ -15207,8 +15207,8 @@
         </p:nvSpPr>
         <p:spPr>
           <a:xfrm>
-            <a:off x="640080" y="5151120"/>
-            <a:ext cx="10881360" cy="411480"/>
+            <a:off x="640080" y="5126736"/>
+            <a:ext cx="10881360" cy="384048"/>
           </a:xfrm>
           <a:prstGeom prst="rect">
             <a:avLst/>
@@ -15242,8 +15242,8 @@
         </p:nvSpPr>
         <p:spPr>
           <a:xfrm>
-            <a:off x="640080" y="5608320"/>
-            <a:ext cx="10881360" cy="746760"/>
+            <a:off x="640080" y="5529072"/>
+            <a:ext cx="10881360" cy="908304"/>
           </a:xfrm>
           <a:prstGeom prst="rect">
             <a:avLst/>
@@ -15447,8 +15447,8 @@
         </p:nvSpPr>
         <p:spPr>
           <a:xfrm>
-            <a:off x="457200" y="2011680"/>
-            <a:ext cx="11247120" cy="1386840"/>
+            <a:off x="457200" y="1920240"/>
+            <a:ext cx="11247120" cy="1438656"/>
           </a:xfrm>
           <a:prstGeom prst="rect">
             <a:avLst/>
@@ -15489,8 +15489,8 @@
         </p:nvSpPr>
         <p:spPr>
           <a:xfrm>
-            <a:off x="640080" y="2103120"/>
-            <a:ext cx="10881360" cy="411480"/>
+            <a:off x="640080" y="1993392"/>
+            <a:ext cx="10881360" cy="384048"/>
           </a:xfrm>
           <a:prstGeom prst="rect">
             <a:avLst/>
@@ -15524,8 +15524,8 @@
         </p:nvSpPr>
         <p:spPr>
           <a:xfrm>
-            <a:off x="640080" y="2560320"/>
-            <a:ext cx="10881360" cy="746760"/>
+            <a:off x="640080" y="2395728"/>
+            <a:ext cx="10881360" cy="908304"/>
           </a:xfrm>
           <a:prstGeom prst="rect">
             <a:avLst/>
@@ -15583,8 +15583,8 @@
         </p:nvSpPr>
         <p:spPr>
           <a:xfrm>
-            <a:off x="457200" y="3535680"/>
-            <a:ext cx="11247120" cy="1386840"/>
+            <a:off x="457200" y="3486912"/>
+            <a:ext cx="11247120" cy="1438656"/>
           </a:xfrm>
           <a:prstGeom prst="rect">
             <a:avLst/>
@@ -15625,8 +15625,8 @@
         </p:nvSpPr>
         <p:spPr>
           <a:xfrm>
-            <a:off x="640080" y="3627120"/>
-            <a:ext cx="10881360" cy="411480"/>
+            <a:off x="640080" y="3560064"/>
+            <a:ext cx="10881360" cy="384048"/>
           </a:xfrm>
           <a:prstGeom prst="rect">
             <a:avLst/>
@@ -15660,8 +15660,8 @@
         </p:nvSpPr>
         <p:spPr>
           <a:xfrm>
-            <a:off x="640080" y="4084320"/>
-            <a:ext cx="10881360" cy="746760"/>
+            <a:off x="640080" y="3962400"/>
+            <a:ext cx="10881360" cy="908304"/>
           </a:xfrm>
           <a:prstGeom prst="rect">
             <a:avLst/>
@@ -15719,8 +15719,8 @@
         </p:nvSpPr>
         <p:spPr>
           <a:xfrm>
-            <a:off x="457200" y="5059680"/>
-            <a:ext cx="11247120" cy="1386840"/>
+            <a:off x="457200" y="5053584"/>
+            <a:ext cx="11247120" cy="1438656"/>
           </a:xfrm>
           <a:prstGeom prst="rect">
             <a:avLst/>
@@ -15761,8 +15761,8 @@
         </p:nvSpPr>
         <p:spPr>
           <a:xfrm>
-            <a:off x="640080" y="5151120"/>
-            <a:ext cx="10881360" cy="411480"/>
+            <a:off x="640080" y="5126736"/>
+            <a:ext cx="10881360" cy="384048"/>
           </a:xfrm>
           <a:prstGeom prst="rect">
             <a:avLst/>
@@ -15796,8 +15796,8 @@
         </p:nvSpPr>
         <p:spPr>
           <a:xfrm>
-            <a:off x="640080" y="5608320"/>
-            <a:ext cx="10881360" cy="746760"/>
+            <a:off x="640080" y="5529072"/>
+            <a:ext cx="10881360" cy="908304"/>
           </a:xfrm>
           <a:prstGeom prst="rect">
             <a:avLst/>
@@ -16013,8 +16013,8 @@
         </p:nvSpPr>
         <p:spPr>
           <a:xfrm>
-            <a:off x="457200" y="2011680"/>
-            <a:ext cx="11247120" cy="1386840"/>
+            <a:off x="457200" y="1920240"/>
+            <a:ext cx="11247120" cy="1438656"/>
           </a:xfrm>
           <a:prstGeom prst="rect">
             <a:avLst/>
@@ -16055,8 +16055,8 @@
         </p:nvSpPr>
         <p:spPr>
           <a:xfrm>
-            <a:off x="640080" y="2103120"/>
-            <a:ext cx="10881360" cy="411480"/>
+            <a:off x="640080" y="1993392"/>
+            <a:ext cx="10881360" cy="384048"/>
           </a:xfrm>
           <a:prstGeom prst="rect">
             <a:avLst/>
@@ -16090,8 +16090,8 @@
         </p:nvSpPr>
         <p:spPr>
           <a:xfrm>
-            <a:off x="640080" y="2560320"/>
-            <a:ext cx="10881360" cy="746760"/>
+            <a:off x="640080" y="2395728"/>
+            <a:ext cx="10881360" cy="908304"/>
           </a:xfrm>
           <a:prstGeom prst="rect">
             <a:avLst/>
@@ -16149,8 +16149,8 @@
         </p:nvSpPr>
         <p:spPr>
           <a:xfrm>
-            <a:off x="457200" y="3535680"/>
-            <a:ext cx="11247120" cy="1386840"/>
+            <a:off x="457200" y="3486912"/>
+            <a:ext cx="11247120" cy="1438656"/>
           </a:xfrm>
           <a:prstGeom prst="rect">
             <a:avLst/>
@@ -16191,8 +16191,8 @@
         </p:nvSpPr>
         <p:spPr>
           <a:xfrm>
-            <a:off x="640080" y="3627120"/>
-            <a:ext cx="10881360" cy="411480"/>
+            <a:off x="640080" y="3560064"/>
+            <a:ext cx="10881360" cy="384048"/>
           </a:xfrm>
           <a:prstGeom prst="rect">
             <a:avLst/>
@@ -16226,8 +16226,8 @@
         </p:nvSpPr>
         <p:spPr>
           <a:xfrm>
-            <a:off x="640080" y="4084320"/>
-            <a:ext cx="10881360" cy="746760"/>
+            <a:off x="640080" y="3962400"/>
+            <a:ext cx="10881360" cy="908304"/>
           </a:xfrm>
           <a:prstGeom prst="rect">
             <a:avLst/>
@@ -16273,8 +16273,8 @@
         </p:nvSpPr>
         <p:spPr>
           <a:xfrm>
-            <a:off x="457200" y="5059680"/>
-            <a:ext cx="11247120" cy="1386840"/>
+            <a:off x="457200" y="5053584"/>
+            <a:ext cx="11247120" cy="1438656"/>
           </a:xfrm>
           <a:prstGeom prst="rect">
             <a:avLst/>
@@ -16315,8 +16315,8 @@
         </p:nvSpPr>
         <p:spPr>
           <a:xfrm>
-            <a:off x="640080" y="5151120"/>
-            <a:ext cx="10881360" cy="411480"/>
+            <a:off x="640080" y="5126736"/>
+            <a:ext cx="10881360" cy="384048"/>
           </a:xfrm>
           <a:prstGeom prst="rect">
             <a:avLst/>
@@ -16350,8 +16350,8 @@
         </p:nvSpPr>
         <p:spPr>
           <a:xfrm>
-            <a:off x="640080" y="5608320"/>
-            <a:ext cx="10881360" cy="746760"/>
+            <a:off x="640080" y="5529072"/>
+            <a:ext cx="10881360" cy="908304"/>
           </a:xfrm>
           <a:prstGeom prst="rect">
             <a:avLst/>
@@ -16567,8 +16567,8 @@
         </p:nvSpPr>
         <p:spPr>
           <a:xfrm>
-            <a:off x="457200" y="2011680"/>
-            <a:ext cx="1920240" cy="484631"/>
+            <a:off x="457200" y="1920240"/>
+            <a:ext cx="1920240" cy="521207"/>
           </a:xfrm>
           <a:prstGeom prst="rect">
             <a:avLst/>
@@ -16609,16 +16609,16 @@
         </p:nvSpPr>
         <p:spPr>
           <a:xfrm>
-            <a:off x="548640" y="2084832"/>
-            <a:ext cx="1828800" cy="347471"/>
-          </a:xfrm>
-          <a:prstGeom prst="rect">
-            <a:avLst/>
-          </a:prstGeom>
-          <a:noFill/>
-        </p:spPr>
-        <p:txBody>
-          <a:bodyPr wrap="square" lIns="45720" rIns="45720" tIns="18288" bIns="18288" anchor="t">
+            <a:off x="548640" y="1965960"/>
+            <a:ext cx="1828800" cy="475488"/>
+          </a:xfrm>
+          <a:prstGeom prst="rect">
+            <a:avLst/>
+          </a:prstGeom>
+          <a:noFill/>
+        </p:spPr>
+        <p:txBody>
+          <a:bodyPr wrap="square" lIns="45720" rIns="45720" tIns="18288" bIns="18288" anchor="ctr">
             <a:spAutoFit/>
           </a:bodyPr>
           <a:lstStyle/>
@@ -16644,16 +16644,16 @@
         </p:nvSpPr>
         <p:spPr>
           <a:xfrm>
-            <a:off x="2514600" y="2084832"/>
-            <a:ext cx="9601200" cy="438912"/>
-          </a:xfrm>
-          <a:prstGeom prst="rect">
-            <a:avLst/>
-          </a:prstGeom>
-          <a:noFill/>
-        </p:spPr>
-        <p:txBody>
-          <a:bodyPr wrap="square" lIns="45720" rIns="45720" tIns="18288" bIns="18288" anchor="t">
+            <a:off x="2514600" y="1965960"/>
+            <a:ext cx="9601200" cy="475488"/>
+          </a:xfrm>
+          <a:prstGeom prst="rect">
+            <a:avLst/>
+          </a:prstGeom>
+          <a:noFill/>
+        </p:spPr>
+        <p:txBody>
+          <a:bodyPr wrap="square" lIns="45720" rIns="45720" tIns="18288" bIns="18288" anchor="ctr">
             <a:spAutoFit/>
           </a:bodyPr>
           <a:lstStyle/>
@@ -16679,8 +16679,8 @@
         </p:nvSpPr>
         <p:spPr>
           <a:xfrm>
-            <a:off x="457200" y="2542032"/>
-            <a:ext cx="1920240" cy="484631"/>
+            <a:off x="457200" y="2487168"/>
+            <a:ext cx="1920240" cy="521207"/>
           </a:xfrm>
           <a:prstGeom prst="rect">
             <a:avLst/>
@@ -16721,16 +16721,16 @@
         </p:nvSpPr>
         <p:spPr>
           <a:xfrm>
-            <a:off x="548640" y="2615184"/>
-            <a:ext cx="1828800" cy="347471"/>
-          </a:xfrm>
-          <a:prstGeom prst="rect">
-            <a:avLst/>
-          </a:prstGeom>
-          <a:noFill/>
-        </p:spPr>
-        <p:txBody>
-          <a:bodyPr wrap="square" lIns="45720" rIns="45720" tIns="18288" bIns="18288" anchor="t">
+            <a:off x="548640" y="2532888"/>
+            <a:ext cx="1828800" cy="475488"/>
+          </a:xfrm>
+          <a:prstGeom prst="rect">
+            <a:avLst/>
+          </a:prstGeom>
+          <a:noFill/>
+        </p:spPr>
+        <p:txBody>
+          <a:bodyPr wrap="square" lIns="45720" rIns="45720" tIns="18288" bIns="18288" anchor="ctr">
             <a:spAutoFit/>
           </a:bodyPr>
           <a:lstStyle/>
@@ -16756,16 +16756,16 @@
         </p:nvSpPr>
         <p:spPr>
           <a:xfrm>
-            <a:off x="2514600" y="2615184"/>
-            <a:ext cx="9601200" cy="438912"/>
-          </a:xfrm>
-          <a:prstGeom prst="rect">
-            <a:avLst/>
-          </a:prstGeom>
-          <a:noFill/>
-        </p:spPr>
-        <p:txBody>
-          <a:bodyPr wrap="square" lIns="45720" rIns="45720" tIns="18288" bIns="18288" anchor="t">
+            <a:off x="2514600" y="2532888"/>
+            <a:ext cx="9601200" cy="475488"/>
+          </a:xfrm>
+          <a:prstGeom prst="rect">
+            <a:avLst/>
+          </a:prstGeom>
+          <a:noFill/>
+        </p:spPr>
+        <p:txBody>
+          <a:bodyPr wrap="square" lIns="45720" rIns="45720" tIns="18288" bIns="18288" anchor="ctr">
             <a:spAutoFit/>
           </a:bodyPr>
           <a:lstStyle/>
@@ -16791,8 +16791,8 @@
         </p:nvSpPr>
         <p:spPr>
           <a:xfrm>
-            <a:off x="457200" y="3072384"/>
-            <a:ext cx="1920240" cy="484631"/>
+            <a:off x="457200" y="3054096"/>
+            <a:ext cx="1920240" cy="521207"/>
           </a:xfrm>
           <a:prstGeom prst="rect">
             <a:avLst/>
@@ -16833,16 +16833,16 @@
         </p:nvSpPr>
         <p:spPr>
           <a:xfrm>
-            <a:off x="548640" y="3145536"/>
-            <a:ext cx="1828800" cy="347471"/>
-          </a:xfrm>
-          <a:prstGeom prst="rect">
-            <a:avLst/>
-          </a:prstGeom>
-          <a:noFill/>
-        </p:spPr>
-        <p:txBody>
-          <a:bodyPr wrap="square" lIns="45720" rIns="45720" tIns="18288" bIns="18288" anchor="t">
+            <a:off x="548640" y="3099815"/>
+            <a:ext cx="1828800" cy="475488"/>
+          </a:xfrm>
+          <a:prstGeom prst="rect">
+            <a:avLst/>
+          </a:prstGeom>
+          <a:noFill/>
+        </p:spPr>
+        <p:txBody>
+          <a:bodyPr wrap="square" lIns="45720" rIns="45720" tIns="18288" bIns="18288" anchor="ctr">
             <a:spAutoFit/>
           </a:bodyPr>
           <a:lstStyle/>
@@ -16868,16 +16868,16 @@
         </p:nvSpPr>
         <p:spPr>
           <a:xfrm>
-            <a:off x="2514600" y="3145536"/>
-            <a:ext cx="9601200" cy="438912"/>
-          </a:xfrm>
-          <a:prstGeom prst="rect">
-            <a:avLst/>
-          </a:prstGeom>
-          <a:noFill/>
-        </p:spPr>
-        <p:txBody>
-          <a:bodyPr wrap="square" lIns="45720" rIns="45720" tIns="18288" bIns="18288" anchor="t">
+            <a:off x="2514600" y="3099815"/>
+            <a:ext cx="9601200" cy="475488"/>
+          </a:xfrm>
+          <a:prstGeom prst="rect">
+            <a:avLst/>
+          </a:prstGeom>
+          <a:noFill/>
+        </p:spPr>
+        <p:txBody>
+          <a:bodyPr wrap="square" lIns="45720" rIns="45720" tIns="18288" bIns="18288" anchor="ctr">
             <a:spAutoFit/>
           </a:bodyPr>
           <a:lstStyle/>
@@ -16903,8 +16903,8 @@
         </p:nvSpPr>
         <p:spPr>
           <a:xfrm>
-            <a:off x="457200" y="3602736"/>
-            <a:ext cx="1920240" cy="484631"/>
+            <a:off x="457200" y="3621024"/>
+            <a:ext cx="1920240" cy="521207"/>
           </a:xfrm>
           <a:prstGeom prst="rect">
             <a:avLst/>
@@ -16945,16 +16945,16 @@
         </p:nvSpPr>
         <p:spPr>
           <a:xfrm>
-            <a:off x="548640" y="3675887"/>
-            <a:ext cx="1828800" cy="347471"/>
-          </a:xfrm>
-          <a:prstGeom prst="rect">
-            <a:avLst/>
-          </a:prstGeom>
-          <a:noFill/>
-        </p:spPr>
-        <p:txBody>
-          <a:bodyPr wrap="square" lIns="45720" rIns="45720" tIns="18288" bIns="18288" anchor="t">
+            <a:off x="548640" y="3666744"/>
+            <a:ext cx="1828800" cy="475488"/>
+          </a:xfrm>
+          <a:prstGeom prst="rect">
+            <a:avLst/>
+          </a:prstGeom>
+          <a:noFill/>
+        </p:spPr>
+        <p:txBody>
+          <a:bodyPr wrap="square" lIns="45720" rIns="45720" tIns="18288" bIns="18288" anchor="ctr">
             <a:spAutoFit/>
           </a:bodyPr>
           <a:lstStyle/>
@@ -16980,16 +16980,16 @@
         </p:nvSpPr>
         <p:spPr>
           <a:xfrm>
-            <a:off x="2514600" y="3675887"/>
-            <a:ext cx="9601200" cy="438912"/>
-          </a:xfrm>
-          <a:prstGeom prst="rect">
-            <a:avLst/>
-          </a:prstGeom>
-          <a:noFill/>
-        </p:spPr>
-        <p:txBody>
-          <a:bodyPr wrap="square" lIns="45720" rIns="45720" tIns="18288" bIns="18288" anchor="t">
+            <a:off x="2514600" y="3666744"/>
+            <a:ext cx="9601200" cy="475488"/>
+          </a:xfrm>
+          <a:prstGeom prst="rect">
+            <a:avLst/>
+          </a:prstGeom>
+          <a:noFill/>
+        </p:spPr>
+        <p:txBody>
+          <a:bodyPr wrap="square" lIns="45720" rIns="45720" tIns="18288" bIns="18288" anchor="ctr">
             <a:spAutoFit/>
           </a:bodyPr>
           <a:lstStyle/>
@@ -17015,8 +17015,8 @@
         </p:nvSpPr>
         <p:spPr>
           <a:xfrm>
-            <a:off x="457200" y="4133087"/>
-            <a:ext cx="1920240" cy="484631"/>
+            <a:off x="457200" y="4187952"/>
+            <a:ext cx="1920240" cy="521207"/>
           </a:xfrm>
           <a:prstGeom prst="rect">
             <a:avLst/>
@@ -17057,16 +17057,16 @@
         </p:nvSpPr>
         <p:spPr>
           <a:xfrm>
-            <a:off x="548640" y="4206240"/>
-            <a:ext cx="1828800" cy="347471"/>
-          </a:xfrm>
-          <a:prstGeom prst="rect">
-            <a:avLst/>
-          </a:prstGeom>
-          <a:noFill/>
-        </p:spPr>
-        <p:txBody>
-          <a:bodyPr wrap="square" lIns="45720" rIns="45720" tIns="18288" bIns="18288" anchor="t">
+            <a:off x="548640" y="4233672"/>
+            <a:ext cx="1828800" cy="475488"/>
+          </a:xfrm>
+          <a:prstGeom prst="rect">
+            <a:avLst/>
+          </a:prstGeom>
+          <a:noFill/>
+        </p:spPr>
+        <p:txBody>
+          <a:bodyPr wrap="square" lIns="45720" rIns="45720" tIns="18288" bIns="18288" anchor="ctr">
             <a:spAutoFit/>
           </a:bodyPr>
           <a:lstStyle/>
@@ -17092,16 +17092,16 @@
         </p:nvSpPr>
         <p:spPr>
           <a:xfrm>
-            <a:off x="2514600" y="4206240"/>
-            <a:ext cx="9601200" cy="438912"/>
-          </a:xfrm>
-          <a:prstGeom prst="rect">
-            <a:avLst/>
-          </a:prstGeom>
-          <a:noFill/>
-        </p:spPr>
-        <p:txBody>
-          <a:bodyPr wrap="square" lIns="45720" rIns="45720" tIns="18288" bIns="18288" anchor="t">
+            <a:off x="2514600" y="4233672"/>
+            <a:ext cx="9601200" cy="475488"/>
+          </a:xfrm>
+          <a:prstGeom prst="rect">
+            <a:avLst/>
+          </a:prstGeom>
+          <a:noFill/>
+        </p:spPr>
+        <p:txBody>
+          <a:bodyPr wrap="square" lIns="45720" rIns="45720" tIns="18288" bIns="18288" anchor="ctr">
             <a:spAutoFit/>
           </a:bodyPr>
           <a:lstStyle/>
@@ -17127,8 +17127,8 @@
         </p:nvSpPr>
         <p:spPr>
           <a:xfrm>
-            <a:off x="457200" y="4663440"/>
-            <a:ext cx="1920240" cy="484631"/>
+            <a:off x="457200" y="4754880"/>
+            <a:ext cx="1920240" cy="521207"/>
           </a:xfrm>
           <a:prstGeom prst="rect">
             <a:avLst/>
@@ -17169,16 +17169,16 @@
         </p:nvSpPr>
         <p:spPr>
           <a:xfrm>
-            <a:off x="548640" y="4736592"/>
-            <a:ext cx="1828800" cy="347471"/>
-          </a:xfrm>
-          <a:prstGeom prst="rect">
-            <a:avLst/>
-          </a:prstGeom>
-          <a:noFill/>
-        </p:spPr>
-        <p:txBody>
-          <a:bodyPr wrap="square" lIns="45720" rIns="45720" tIns="18288" bIns="18288" anchor="t">
+            <a:off x="548640" y="4800600"/>
+            <a:ext cx="1828800" cy="475488"/>
+          </a:xfrm>
+          <a:prstGeom prst="rect">
+            <a:avLst/>
+          </a:prstGeom>
+          <a:noFill/>
+        </p:spPr>
+        <p:txBody>
+          <a:bodyPr wrap="square" lIns="45720" rIns="45720" tIns="18288" bIns="18288" anchor="ctr">
             <a:spAutoFit/>
           </a:bodyPr>
           <a:lstStyle/>
@@ -17204,16 +17204,16 @@
         </p:nvSpPr>
         <p:spPr>
           <a:xfrm>
-            <a:off x="2514600" y="4736592"/>
-            <a:ext cx="9601200" cy="438912"/>
-          </a:xfrm>
-          <a:prstGeom prst="rect">
-            <a:avLst/>
-          </a:prstGeom>
-          <a:noFill/>
-        </p:spPr>
-        <p:txBody>
-          <a:bodyPr wrap="square" lIns="45720" rIns="45720" tIns="18288" bIns="18288" anchor="t">
+            <a:off x="2514600" y="4800600"/>
+            <a:ext cx="9601200" cy="475488"/>
+          </a:xfrm>
+          <a:prstGeom prst="rect">
+            <a:avLst/>
+          </a:prstGeom>
+          <a:noFill/>
+        </p:spPr>
+        <p:txBody>
+          <a:bodyPr wrap="square" lIns="45720" rIns="45720" tIns="18288" bIns="18288" anchor="ctr">
             <a:spAutoFit/>
           </a:bodyPr>
           <a:lstStyle/>
@@ -17239,8 +17239,8 @@
         </p:nvSpPr>
         <p:spPr>
           <a:xfrm>
-            <a:off x="457200" y="5193792"/>
-            <a:ext cx="1920240" cy="484631"/>
+            <a:off x="457200" y="5321808"/>
+            <a:ext cx="1920240" cy="521207"/>
           </a:xfrm>
           <a:prstGeom prst="rect">
             <a:avLst/>
@@ -17281,16 +17281,16 @@
         </p:nvSpPr>
         <p:spPr>
           <a:xfrm>
-            <a:off x="548640" y="5266944"/>
-            <a:ext cx="1828800" cy="347471"/>
-          </a:xfrm>
-          <a:prstGeom prst="rect">
-            <a:avLst/>
-          </a:prstGeom>
-          <a:noFill/>
-        </p:spPr>
-        <p:txBody>
-          <a:bodyPr wrap="square" lIns="45720" rIns="45720" tIns="18288" bIns="18288" anchor="t">
+            <a:off x="548640" y="5367528"/>
+            <a:ext cx="1828800" cy="475488"/>
+          </a:xfrm>
+          <a:prstGeom prst="rect">
+            <a:avLst/>
+          </a:prstGeom>
+          <a:noFill/>
+        </p:spPr>
+        <p:txBody>
+          <a:bodyPr wrap="square" lIns="45720" rIns="45720" tIns="18288" bIns="18288" anchor="ctr">
             <a:spAutoFit/>
           </a:bodyPr>
           <a:lstStyle/>
@@ -17316,16 +17316,16 @@
         </p:nvSpPr>
         <p:spPr>
           <a:xfrm>
-            <a:off x="2514600" y="5266944"/>
-            <a:ext cx="9601200" cy="438912"/>
-          </a:xfrm>
-          <a:prstGeom prst="rect">
-            <a:avLst/>
-          </a:prstGeom>
-          <a:noFill/>
-        </p:spPr>
-        <p:txBody>
-          <a:bodyPr wrap="square" lIns="45720" rIns="45720" tIns="18288" bIns="18288" anchor="t">
+            <a:off x="2514600" y="5367528"/>
+            <a:ext cx="9601200" cy="475488"/>
+          </a:xfrm>
+          <a:prstGeom prst="rect">
+            <a:avLst/>
+          </a:prstGeom>
+          <a:noFill/>
+        </p:spPr>
+        <p:txBody>
+          <a:bodyPr wrap="square" lIns="45720" rIns="45720" tIns="18288" bIns="18288" anchor="ctr">
             <a:spAutoFit/>
           </a:bodyPr>
           <a:lstStyle/>
@@ -17351,8 +17351,8 @@
         </p:nvSpPr>
         <p:spPr>
           <a:xfrm>
-            <a:off x="457200" y="5724144"/>
-            <a:ext cx="1920240" cy="484631"/>
+            <a:off x="457200" y="5888736"/>
+            <a:ext cx="1920240" cy="521207"/>
           </a:xfrm>
           <a:prstGeom prst="rect">
             <a:avLst/>
@@ -17393,16 +17393,16 @@
         </p:nvSpPr>
         <p:spPr>
           <a:xfrm>
-            <a:off x="548640" y="5797296"/>
-            <a:ext cx="1828800" cy="347471"/>
-          </a:xfrm>
-          <a:prstGeom prst="rect">
-            <a:avLst/>
-          </a:prstGeom>
-          <a:noFill/>
-        </p:spPr>
-        <p:txBody>
-          <a:bodyPr wrap="square" lIns="45720" rIns="45720" tIns="18288" bIns="18288" anchor="t">
+            <a:off x="548640" y="5934455"/>
+            <a:ext cx="1828800" cy="475488"/>
+          </a:xfrm>
+          <a:prstGeom prst="rect">
+            <a:avLst/>
+          </a:prstGeom>
+          <a:noFill/>
+        </p:spPr>
+        <p:txBody>
+          <a:bodyPr wrap="square" lIns="45720" rIns="45720" tIns="18288" bIns="18288" anchor="ctr">
             <a:spAutoFit/>
           </a:bodyPr>
           <a:lstStyle/>
@@ -17428,16 +17428,16 @@
         </p:nvSpPr>
         <p:spPr>
           <a:xfrm>
-            <a:off x="2514600" y="5797296"/>
-            <a:ext cx="9601200" cy="438912"/>
-          </a:xfrm>
-          <a:prstGeom prst="rect">
-            <a:avLst/>
-          </a:prstGeom>
-          <a:noFill/>
-        </p:spPr>
-        <p:txBody>
-          <a:bodyPr wrap="square" lIns="45720" rIns="45720" tIns="18288" bIns="18288" anchor="t">
+            <a:off x="2514600" y="5934455"/>
+            <a:ext cx="9601200" cy="475488"/>
+          </a:xfrm>
+          <a:prstGeom prst="rect">
+            <a:avLst/>
+          </a:prstGeom>
+          <a:noFill/>
+        </p:spPr>
+        <p:txBody>
+          <a:bodyPr wrap="square" lIns="45720" rIns="45720" tIns="18288" bIns="18288" anchor="ctr">
             <a:spAutoFit/>
           </a:bodyPr>
           <a:lstStyle/>
@@ -17621,8 +17621,8 @@
         </p:nvSpPr>
         <p:spPr>
           <a:xfrm>
-            <a:off x="457200" y="2011680"/>
-            <a:ext cx="11247120" cy="1386840"/>
+            <a:off x="457200" y="1920240"/>
+            <a:ext cx="11247120" cy="1438656"/>
           </a:xfrm>
           <a:prstGeom prst="rect">
             <a:avLst/>
@@ -17663,8 +17663,8 @@
         </p:nvSpPr>
         <p:spPr>
           <a:xfrm>
-            <a:off x="640080" y="2103120"/>
-            <a:ext cx="10881360" cy="411480"/>
+            <a:off x="640080" y="1993392"/>
+            <a:ext cx="10881360" cy="384048"/>
           </a:xfrm>
           <a:prstGeom prst="rect">
             <a:avLst/>
@@ -17698,8 +17698,8 @@
         </p:nvSpPr>
         <p:spPr>
           <a:xfrm>
-            <a:off x="640080" y="2560320"/>
-            <a:ext cx="10881360" cy="746760"/>
+            <a:off x="640080" y="2395728"/>
+            <a:ext cx="10881360" cy="908304"/>
           </a:xfrm>
           <a:prstGeom prst="rect">
             <a:avLst/>
@@ -17757,8 +17757,8 @@
         </p:nvSpPr>
         <p:spPr>
           <a:xfrm>
-            <a:off x="457200" y="3535680"/>
-            <a:ext cx="11247120" cy="1386840"/>
+            <a:off x="457200" y="3486912"/>
+            <a:ext cx="11247120" cy="1438656"/>
           </a:xfrm>
           <a:prstGeom prst="rect">
             <a:avLst/>
@@ -17799,8 +17799,8 @@
         </p:nvSpPr>
         <p:spPr>
           <a:xfrm>
-            <a:off x="640080" y="3627120"/>
-            <a:ext cx="10881360" cy="411480"/>
+            <a:off x="640080" y="3560064"/>
+            <a:ext cx="10881360" cy="384048"/>
           </a:xfrm>
           <a:prstGeom prst="rect">
             <a:avLst/>
@@ -17834,8 +17834,8 @@
         </p:nvSpPr>
         <p:spPr>
           <a:xfrm>
-            <a:off x="640080" y="4084320"/>
-            <a:ext cx="10881360" cy="746760"/>
+            <a:off x="640080" y="3962400"/>
+            <a:ext cx="10881360" cy="908304"/>
           </a:xfrm>
           <a:prstGeom prst="rect">
             <a:avLst/>
@@ -17893,8 +17893,8 @@
         </p:nvSpPr>
         <p:spPr>
           <a:xfrm>
-            <a:off x="457200" y="5059680"/>
-            <a:ext cx="11247120" cy="1386840"/>
+            <a:off x="457200" y="5053584"/>
+            <a:ext cx="11247120" cy="1438656"/>
           </a:xfrm>
           <a:prstGeom prst="rect">
             <a:avLst/>
@@ -17935,8 +17935,8 @@
         </p:nvSpPr>
         <p:spPr>
           <a:xfrm>
-            <a:off x="640080" y="5151120"/>
-            <a:ext cx="10881360" cy="411480"/>
+            <a:off x="640080" y="5126736"/>
+            <a:ext cx="10881360" cy="384048"/>
           </a:xfrm>
           <a:prstGeom prst="rect">
             <a:avLst/>
@@ -17970,8 +17970,8 @@
         </p:nvSpPr>
         <p:spPr>
           <a:xfrm>
-            <a:off x="640080" y="5608320"/>
-            <a:ext cx="10881360" cy="746760"/>
+            <a:off x="640080" y="5529072"/>
+            <a:ext cx="10881360" cy="908304"/>
           </a:xfrm>
           <a:prstGeom prst="rect">
             <a:avLst/>
@@ -18187,8 +18187,8 @@
         </p:nvSpPr>
         <p:spPr>
           <a:xfrm>
-            <a:off x="457200" y="2011680"/>
-            <a:ext cx="1920240" cy="484631"/>
+            <a:off x="457200" y="1920240"/>
+            <a:ext cx="1920240" cy="521207"/>
           </a:xfrm>
           <a:prstGeom prst="rect">
             <a:avLst/>
@@ -18229,16 +18229,16 @@
         </p:nvSpPr>
         <p:spPr>
           <a:xfrm>
-            <a:off x="548640" y="2084832"/>
-            <a:ext cx="1828800" cy="347471"/>
-          </a:xfrm>
-          <a:prstGeom prst="rect">
-            <a:avLst/>
-          </a:prstGeom>
-          <a:noFill/>
-        </p:spPr>
-        <p:txBody>
-          <a:bodyPr wrap="square" lIns="45720" rIns="45720" tIns="18288" bIns="18288" anchor="t">
+            <a:off x="548640" y="1965960"/>
+            <a:ext cx="1828800" cy="475488"/>
+          </a:xfrm>
+          <a:prstGeom prst="rect">
+            <a:avLst/>
+          </a:prstGeom>
+          <a:noFill/>
+        </p:spPr>
+        <p:txBody>
+          <a:bodyPr wrap="square" lIns="45720" rIns="45720" tIns="18288" bIns="18288" anchor="ctr">
             <a:spAutoFit/>
           </a:bodyPr>
           <a:lstStyle/>
@@ -18264,16 +18264,16 @@
         </p:nvSpPr>
         <p:spPr>
           <a:xfrm>
-            <a:off x="2514600" y="2084832"/>
-            <a:ext cx="9601200" cy="438912"/>
-          </a:xfrm>
-          <a:prstGeom prst="rect">
-            <a:avLst/>
-          </a:prstGeom>
-          <a:noFill/>
-        </p:spPr>
-        <p:txBody>
-          <a:bodyPr wrap="square" lIns="45720" rIns="45720" tIns="18288" bIns="18288" anchor="t">
+            <a:off x="2514600" y="1965960"/>
+            <a:ext cx="9601200" cy="475488"/>
+          </a:xfrm>
+          <a:prstGeom prst="rect">
+            <a:avLst/>
+          </a:prstGeom>
+          <a:noFill/>
+        </p:spPr>
+        <p:txBody>
+          <a:bodyPr wrap="square" lIns="45720" rIns="45720" tIns="18288" bIns="18288" anchor="ctr">
             <a:spAutoFit/>
           </a:bodyPr>
           <a:lstStyle/>
@@ -18299,8 +18299,8 @@
         </p:nvSpPr>
         <p:spPr>
           <a:xfrm>
-            <a:off x="457200" y="2542032"/>
-            <a:ext cx="1920240" cy="484631"/>
+            <a:off x="457200" y="2487168"/>
+            <a:ext cx="1920240" cy="521207"/>
           </a:xfrm>
           <a:prstGeom prst="rect">
             <a:avLst/>
@@ -18341,16 +18341,16 @@
         </p:nvSpPr>
         <p:spPr>
           <a:xfrm>
-            <a:off x="548640" y="2615184"/>
-            <a:ext cx="1828800" cy="347471"/>
-          </a:xfrm>
-          <a:prstGeom prst="rect">
-            <a:avLst/>
-          </a:prstGeom>
-          <a:noFill/>
-        </p:spPr>
-        <p:txBody>
-          <a:bodyPr wrap="square" lIns="45720" rIns="45720" tIns="18288" bIns="18288" anchor="t">
+            <a:off x="548640" y="2532888"/>
+            <a:ext cx="1828800" cy="475488"/>
+          </a:xfrm>
+          <a:prstGeom prst="rect">
+            <a:avLst/>
+          </a:prstGeom>
+          <a:noFill/>
+        </p:spPr>
+        <p:txBody>
+          <a:bodyPr wrap="square" lIns="45720" rIns="45720" tIns="18288" bIns="18288" anchor="ctr">
             <a:spAutoFit/>
           </a:bodyPr>
           <a:lstStyle/>
@@ -18376,16 +18376,16 @@
         </p:nvSpPr>
         <p:spPr>
           <a:xfrm>
-            <a:off x="2514600" y="2615184"/>
-            <a:ext cx="9601200" cy="438912"/>
-          </a:xfrm>
-          <a:prstGeom prst="rect">
-            <a:avLst/>
-          </a:prstGeom>
-          <a:noFill/>
-        </p:spPr>
-        <p:txBody>
-          <a:bodyPr wrap="square" lIns="45720" rIns="45720" tIns="18288" bIns="18288" anchor="t">
+            <a:off x="2514600" y="2532888"/>
+            <a:ext cx="9601200" cy="475488"/>
+          </a:xfrm>
+          <a:prstGeom prst="rect">
+            <a:avLst/>
+          </a:prstGeom>
+          <a:noFill/>
+        </p:spPr>
+        <p:txBody>
+          <a:bodyPr wrap="square" lIns="45720" rIns="45720" tIns="18288" bIns="18288" anchor="ctr">
             <a:spAutoFit/>
           </a:bodyPr>
           <a:lstStyle/>
@@ -18411,8 +18411,8 @@
         </p:nvSpPr>
         <p:spPr>
           <a:xfrm>
-            <a:off x="457200" y="3072384"/>
-            <a:ext cx="1920240" cy="484631"/>
+            <a:off x="457200" y="3054096"/>
+            <a:ext cx="1920240" cy="521207"/>
           </a:xfrm>
           <a:prstGeom prst="rect">
             <a:avLst/>
@@ -18453,16 +18453,16 @@
         </p:nvSpPr>
         <p:spPr>
           <a:xfrm>
-            <a:off x="548640" y="3145536"/>
-            <a:ext cx="1828800" cy="347471"/>
-          </a:xfrm>
-          <a:prstGeom prst="rect">
-            <a:avLst/>
-          </a:prstGeom>
-          <a:noFill/>
-        </p:spPr>
-        <p:txBody>
-          <a:bodyPr wrap="square" lIns="45720" rIns="45720" tIns="18288" bIns="18288" anchor="t">
+            <a:off x="548640" y="3099815"/>
+            <a:ext cx="1828800" cy="475488"/>
+          </a:xfrm>
+          <a:prstGeom prst="rect">
+            <a:avLst/>
+          </a:prstGeom>
+          <a:noFill/>
+        </p:spPr>
+        <p:txBody>
+          <a:bodyPr wrap="square" lIns="45720" rIns="45720" tIns="18288" bIns="18288" anchor="ctr">
             <a:spAutoFit/>
           </a:bodyPr>
           <a:lstStyle/>
@@ -18488,16 +18488,16 @@
         </p:nvSpPr>
         <p:spPr>
           <a:xfrm>
-            <a:off x="2514600" y="3145536"/>
-            <a:ext cx="9601200" cy="438912"/>
-          </a:xfrm>
-          <a:prstGeom prst="rect">
-            <a:avLst/>
-          </a:prstGeom>
-          <a:noFill/>
-        </p:spPr>
-        <p:txBody>
-          <a:bodyPr wrap="square" lIns="45720" rIns="45720" tIns="18288" bIns="18288" anchor="t">
+            <a:off x="2514600" y="3099815"/>
+            <a:ext cx="9601200" cy="475488"/>
+          </a:xfrm>
+          <a:prstGeom prst="rect">
+            <a:avLst/>
+          </a:prstGeom>
+          <a:noFill/>
+        </p:spPr>
+        <p:txBody>
+          <a:bodyPr wrap="square" lIns="45720" rIns="45720" tIns="18288" bIns="18288" anchor="ctr">
             <a:spAutoFit/>
           </a:bodyPr>
           <a:lstStyle/>
@@ -18523,8 +18523,8 @@
         </p:nvSpPr>
         <p:spPr>
           <a:xfrm>
-            <a:off x="457200" y="3602736"/>
-            <a:ext cx="1920240" cy="484631"/>
+            <a:off x="457200" y="3621024"/>
+            <a:ext cx="1920240" cy="521207"/>
           </a:xfrm>
           <a:prstGeom prst="rect">
             <a:avLst/>
@@ -18565,16 +18565,16 @@
         </p:nvSpPr>
         <p:spPr>
           <a:xfrm>
-            <a:off x="548640" y="3675887"/>
-            <a:ext cx="1828800" cy="347471"/>
-          </a:xfrm>
-          <a:prstGeom prst="rect">
-            <a:avLst/>
-          </a:prstGeom>
-          <a:noFill/>
-        </p:spPr>
-        <p:txBody>
-          <a:bodyPr wrap="square" lIns="45720" rIns="45720" tIns="18288" bIns="18288" anchor="t">
+            <a:off x="548640" y="3666744"/>
+            <a:ext cx="1828800" cy="475488"/>
+          </a:xfrm>
+          <a:prstGeom prst="rect">
+            <a:avLst/>
+          </a:prstGeom>
+          <a:noFill/>
+        </p:spPr>
+        <p:txBody>
+          <a:bodyPr wrap="square" lIns="45720" rIns="45720" tIns="18288" bIns="18288" anchor="ctr">
             <a:spAutoFit/>
           </a:bodyPr>
           <a:lstStyle/>
@@ -18600,16 +18600,16 @@
         </p:nvSpPr>
         <p:spPr>
           <a:xfrm>
-            <a:off x="2514600" y="3675887"/>
-            <a:ext cx="9601200" cy="438912"/>
-          </a:xfrm>
-          <a:prstGeom prst="rect">
-            <a:avLst/>
-          </a:prstGeom>
-          <a:noFill/>
-        </p:spPr>
-        <p:txBody>
-          <a:bodyPr wrap="square" lIns="45720" rIns="45720" tIns="18288" bIns="18288" anchor="t">
+            <a:off x="2514600" y="3666744"/>
+            <a:ext cx="9601200" cy="475488"/>
+          </a:xfrm>
+          <a:prstGeom prst="rect">
+            <a:avLst/>
+          </a:prstGeom>
+          <a:noFill/>
+        </p:spPr>
+        <p:txBody>
+          <a:bodyPr wrap="square" lIns="45720" rIns="45720" tIns="18288" bIns="18288" anchor="ctr">
             <a:spAutoFit/>
           </a:bodyPr>
           <a:lstStyle/>
@@ -18635,8 +18635,8 @@
         </p:nvSpPr>
         <p:spPr>
           <a:xfrm>
-            <a:off x="457200" y="4133087"/>
-            <a:ext cx="1920240" cy="484631"/>
+            <a:off x="457200" y="4187952"/>
+            <a:ext cx="1920240" cy="521207"/>
           </a:xfrm>
           <a:prstGeom prst="rect">
             <a:avLst/>
@@ -18677,16 +18677,16 @@
         </p:nvSpPr>
         <p:spPr>
           <a:xfrm>
-            <a:off x="548640" y="4206240"/>
-            <a:ext cx="1828800" cy="347471"/>
-          </a:xfrm>
-          <a:prstGeom prst="rect">
-            <a:avLst/>
-          </a:prstGeom>
-          <a:noFill/>
-        </p:spPr>
-        <p:txBody>
-          <a:bodyPr wrap="square" lIns="45720" rIns="45720" tIns="18288" bIns="18288" anchor="t">
+            <a:off x="548640" y="4233672"/>
+            <a:ext cx="1828800" cy="475488"/>
+          </a:xfrm>
+          <a:prstGeom prst="rect">
+            <a:avLst/>
+          </a:prstGeom>
+          <a:noFill/>
+        </p:spPr>
+        <p:txBody>
+          <a:bodyPr wrap="square" lIns="45720" rIns="45720" tIns="18288" bIns="18288" anchor="ctr">
             <a:spAutoFit/>
           </a:bodyPr>
           <a:lstStyle/>
@@ -18712,16 +18712,16 @@
         </p:nvSpPr>
         <p:spPr>
           <a:xfrm>
-            <a:off x="2514600" y="4206240"/>
-            <a:ext cx="9601200" cy="438912"/>
-          </a:xfrm>
-          <a:prstGeom prst="rect">
-            <a:avLst/>
-          </a:prstGeom>
-          <a:noFill/>
-        </p:spPr>
-        <p:txBody>
-          <a:bodyPr wrap="square" lIns="45720" rIns="45720" tIns="18288" bIns="18288" anchor="t">
+            <a:off x="2514600" y="4233672"/>
+            <a:ext cx="9601200" cy="475488"/>
+          </a:xfrm>
+          <a:prstGeom prst="rect">
+            <a:avLst/>
+          </a:prstGeom>
+          <a:noFill/>
+        </p:spPr>
+        <p:txBody>
+          <a:bodyPr wrap="square" lIns="45720" rIns="45720" tIns="18288" bIns="18288" anchor="ctr">
             <a:spAutoFit/>
           </a:bodyPr>
           <a:lstStyle/>
@@ -18747,8 +18747,8 @@
         </p:nvSpPr>
         <p:spPr>
           <a:xfrm>
-            <a:off x="457200" y="4663440"/>
-            <a:ext cx="1920240" cy="484631"/>
+            <a:off x="457200" y="4754880"/>
+            <a:ext cx="1920240" cy="521207"/>
           </a:xfrm>
           <a:prstGeom prst="rect">
             <a:avLst/>
@@ -18789,16 +18789,16 @@
         </p:nvSpPr>
         <p:spPr>
           <a:xfrm>
-            <a:off x="548640" y="4736592"/>
-            <a:ext cx="1828800" cy="347471"/>
-          </a:xfrm>
-          <a:prstGeom prst="rect">
-            <a:avLst/>
-          </a:prstGeom>
-          <a:noFill/>
-        </p:spPr>
-        <p:txBody>
-          <a:bodyPr wrap="square" lIns="45720" rIns="45720" tIns="18288" bIns="18288" anchor="t">
+            <a:off x="548640" y="4800600"/>
+            <a:ext cx="1828800" cy="475488"/>
+          </a:xfrm>
+          <a:prstGeom prst="rect">
+            <a:avLst/>
+          </a:prstGeom>
+          <a:noFill/>
+        </p:spPr>
+        <p:txBody>
+          <a:bodyPr wrap="square" lIns="45720" rIns="45720" tIns="18288" bIns="18288" anchor="ctr">
             <a:spAutoFit/>
           </a:bodyPr>
           <a:lstStyle/>
@@ -18824,16 +18824,16 @@
         </p:nvSpPr>
         <p:spPr>
           <a:xfrm>
-            <a:off x="2514600" y="4736592"/>
-            <a:ext cx="9601200" cy="438912"/>
-          </a:xfrm>
-          <a:prstGeom prst="rect">
-            <a:avLst/>
-          </a:prstGeom>
-          <a:noFill/>
-        </p:spPr>
-        <p:txBody>
-          <a:bodyPr wrap="square" lIns="45720" rIns="45720" tIns="18288" bIns="18288" anchor="t">
+            <a:off x="2514600" y="4800600"/>
+            <a:ext cx="9601200" cy="475488"/>
+          </a:xfrm>
+          <a:prstGeom prst="rect">
+            <a:avLst/>
+          </a:prstGeom>
+          <a:noFill/>
+        </p:spPr>
+        <p:txBody>
+          <a:bodyPr wrap="square" lIns="45720" rIns="45720" tIns="18288" bIns="18288" anchor="ctr">
             <a:spAutoFit/>
           </a:bodyPr>
           <a:lstStyle/>
@@ -18859,8 +18859,8 @@
         </p:nvSpPr>
         <p:spPr>
           <a:xfrm>
-            <a:off x="457200" y="5193792"/>
-            <a:ext cx="1920240" cy="484631"/>
+            <a:off x="457200" y="5321808"/>
+            <a:ext cx="1920240" cy="521207"/>
           </a:xfrm>
           <a:prstGeom prst="rect">
             <a:avLst/>
@@ -18901,16 +18901,16 @@
         </p:nvSpPr>
         <p:spPr>
           <a:xfrm>
-            <a:off x="548640" y="5266944"/>
-            <a:ext cx="1828800" cy="347471"/>
-          </a:xfrm>
-          <a:prstGeom prst="rect">
-            <a:avLst/>
-          </a:prstGeom>
-          <a:noFill/>
-        </p:spPr>
-        <p:txBody>
-          <a:bodyPr wrap="square" lIns="45720" rIns="45720" tIns="18288" bIns="18288" anchor="t">
+            <a:off x="548640" y="5367528"/>
+            <a:ext cx="1828800" cy="475488"/>
+          </a:xfrm>
+          <a:prstGeom prst="rect">
+            <a:avLst/>
+          </a:prstGeom>
+          <a:noFill/>
+        </p:spPr>
+        <p:txBody>
+          <a:bodyPr wrap="square" lIns="45720" rIns="45720" tIns="18288" bIns="18288" anchor="ctr">
             <a:spAutoFit/>
           </a:bodyPr>
           <a:lstStyle/>
@@ -18936,16 +18936,16 @@
         </p:nvSpPr>
         <p:spPr>
           <a:xfrm>
-            <a:off x="2514600" y="5266944"/>
-            <a:ext cx="9601200" cy="438912"/>
-          </a:xfrm>
-          <a:prstGeom prst="rect">
-            <a:avLst/>
-          </a:prstGeom>
-          <a:noFill/>
-        </p:spPr>
-        <p:txBody>
-          <a:bodyPr wrap="square" lIns="45720" rIns="45720" tIns="18288" bIns="18288" anchor="t">
+            <a:off x="2514600" y="5367528"/>
+            <a:ext cx="9601200" cy="475488"/>
+          </a:xfrm>
+          <a:prstGeom prst="rect">
+            <a:avLst/>
+          </a:prstGeom>
+          <a:noFill/>
+        </p:spPr>
+        <p:txBody>
+          <a:bodyPr wrap="square" lIns="45720" rIns="45720" tIns="18288" bIns="18288" anchor="ctr">
             <a:spAutoFit/>
           </a:bodyPr>
           <a:lstStyle/>
@@ -18971,8 +18971,8 @@
         </p:nvSpPr>
         <p:spPr>
           <a:xfrm>
-            <a:off x="457200" y="5724144"/>
-            <a:ext cx="1920240" cy="484631"/>
+            <a:off x="457200" y="5888736"/>
+            <a:ext cx="1920240" cy="521207"/>
           </a:xfrm>
           <a:prstGeom prst="rect">
             <a:avLst/>
@@ -19013,16 +19013,16 @@
         </p:nvSpPr>
         <p:spPr>
           <a:xfrm>
-            <a:off x="548640" y="5797296"/>
-            <a:ext cx="1828800" cy="347471"/>
-          </a:xfrm>
-          <a:prstGeom prst="rect">
-            <a:avLst/>
-          </a:prstGeom>
-          <a:noFill/>
-        </p:spPr>
-        <p:txBody>
-          <a:bodyPr wrap="square" lIns="45720" rIns="45720" tIns="18288" bIns="18288" anchor="t">
+            <a:off x="548640" y="5934455"/>
+            <a:ext cx="1828800" cy="475488"/>
+          </a:xfrm>
+          <a:prstGeom prst="rect">
+            <a:avLst/>
+          </a:prstGeom>
+          <a:noFill/>
+        </p:spPr>
+        <p:txBody>
+          <a:bodyPr wrap="square" lIns="45720" rIns="45720" tIns="18288" bIns="18288" anchor="ctr">
             <a:spAutoFit/>
           </a:bodyPr>
           <a:lstStyle/>
@@ -19048,16 +19048,16 @@
         </p:nvSpPr>
         <p:spPr>
           <a:xfrm>
-            <a:off x="2514600" y="5797296"/>
-            <a:ext cx="9601200" cy="438912"/>
-          </a:xfrm>
-          <a:prstGeom prst="rect">
-            <a:avLst/>
-          </a:prstGeom>
-          <a:noFill/>
-        </p:spPr>
-        <p:txBody>
-          <a:bodyPr wrap="square" lIns="45720" rIns="45720" tIns="18288" bIns="18288" anchor="t">
+            <a:off x="2514600" y="5934455"/>
+            <a:ext cx="9601200" cy="475488"/>
+          </a:xfrm>
+          <a:prstGeom prst="rect">
+            <a:avLst/>
+          </a:prstGeom>
+          <a:noFill/>
+        </p:spPr>
+        <p:txBody>
+          <a:bodyPr wrap="square" lIns="45720" rIns="45720" tIns="18288" bIns="18288" anchor="ctr">
             <a:spAutoFit/>
           </a:bodyPr>
           <a:lstStyle/>
@@ -19241,8 +19241,8 @@
         </p:nvSpPr>
         <p:spPr>
           <a:xfrm>
-            <a:off x="457200" y="2011680"/>
-            <a:ext cx="11247120" cy="1386840"/>
+            <a:off x="457200" y="1920240"/>
+            <a:ext cx="11247120" cy="1438656"/>
           </a:xfrm>
           <a:prstGeom prst="rect">
             <a:avLst/>
@@ -19283,8 +19283,8 @@
         </p:nvSpPr>
         <p:spPr>
           <a:xfrm>
-            <a:off x="640080" y="2103120"/>
-            <a:ext cx="10881360" cy="411480"/>
+            <a:off x="640080" y="1993392"/>
+            <a:ext cx="10881360" cy="384048"/>
           </a:xfrm>
           <a:prstGeom prst="rect">
             <a:avLst/>
@@ -19318,8 +19318,8 @@
         </p:nvSpPr>
         <p:spPr>
           <a:xfrm>
-            <a:off x="640080" y="2560320"/>
-            <a:ext cx="10881360" cy="746760"/>
+            <a:off x="640080" y="2395728"/>
+            <a:ext cx="10881360" cy="908304"/>
           </a:xfrm>
           <a:prstGeom prst="rect">
             <a:avLst/>
@@ -19377,8 +19377,8 @@
         </p:nvSpPr>
         <p:spPr>
           <a:xfrm>
-            <a:off x="457200" y="3535680"/>
-            <a:ext cx="11247120" cy="1386840"/>
+            <a:off x="457200" y="3486912"/>
+            <a:ext cx="11247120" cy="1438656"/>
           </a:xfrm>
           <a:prstGeom prst="rect">
             <a:avLst/>
@@ -19419,8 +19419,8 @@
         </p:nvSpPr>
         <p:spPr>
           <a:xfrm>
-            <a:off x="640080" y="3627120"/>
-            <a:ext cx="10881360" cy="411480"/>
+            <a:off x="640080" y="3560064"/>
+            <a:ext cx="10881360" cy="384048"/>
           </a:xfrm>
           <a:prstGeom prst="rect">
             <a:avLst/>
@@ -19454,8 +19454,8 @@
         </p:nvSpPr>
         <p:spPr>
           <a:xfrm>
-            <a:off x="640080" y="4084320"/>
-            <a:ext cx="10881360" cy="746760"/>
+            <a:off x="640080" y="3962400"/>
+            <a:ext cx="10881360" cy="908304"/>
           </a:xfrm>
           <a:prstGeom prst="rect">
             <a:avLst/>
@@ -19513,8 +19513,8 @@
         </p:nvSpPr>
         <p:spPr>
           <a:xfrm>
-            <a:off x="457200" y="5059680"/>
-            <a:ext cx="11247120" cy="1386840"/>
+            <a:off x="457200" y="5053584"/>
+            <a:ext cx="11247120" cy="1438656"/>
           </a:xfrm>
           <a:prstGeom prst="rect">
             <a:avLst/>
@@ -19555,8 +19555,8 @@
         </p:nvSpPr>
         <p:spPr>
           <a:xfrm>
-            <a:off x="640080" y="5151120"/>
-            <a:ext cx="10881360" cy="411480"/>
+            <a:off x="640080" y="5126736"/>
+            <a:ext cx="10881360" cy="384048"/>
           </a:xfrm>
           <a:prstGeom prst="rect">
             <a:avLst/>
@@ -19590,8 +19590,8 @@
         </p:nvSpPr>
         <p:spPr>
           <a:xfrm>
-            <a:off x="640080" y="5608320"/>
-            <a:ext cx="10881360" cy="746760"/>
+            <a:off x="640080" y="5529072"/>
+            <a:ext cx="10881360" cy="908304"/>
           </a:xfrm>
           <a:prstGeom prst="rect">
             <a:avLst/>
@@ -19807,8 +19807,8 @@
         </p:nvSpPr>
         <p:spPr>
           <a:xfrm>
-            <a:off x="457200" y="2011680"/>
-            <a:ext cx="11247120" cy="1386840"/>
+            <a:off x="457200" y="1920240"/>
+            <a:ext cx="11247120" cy="1438656"/>
           </a:xfrm>
           <a:prstGeom prst="rect">
             <a:avLst/>
@@ -19849,8 +19849,8 @@
         </p:nvSpPr>
         <p:spPr>
           <a:xfrm>
-            <a:off x="640080" y="2103120"/>
-            <a:ext cx="10881360" cy="411480"/>
+            <a:off x="640080" y="1993392"/>
+            <a:ext cx="10881360" cy="384048"/>
           </a:xfrm>
           <a:prstGeom prst="rect">
             <a:avLst/>
@@ -19884,8 +19884,8 @@
         </p:nvSpPr>
         <p:spPr>
           <a:xfrm>
-            <a:off x="640080" y="2560320"/>
-            <a:ext cx="10881360" cy="746760"/>
+            <a:off x="640080" y="2395728"/>
+            <a:ext cx="10881360" cy="908304"/>
           </a:xfrm>
           <a:prstGeom prst="rect">
             <a:avLst/>
@@ -19943,8 +19943,8 @@
         </p:nvSpPr>
         <p:spPr>
           <a:xfrm>
-            <a:off x="457200" y="3535680"/>
-            <a:ext cx="11247120" cy="1386840"/>
+            <a:off x="457200" y="3486912"/>
+            <a:ext cx="11247120" cy="1438656"/>
           </a:xfrm>
           <a:prstGeom prst="rect">
             <a:avLst/>
@@ -19985,8 +19985,8 @@
         </p:nvSpPr>
         <p:spPr>
           <a:xfrm>
-            <a:off x="640080" y="3627120"/>
-            <a:ext cx="10881360" cy="411480"/>
+            <a:off x="640080" y="3560064"/>
+            <a:ext cx="10881360" cy="384048"/>
           </a:xfrm>
           <a:prstGeom prst="rect">
             <a:avLst/>
@@ -20020,8 +20020,8 @@
         </p:nvSpPr>
         <p:spPr>
           <a:xfrm>
-            <a:off x="640080" y="4084320"/>
-            <a:ext cx="10881360" cy="746760"/>
+            <a:off x="640080" y="3962400"/>
+            <a:ext cx="10881360" cy="908304"/>
           </a:xfrm>
           <a:prstGeom prst="rect">
             <a:avLst/>
@@ -20091,8 +20091,8 @@
         </p:nvSpPr>
         <p:spPr>
           <a:xfrm>
-            <a:off x="457200" y="5059680"/>
-            <a:ext cx="11247120" cy="1386840"/>
+            <a:off x="457200" y="5053584"/>
+            <a:ext cx="11247120" cy="1438656"/>
           </a:xfrm>
           <a:prstGeom prst="rect">
             <a:avLst/>
@@ -20133,8 +20133,8 @@
         </p:nvSpPr>
         <p:spPr>
           <a:xfrm>
-            <a:off x="640080" y="5151120"/>
-            <a:ext cx="10881360" cy="411480"/>
+            <a:off x="640080" y="5126736"/>
+            <a:ext cx="10881360" cy="384048"/>
           </a:xfrm>
           <a:prstGeom prst="rect">
             <a:avLst/>
@@ -20168,8 +20168,8 @@
         </p:nvSpPr>
         <p:spPr>
           <a:xfrm>
-            <a:off x="640080" y="5608320"/>
-            <a:ext cx="10881360" cy="746760"/>
+            <a:off x="640080" y="5529072"/>
+            <a:ext cx="10881360" cy="908304"/>
           </a:xfrm>
           <a:prstGeom prst="rect">
             <a:avLst/>
@@ -20373,8 +20373,8 @@
         </p:nvSpPr>
         <p:spPr>
           <a:xfrm>
-            <a:off x="457200" y="2011680"/>
-            <a:ext cx="11247120" cy="1386840"/>
+            <a:off x="457200" y="1920240"/>
+            <a:ext cx="11247120" cy="1438656"/>
           </a:xfrm>
           <a:prstGeom prst="rect">
             <a:avLst/>
@@ -20415,8 +20415,8 @@
         </p:nvSpPr>
         <p:spPr>
           <a:xfrm>
-            <a:off x="640080" y="2103120"/>
-            <a:ext cx="10881360" cy="411480"/>
+            <a:off x="640080" y="1993392"/>
+            <a:ext cx="10881360" cy="384048"/>
           </a:xfrm>
           <a:prstGeom prst="rect">
             <a:avLst/>
@@ -20450,8 +20450,8 @@
         </p:nvSpPr>
         <p:spPr>
           <a:xfrm>
-            <a:off x="640080" y="2560320"/>
-            <a:ext cx="10881360" cy="746760"/>
+            <a:off x="640080" y="2395728"/>
+            <a:ext cx="10881360" cy="908304"/>
           </a:xfrm>
           <a:prstGeom prst="rect">
             <a:avLst/>
@@ -20509,8 +20509,8 @@
         </p:nvSpPr>
         <p:spPr>
           <a:xfrm>
-            <a:off x="457200" y="3535680"/>
-            <a:ext cx="11247120" cy="1386840"/>
+            <a:off x="457200" y="3486912"/>
+            <a:ext cx="11247120" cy="1438656"/>
           </a:xfrm>
           <a:prstGeom prst="rect">
             <a:avLst/>
@@ -20551,8 +20551,8 @@
         </p:nvSpPr>
         <p:spPr>
           <a:xfrm>
-            <a:off x="640080" y="3627120"/>
-            <a:ext cx="10881360" cy="411480"/>
+            <a:off x="640080" y="3560064"/>
+            <a:ext cx="10881360" cy="384048"/>
           </a:xfrm>
           <a:prstGeom prst="rect">
             <a:avLst/>
@@ -20586,8 +20586,8 @@
         </p:nvSpPr>
         <p:spPr>
           <a:xfrm>
-            <a:off x="640080" y="4084320"/>
-            <a:ext cx="10881360" cy="746760"/>
+            <a:off x="640080" y="3962400"/>
+            <a:ext cx="10881360" cy="908304"/>
           </a:xfrm>
           <a:prstGeom prst="rect">
             <a:avLst/>
@@ -20645,8 +20645,8 @@
         </p:nvSpPr>
         <p:spPr>
           <a:xfrm>
-            <a:off x="457200" y="5059680"/>
-            <a:ext cx="11247120" cy="1386840"/>
+            <a:off x="457200" y="5053584"/>
+            <a:ext cx="11247120" cy="1438656"/>
           </a:xfrm>
           <a:prstGeom prst="rect">
             <a:avLst/>
@@ -20687,8 +20687,8 @@
         </p:nvSpPr>
         <p:spPr>
           <a:xfrm>
-            <a:off x="640080" y="5151120"/>
-            <a:ext cx="10881360" cy="411480"/>
+            <a:off x="640080" y="5126736"/>
+            <a:ext cx="10881360" cy="384048"/>
           </a:xfrm>
           <a:prstGeom prst="rect">
             <a:avLst/>
@@ -20722,8 +20722,8 @@
         </p:nvSpPr>
         <p:spPr>
           <a:xfrm>
-            <a:off x="640080" y="5608320"/>
-            <a:ext cx="10881360" cy="746760"/>
+            <a:off x="640080" y="5529072"/>
+            <a:ext cx="10881360" cy="908304"/>
           </a:xfrm>
           <a:prstGeom prst="rect">
             <a:avLst/>
@@ -20939,8 +20939,8 @@
         </p:nvSpPr>
         <p:spPr>
           <a:xfrm>
-            <a:off x="457200" y="1920240"/>
-            <a:ext cx="11247120" cy="1280160"/>
+            <a:off x="457200" y="1828800"/>
+            <a:ext cx="11247120" cy="1371600"/>
           </a:xfrm>
           <a:prstGeom prst="rect">
             <a:avLst/>
@@ -20981,8 +20981,8 @@
         </p:nvSpPr>
         <p:spPr>
           <a:xfrm>
-            <a:off x="457200" y="2011680"/>
-            <a:ext cx="11247120" cy="822960"/>
+            <a:off x="457200" y="1874519"/>
+            <a:ext cx="11247120" cy="868680"/>
           </a:xfrm>
           <a:prstGeom prst="rect">
             <a:avLst/>
@@ -20997,7 +20997,7 @@
           <a:p>
             <a:pPr algn="ctr"/>
             <a:r>
-              <a:rPr sz="4000" b="1">
+              <a:rPr sz="3800" b="1">
                 <a:solidFill>
                   <a:srgbClr val="1F2A44"/>
                 </a:solidFill>
@@ -21016,16 +21016,16 @@
         </p:nvSpPr>
         <p:spPr>
           <a:xfrm>
-            <a:off x="457200" y="2788920"/>
-            <a:ext cx="11247120" cy="365760"/>
-          </a:xfrm>
-          <a:prstGeom prst="rect">
-            <a:avLst/>
-          </a:prstGeom>
-          <a:noFill/>
-        </p:spPr>
-        <p:txBody>
-          <a:bodyPr wrap="square" lIns="45720" rIns="45720" tIns="18288" bIns="18288" anchor="t">
+            <a:off x="457200" y="2743200"/>
+            <a:ext cx="11247120" cy="411480"/>
+          </a:xfrm>
+          <a:prstGeom prst="rect">
+            <a:avLst/>
+          </a:prstGeom>
+          <a:noFill/>
+        </p:spPr>
+        <p:txBody>
+          <a:bodyPr wrap="square" lIns="45720" rIns="45720" tIns="18288" bIns="18288" anchor="ctr">
             <a:spAutoFit/>
           </a:bodyPr>
           <a:lstStyle/>
@@ -21051,8 +21051,8 @@
         </p:nvSpPr>
         <p:spPr>
           <a:xfrm>
-            <a:off x="457200" y="3383280"/>
-            <a:ext cx="11247120" cy="960120"/>
+            <a:off x="457200" y="3291840"/>
+            <a:ext cx="11247120" cy="1005840"/>
           </a:xfrm>
           <a:prstGeom prst="rect">
             <a:avLst/>
@@ -21093,7 +21093,7 @@
         </p:nvSpPr>
         <p:spPr>
           <a:xfrm>
-            <a:off x="594360" y="3474720"/>
+            <a:off x="594360" y="3383280"/>
             <a:ext cx="2011680" cy="365760"/>
           </a:xfrm>
           <a:prstGeom prst="rect">
@@ -21128,8 +21128,8 @@
         </p:nvSpPr>
         <p:spPr>
           <a:xfrm>
-            <a:off x="2651760" y="3474720"/>
-            <a:ext cx="9418320" cy="777240"/>
+            <a:off x="2651760" y="3364992"/>
+            <a:ext cx="9418320" cy="868680"/>
           </a:xfrm>
           <a:prstGeom prst="rect">
             <a:avLst/>
@@ -21163,8 +21163,8 @@
         </p:nvSpPr>
         <p:spPr>
           <a:xfrm>
-            <a:off x="457200" y="4453128"/>
-            <a:ext cx="11247120" cy="960120"/>
+            <a:off x="457200" y="4343400"/>
+            <a:ext cx="11247120" cy="1005840"/>
           </a:xfrm>
           <a:prstGeom prst="rect">
             <a:avLst/>
@@ -21205,7 +21205,7 @@
         </p:nvSpPr>
         <p:spPr>
           <a:xfrm>
-            <a:off x="594360" y="4544568"/>
+            <a:off x="594360" y="4434840"/>
             <a:ext cx="2011680" cy="365760"/>
           </a:xfrm>
           <a:prstGeom prst="rect">
@@ -21240,8 +21240,8 @@
         </p:nvSpPr>
         <p:spPr>
           <a:xfrm>
-            <a:off x="2651760" y="4544568"/>
-            <a:ext cx="9418320" cy="777240"/>
+            <a:off x="2651760" y="4416552"/>
+            <a:ext cx="9418320" cy="868680"/>
           </a:xfrm>
           <a:prstGeom prst="rect">
             <a:avLst/>
@@ -21275,8 +21275,8 @@
         </p:nvSpPr>
         <p:spPr>
           <a:xfrm>
-            <a:off x="457200" y="5522976"/>
-            <a:ext cx="11247120" cy="960120"/>
+            <a:off x="457200" y="5394960"/>
+            <a:ext cx="11247120" cy="1005840"/>
           </a:xfrm>
           <a:prstGeom prst="rect">
             <a:avLst/>
@@ -21317,7 +21317,7 @@
         </p:nvSpPr>
         <p:spPr>
           <a:xfrm>
-            <a:off x="594360" y="5614416"/>
+            <a:off x="594360" y="5486400"/>
             <a:ext cx="2011680" cy="365760"/>
           </a:xfrm>
           <a:prstGeom prst="rect">
@@ -21352,8 +21352,8 @@
         </p:nvSpPr>
         <p:spPr>
           <a:xfrm>
-            <a:off x="2651760" y="5614416"/>
-            <a:ext cx="9418320" cy="777240"/>
+            <a:off x="2651760" y="5468112"/>
+            <a:ext cx="9418320" cy="868680"/>
           </a:xfrm>
           <a:prstGeom prst="rect">
             <a:avLst/>
@@ -21545,8 +21545,8 @@
         </p:nvSpPr>
         <p:spPr>
           <a:xfrm>
-            <a:off x="457200" y="1920240"/>
-            <a:ext cx="11247120" cy="1280160"/>
+            <a:off x="457200" y="1828800"/>
+            <a:ext cx="11247120" cy="1371600"/>
           </a:xfrm>
           <a:prstGeom prst="rect">
             <a:avLst/>
@@ -21587,8 +21587,8 @@
         </p:nvSpPr>
         <p:spPr>
           <a:xfrm>
-            <a:off x="457200" y="2011680"/>
-            <a:ext cx="11247120" cy="822960"/>
+            <a:off x="457200" y="1874519"/>
+            <a:ext cx="11247120" cy="868680"/>
           </a:xfrm>
           <a:prstGeom prst="rect">
             <a:avLst/>
@@ -21603,7 +21603,7 @@
           <a:p>
             <a:pPr algn="ctr"/>
             <a:r>
-              <a:rPr sz="4000" b="1">
+              <a:rPr sz="3800" b="1">
                 <a:solidFill>
                   <a:srgbClr val="1F2A44"/>
                 </a:solidFill>
@@ -21622,16 +21622,16 @@
         </p:nvSpPr>
         <p:spPr>
           <a:xfrm>
-            <a:off x="457200" y="2788920"/>
-            <a:ext cx="11247120" cy="365760"/>
-          </a:xfrm>
-          <a:prstGeom prst="rect">
-            <a:avLst/>
-          </a:prstGeom>
-          <a:noFill/>
-        </p:spPr>
-        <p:txBody>
-          <a:bodyPr wrap="square" lIns="45720" rIns="45720" tIns="18288" bIns="18288" anchor="t">
+            <a:off x="457200" y="2743200"/>
+            <a:ext cx="11247120" cy="411480"/>
+          </a:xfrm>
+          <a:prstGeom prst="rect">
+            <a:avLst/>
+          </a:prstGeom>
+          <a:noFill/>
+        </p:spPr>
+        <p:txBody>
+          <a:bodyPr wrap="square" lIns="45720" rIns="45720" tIns="18288" bIns="18288" anchor="ctr">
             <a:spAutoFit/>
           </a:bodyPr>
           <a:lstStyle/>
@@ -21657,8 +21657,8 @@
         </p:nvSpPr>
         <p:spPr>
           <a:xfrm>
-            <a:off x="457200" y="3383280"/>
-            <a:ext cx="11247120" cy="960120"/>
+            <a:off x="457200" y="3291840"/>
+            <a:ext cx="11247120" cy="1005840"/>
           </a:xfrm>
           <a:prstGeom prst="rect">
             <a:avLst/>
@@ -21699,7 +21699,7 @@
         </p:nvSpPr>
         <p:spPr>
           <a:xfrm>
-            <a:off x="594360" y="3474720"/>
+            <a:off x="594360" y="3383280"/>
             <a:ext cx="2011680" cy="365760"/>
           </a:xfrm>
           <a:prstGeom prst="rect">
@@ -21734,8 +21734,8 @@
         </p:nvSpPr>
         <p:spPr>
           <a:xfrm>
-            <a:off x="2651760" y="3474720"/>
-            <a:ext cx="9418320" cy="777240"/>
+            <a:off x="2651760" y="3364992"/>
+            <a:ext cx="9418320" cy="868680"/>
           </a:xfrm>
           <a:prstGeom prst="rect">
             <a:avLst/>
@@ -21769,8 +21769,8 @@
         </p:nvSpPr>
         <p:spPr>
           <a:xfrm>
-            <a:off x="457200" y="4453128"/>
-            <a:ext cx="11247120" cy="960120"/>
+            <a:off x="457200" y="4343400"/>
+            <a:ext cx="11247120" cy="1005840"/>
           </a:xfrm>
           <a:prstGeom prst="rect">
             <a:avLst/>
@@ -21811,7 +21811,7 @@
         </p:nvSpPr>
         <p:spPr>
           <a:xfrm>
-            <a:off x="594360" y="4544568"/>
+            <a:off x="594360" y="4434840"/>
             <a:ext cx="2011680" cy="365760"/>
           </a:xfrm>
           <a:prstGeom prst="rect">
@@ -21846,8 +21846,8 @@
         </p:nvSpPr>
         <p:spPr>
           <a:xfrm>
-            <a:off x="2651760" y="4544568"/>
-            <a:ext cx="9418320" cy="777240"/>
+            <a:off x="2651760" y="4416552"/>
+            <a:ext cx="9418320" cy="868680"/>
           </a:xfrm>
           <a:prstGeom prst="rect">
             <a:avLst/>
@@ -21881,8 +21881,8 @@
         </p:nvSpPr>
         <p:spPr>
           <a:xfrm>
-            <a:off x="457200" y="5522976"/>
-            <a:ext cx="11247120" cy="960120"/>
+            <a:off x="457200" y="5394960"/>
+            <a:ext cx="11247120" cy="1005840"/>
           </a:xfrm>
           <a:prstGeom prst="rect">
             <a:avLst/>
@@ -21923,7 +21923,7 @@
         </p:nvSpPr>
         <p:spPr>
           <a:xfrm>
-            <a:off x="594360" y="5614416"/>
+            <a:off x="594360" y="5486400"/>
             <a:ext cx="2011680" cy="365760"/>
           </a:xfrm>
           <a:prstGeom prst="rect">
@@ -21958,8 +21958,8 @@
         </p:nvSpPr>
         <p:spPr>
           <a:xfrm>
-            <a:off x="2651760" y="5614416"/>
-            <a:ext cx="9418320" cy="777240"/>
+            <a:off x="2651760" y="5468112"/>
+            <a:ext cx="9418320" cy="868680"/>
           </a:xfrm>
           <a:prstGeom prst="rect">
             <a:avLst/>
@@ -22151,8 +22151,8 @@
         </p:nvSpPr>
         <p:spPr>
           <a:xfrm>
-            <a:off x="457200" y="1920240"/>
-            <a:ext cx="11247120" cy="1280160"/>
+            <a:off x="457200" y="1828800"/>
+            <a:ext cx="11247120" cy="1371600"/>
           </a:xfrm>
           <a:prstGeom prst="rect">
             <a:avLst/>
@@ -22193,8 +22193,8 @@
         </p:nvSpPr>
         <p:spPr>
           <a:xfrm>
-            <a:off x="457200" y="2011680"/>
-            <a:ext cx="11247120" cy="822960"/>
+            <a:off x="457200" y="1874519"/>
+            <a:ext cx="11247120" cy="868680"/>
           </a:xfrm>
           <a:prstGeom prst="rect">
             <a:avLst/>
@@ -22209,7 +22209,7 @@
           <a:p>
             <a:pPr algn="ctr"/>
             <a:r>
-              <a:rPr sz="4000" b="1">
+              <a:rPr sz="3800" b="1">
                 <a:solidFill>
                   <a:srgbClr val="1F2A44"/>
                 </a:solidFill>
@@ -22228,16 +22228,16 @@
         </p:nvSpPr>
         <p:spPr>
           <a:xfrm>
-            <a:off x="457200" y="2788920"/>
-            <a:ext cx="11247120" cy="365760"/>
-          </a:xfrm>
-          <a:prstGeom prst="rect">
-            <a:avLst/>
-          </a:prstGeom>
-          <a:noFill/>
-        </p:spPr>
-        <p:txBody>
-          <a:bodyPr wrap="square" lIns="45720" rIns="45720" tIns="18288" bIns="18288" anchor="t">
+            <a:off x="457200" y="2743200"/>
+            <a:ext cx="11247120" cy="411480"/>
+          </a:xfrm>
+          <a:prstGeom prst="rect">
+            <a:avLst/>
+          </a:prstGeom>
+          <a:noFill/>
+        </p:spPr>
+        <p:txBody>
+          <a:bodyPr wrap="square" lIns="45720" rIns="45720" tIns="18288" bIns="18288" anchor="ctr">
             <a:spAutoFit/>
           </a:bodyPr>
           <a:lstStyle/>
@@ -22263,8 +22263,8 @@
         </p:nvSpPr>
         <p:spPr>
           <a:xfrm>
-            <a:off x="457200" y="3383280"/>
-            <a:ext cx="11247120" cy="960120"/>
+            <a:off x="457200" y="3291840"/>
+            <a:ext cx="11247120" cy="1005840"/>
           </a:xfrm>
           <a:prstGeom prst="rect">
             <a:avLst/>
@@ -22305,7 +22305,7 @@
         </p:nvSpPr>
         <p:spPr>
           <a:xfrm>
-            <a:off x="594360" y="3474720"/>
+            <a:off x="594360" y="3383280"/>
             <a:ext cx="2011680" cy="365760"/>
           </a:xfrm>
           <a:prstGeom prst="rect">
@@ -22340,8 +22340,8 @@
         </p:nvSpPr>
         <p:spPr>
           <a:xfrm>
-            <a:off x="2651760" y="3474720"/>
-            <a:ext cx="9418320" cy="777240"/>
+            <a:off x="2651760" y="3364992"/>
+            <a:ext cx="9418320" cy="868680"/>
           </a:xfrm>
           <a:prstGeom prst="rect">
             <a:avLst/>
@@ -22375,8 +22375,8 @@
         </p:nvSpPr>
         <p:spPr>
           <a:xfrm>
-            <a:off x="457200" y="4453128"/>
-            <a:ext cx="11247120" cy="960120"/>
+            <a:off x="457200" y="4343400"/>
+            <a:ext cx="11247120" cy="1005840"/>
           </a:xfrm>
           <a:prstGeom prst="rect">
             <a:avLst/>
@@ -22417,7 +22417,7 @@
         </p:nvSpPr>
         <p:spPr>
           <a:xfrm>
-            <a:off x="594360" y="4544568"/>
+            <a:off x="594360" y="4434840"/>
             <a:ext cx="2011680" cy="365760"/>
           </a:xfrm>
           <a:prstGeom prst="rect">
@@ -22452,8 +22452,8 @@
         </p:nvSpPr>
         <p:spPr>
           <a:xfrm>
-            <a:off x="2651760" y="4544568"/>
-            <a:ext cx="9418320" cy="777240"/>
+            <a:off x="2651760" y="4416552"/>
+            <a:ext cx="9418320" cy="868680"/>
           </a:xfrm>
           <a:prstGeom prst="rect">
             <a:avLst/>
@@ -22487,8 +22487,8 @@
         </p:nvSpPr>
         <p:spPr>
           <a:xfrm>
-            <a:off x="457200" y="5522976"/>
-            <a:ext cx="11247120" cy="960120"/>
+            <a:off x="457200" y="5394960"/>
+            <a:ext cx="11247120" cy="1005840"/>
           </a:xfrm>
           <a:prstGeom prst="rect">
             <a:avLst/>
@@ -22529,7 +22529,7 @@
         </p:nvSpPr>
         <p:spPr>
           <a:xfrm>
-            <a:off x="594360" y="5614416"/>
+            <a:off x="594360" y="5486400"/>
             <a:ext cx="2011680" cy="365760"/>
           </a:xfrm>
           <a:prstGeom prst="rect">
@@ -22564,8 +22564,8 @@
         </p:nvSpPr>
         <p:spPr>
           <a:xfrm>
-            <a:off x="2651760" y="5614416"/>
-            <a:ext cx="9418320" cy="777240"/>
+            <a:off x="2651760" y="5468112"/>
+            <a:ext cx="9418320" cy="868680"/>
           </a:xfrm>
           <a:prstGeom prst="rect">
             <a:avLst/>
@@ -22757,8 +22757,8 @@
         </p:nvSpPr>
         <p:spPr>
           <a:xfrm>
-            <a:off x="457200" y="1920240"/>
-            <a:ext cx="11247120" cy="1280160"/>
+            <a:off x="457200" y="1828800"/>
+            <a:ext cx="11247120" cy="1371600"/>
           </a:xfrm>
           <a:prstGeom prst="rect">
             <a:avLst/>
@@ -22799,8 +22799,8 @@
         </p:nvSpPr>
         <p:spPr>
           <a:xfrm>
-            <a:off x="457200" y="2011680"/>
-            <a:ext cx="11247120" cy="822960"/>
+            <a:off x="457200" y="1874519"/>
+            <a:ext cx="11247120" cy="868680"/>
           </a:xfrm>
           <a:prstGeom prst="rect">
             <a:avLst/>
@@ -22815,7 +22815,7 @@
           <a:p>
             <a:pPr algn="ctr"/>
             <a:r>
-              <a:rPr sz="4000" b="1">
+              <a:rPr sz="3800" b="1">
                 <a:solidFill>
                   <a:srgbClr val="1F2A44"/>
                 </a:solidFill>
@@ -22834,16 +22834,16 @@
         </p:nvSpPr>
         <p:spPr>
           <a:xfrm>
-            <a:off x="457200" y="2788920"/>
-            <a:ext cx="11247120" cy="365760"/>
-          </a:xfrm>
-          <a:prstGeom prst="rect">
-            <a:avLst/>
-          </a:prstGeom>
-          <a:noFill/>
-        </p:spPr>
-        <p:txBody>
-          <a:bodyPr wrap="square" lIns="45720" rIns="45720" tIns="18288" bIns="18288" anchor="t">
+            <a:off x="457200" y="2743200"/>
+            <a:ext cx="11247120" cy="411480"/>
+          </a:xfrm>
+          <a:prstGeom prst="rect">
+            <a:avLst/>
+          </a:prstGeom>
+          <a:noFill/>
+        </p:spPr>
+        <p:txBody>
+          <a:bodyPr wrap="square" lIns="45720" rIns="45720" tIns="18288" bIns="18288" anchor="ctr">
             <a:spAutoFit/>
           </a:bodyPr>
           <a:lstStyle/>
@@ -22869,8 +22869,8 @@
         </p:nvSpPr>
         <p:spPr>
           <a:xfrm>
-            <a:off x="457200" y="3383280"/>
-            <a:ext cx="11247120" cy="960120"/>
+            <a:off x="457200" y="3291840"/>
+            <a:ext cx="11247120" cy="1005840"/>
           </a:xfrm>
           <a:prstGeom prst="rect">
             <a:avLst/>
@@ -22911,7 +22911,7 @@
         </p:nvSpPr>
         <p:spPr>
           <a:xfrm>
-            <a:off x="594360" y="3474720"/>
+            <a:off x="594360" y="3383280"/>
             <a:ext cx="2011680" cy="365760"/>
           </a:xfrm>
           <a:prstGeom prst="rect">
@@ -22946,8 +22946,8 @@
         </p:nvSpPr>
         <p:spPr>
           <a:xfrm>
-            <a:off x="2651760" y="3474720"/>
-            <a:ext cx="9418320" cy="777240"/>
+            <a:off x="2651760" y="3364992"/>
+            <a:ext cx="9418320" cy="868680"/>
           </a:xfrm>
           <a:prstGeom prst="rect">
             <a:avLst/>
@@ -22981,8 +22981,8 @@
         </p:nvSpPr>
         <p:spPr>
           <a:xfrm>
-            <a:off x="457200" y="4453128"/>
-            <a:ext cx="11247120" cy="960120"/>
+            <a:off x="457200" y="4343400"/>
+            <a:ext cx="11247120" cy="1005840"/>
           </a:xfrm>
           <a:prstGeom prst="rect">
             <a:avLst/>
@@ -23023,7 +23023,7 @@
         </p:nvSpPr>
         <p:spPr>
           <a:xfrm>
-            <a:off x="594360" y="4544568"/>
+            <a:off x="594360" y="4434840"/>
             <a:ext cx="2011680" cy="365760"/>
           </a:xfrm>
           <a:prstGeom prst="rect">
@@ -23058,8 +23058,8 @@
         </p:nvSpPr>
         <p:spPr>
           <a:xfrm>
-            <a:off x="2651760" y="4544568"/>
-            <a:ext cx="9418320" cy="777240"/>
+            <a:off x="2651760" y="4416552"/>
+            <a:ext cx="9418320" cy="868680"/>
           </a:xfrm>
           <a:prstGeom prst="rect">
             <a:avLst/>
@@ -23093,8 +23093,8 @@
         </p:nvSpPr>
         <p:spPr>
           <a:xfrm>
-            <a:off x="457200" y="5522976"/>
-            <a:ext cx="11247120" cy="960120"/>
+            <a:off x="457200" y="5394960"/>
+            <a:ext cx="11247120" cy="1005840"/>
           </a:xfrm>
           <a:prstGeom prst="rect">
             <a:avLst/>
@@ -23135,7 +23135,7 @@
         </p:nvSpPr>
         <p:spPr>
           <a:xfrm>
-            <a:off x="594360" y="5614416"/>
+            <a:off x="594360" y="5486400"/>
             <a:ext cx="2011680" cy="365760"/>
           </a:xfrm>
           <a:prstGeom prst="rect">
@@ -23170,8 +23170,8 @@
         </p:nvSpPr>
         <p:spPr>
           <a:xfrm>
-            <a:off x="2651760" y="5614416"/>
-            <a:ext cx="9418320" cy="777240"/>
+            <a:off x="2651760" y="5468112"/>
+            <a:ext cx="9418320" cy="868680"/>
           </a:xfrm>
           <a:prstGeom prst="rect">
             <a:avLst/>
@@ -23363,8 +23363,8 @@
         </p:nvSpPr>
         <p:spPr>
           <a:xfrm>
-            <a:off x="457200" y="1920240"/>
-            <a:ext cx="11247120" cy="1280160"/>
+            <a:off x="457200" y="1828800"/>
+            <a:ext cx="11247120" cy="1371600"/>
           </a:xfrm>
           <a:prstGeom prst="rect">
             <a:avLst/>
@@ -23405,8 +23405,8 @@
         </p:nvSpPr>
         <p:spPr>
           <a:xfrm>
-            <a:off x="457200" y="2011680"/>
-            <a:ext cx="11247120" cy="822960"/>
+            <a:off x="457200" y="1874519"/>
+            <a:ext cx="11247120" cy="868680"/>
           </a:xfrm>
           <a:prstGeom prst="rect">
             <a:avLst/>
@@ -23421,7 +23421,7 @@
           <a:p>
             <a:pPr algn="ctr"/>
             <a:r>
-              <a:rPr sz="4000" b="1">
+              <a:rPr sz="3800" b="1">
                 <a:solidFill>
                   <a:srgbClr val="1F2A44"/>
                 </a:solidFill>
@@ -23440,16 +23440,16 @@
         </p:nvSpPr>
         <p:spPr>
           <a:xfrm>
-            <a:off x="457200" y="2788920"/>
-            <a:ext cx="11247120" cy="365760"/>
-          </a:xfrm>
-          <a:prstGeom prst="rect">
-            <a:avLst/>
-          </a:prstGeom>
-          <a:noFill/>
-        </p:spPr>
-        <p:txBody>
-          <a:bodyPr wrap="square" lIns="45720" rIns="45720" tIns="18288" bIns="18288" anchor="t">
+            <a:off x="457200" y="2743200"/>
+            <a:ext cx="11247120" cy="411480"/>
+          </a:xfrm>
+          <a:prstGeom prst="rect">
+            <a:avLst/>
+          </a:prstGeom>
+          <a:noFill/>
+        </p:spPr>
+        <p:txBody>
+          <a:bodyPr wrap="square" lIns="45720" rIns="45720" tIns="18288" bIns="18288" anchor="ctr">
             <a:spAutoFit/>
           </a:bodyPr>
           <a:lstStyle/>
@@ -23475,8 +23475,8 @@
         </p:nvSpPr>
         <p:spPr>
           <a:xfrm>
-            <a:off x="457200" y="3383280"/>
-            <a:ext cx="11247120" cy="960120"/>
+            <a:off x="457200" y="3291840"/>
+            <a:ext cx="11247120" cy="1005840"/>
           </a:xfrm>
           <a:prstGeom prst="rect">
             <a:avLst/>
@@ -23517,7 +23517,7 @@
         </p:nvSpPr>
         <p:spPr>
           <a:xfrm>
-            <a:off x="594360" y="3474720"/>
+            <a:off x="594360" y="3383280"/>
             <a:ext cx="2011680" cy="365760"/>
           </a:xfrm>
           <a:prstGeom prst="rect">
@@ -23552,8 +23552,8 @@
         </p:nvSpPr>
         <p:spPr>
           <a:xfrm>
-            <a:off x="2651760" y="3474720"/>
-            <a:ext cx="9418320" cy="777240"/>
+            <a:off x="2651760" y="3364992"/>
+            <a:ext cx="9418320" cy="868680"/>
           </a:xfrm>
           <a:prstGeom prst="rect">
             <a:avLst/>
@@ -23587,8 +23587,8 @@
         </p:nvSpPr>
         <p:spPr>
           <a:xfrm>
-            <a:off x="457200" y="4453128"/>
-            <a:ext cx="11247120" cy="960120"/>
+            <a:off x="457200" y="4343400"/>
+            <a:ext cx="11247120" cy="1005840"/>
           </a:xfrm>
           <a:prstGeom prst="rect">
             <a:avLst/>
@@ -23629,7 +23629,7 @@
         </p:nvSpPr>
         <p:spPr>
           <a:xfrm>
-            <a:off x="594360" y="4544568"/>
+            <a:off x="594360" y="4434840"/>
             <a:ext cx="2011680" cy="365760"/>
           </a:xfrm>
           <a:prstGeom prst="rect">
@@ -23664,8 +23664,8 @@
         </p:nvSpPr>
         <p:spPr>
           <a:xfrm>
-            <a:off x="2651760" y="4544568"/>
-            <a:ext cx="9418320" cy="777240"/>
+            <a:off x="2651760" y="4416552"/>
+            <a:ext cx="9418320" cy="868680"/>
           </a:xfrm>
           <a:prstGeom prst="rect">
             <a:avLst/>
@@ -23699,8 +23699,8 @@
         </p:nvSpPr>
         <p:spPr>
           <a:xfrm>
-            <a:off x="457200" y="5522976"/>
-            <a:ext cx="11247120" cy="960120"/>
+            <a:off x="457200" y="5394960"/>
+            <a:ext cx="11247120" cy="1005840"/>
           </a:xfrm>
           <a:prstGeom prst="rect">
             <a:avLst/>
@@ -23741,7 +23741,7 @@
         </p:nvSpPr>
         <p:spPr>
           <a:xfrm>
-            <a:off x="594360" y="5614416"/>
+            <a:off x="594360" y="5486400"/>
             <a:ext cx="2011680" cy="365760"/>
           </a:xfrm>
           <a:prstGeom prst="rect">
@@ -23776,8 +23776,8 @@
         </p:nvSpPr>
         <p:spPr>
           <a:xfrm>
-            <a:off x="2651760" y="5614416"/>
-            <a:ext cx="9418320" cy="777240"/>
+            <a:off x="2651760" y="5468112"/>
+            <a:ext cx="9418320" cy="868680"/>
           </a:xfrm>
           <a:prstGeom prst="rect">
             <a:avLst/>
@@ -23969,8 +23969,8 @@
         </p:nvSpPr>
         <p:spPr>
           <a:xfrm>
-            <a:off x="457200" y="2011680"/>
-            <a:ext cx="11247120" cy="1386840"/>
+            <a:off x="457200" y="1920240"/>
+            <a:ext cx="11247120" cy="1438656"/>
           </a:xfrm>
           <a:prstGeom prst="rect">
             <a:avLst/>
@@ -24011,8 +24011,8 @@
         </p:nvSpPr>
         <p:spPr>
           <a:xfrm>
-            <a:off x="640080" y="2103120"/>
-            <a:ext cx="10881360" cy="411480"/>
+            <a:off x="640080" y="1993392"/>
+            <a:ext cx="10881360" cy="384048"/>
           </a:xfrm>
           <a:prstGeom prst="rect">
             <a:avLst/>
@@ -24046,8 +24046,8 @@
         </p:nvSpPr>
         <p:spPr>
           <a:xfrm>
-            <a:off x="640080" y="2560320"/>
-            <a:ext cx="10881360" cy="746760"/>
+            <a:off x="640080" y="2395728"/>
+            <a:ext cx="10881360" cy="908304"/>
           </a:xfrm>
           <a:prstGeom prst="rect">
             <a:avLst/>
@@ -24093,8 +24093,8 @@
         </p:nvSpPr>
         <p:spPr>
           <a:xfrm>
-            <a:off x="457200" y="3535680"/>
-            <a:ext cx="11247120" cy="1386840"/>
+            <a:off x="457200" y="3486912"/>
+            <a:ext cx="11247120" cy="1438656"/>
           </a:xfrm>
           <a:prstGeom prst="rect">
             <a:avLst/>
@@ -24135,8 +24135,8 @@
         </p:nvSpPr>
         <p:spPr>
           <a:xfrm>
-            <a:off x="640080" y="3627120"/>
-            <a:ext cx="10881360" cy="411480"/>
+            <a:off x="640080" y="3560064"/>
+            <a:ext cx="10881360" cy="384048"/>
           </a:xfrm>
           <a:prstGeom prst="rect">
             <a:avLst/>
@@ -24170,8 +24170,8 @@
         </p:nvSpPr>
         <p:spPr>
           <a:xfrm>
-            <a:off x="640080" y="4084320"/>
-            <a:ext cx="10881360" cy="746760"/>
+            <a:off x="640080" y="3962400"/>
+            <a:ext cx="10881360" cy="908304"/>
           </a:xfrm>
           <a:prstGeom prst="rect">
             <a:avLst/>
@@ -24217,8 +24217,8 @@
         </p:nvSpPr>
         <p:spPr>
           <a:xfrm>
-            <a:off x="457200" y="5059680"/>
-            <a:ext cx="11247120" cy="1386840"/>
+            <a:off x="457200" y="5053584"/>
+            <a:ext cx="11247120" cy="1438656"/>
           </a:xfrm>
           <a:prstGeom prst="rect">
             <a:avLst/>
@@ -24259,8 +24259,8 @@
         </p:nvSpPr>
         <p:spPr>
           <a:xfrm>
-            <a:off x="640080" y="5151120"/>
-            <a:ext cx="10881360" cy="411480"/>
+            <a:off x="640080" y="5126736"/>
+            <a:ext cx="10881360" cy="384048"/>
           </a:xfrm>
           <a:prstGeom prst="rect">
             <a:avLst/>
@@ -24294,8 +24294,8 @@
         </p:nvSpPr>
         <p:spPr>
           <a:xfrm>
-            <a:off x="640080" y="5608320"/>
-            <a:ext cx="10881360" cy="746760"/>
+            <a:off x="640080" y="5529072"/>
+            <a:ext cx="10881360" cy="908304"/>
           </a:xfrm>
           <a:prstGeom prst="rect">
             <a:avLst/>
@@ -24499,8 +24499,8 @@
         </p:nvSpPr>
         <p:spPr>
           <a:xfrm>
-            <a:off x="457200" y="1920240"/>
-            <a:ext cx="11247120" cy="1280160"/>
+            <a:off x="457200" y="1828800"/>
+            <a:ext cx="11247120" cy="1371600"/>
           </a:xfrm>
           <a:prstGeom prst="rect">
             <a:avLst/>
@@ -24541,8 +24541,8 @@
         </p:nvSpPr>
         <p:spPr>
           <a:xfrm>
-            <a:off x="457200" y="2011680"/>
-            <a:ext cx="11247120" cy="822960"/>
+            <a:off x="457200" y="1874519"/>
+            <a:ext cx="11247120" cy="868680"/>
           </a:xfrm>
           <a:prstGeom prst="rect">
             <a:avLst/>
@@ -24557,7 +24557,7 @@
           <a:p>
             <a:pPr algn="ctr"/>
             <a:r>
-              <a:rPr sz="4000" b="1">
+              <a:rPr sz="3800" b="1">
                 <a:solidFill>
                   <a:srgbClr val="1F2A44"/>
                 </a:solidFill>
@@ -24576,16 +24576,16 @@
         </p:nvSpPr>
         <p:spPr>
           <a:xfrm>
-            <a:off x="457200" y="2788920"/>
-            <a:ext cx="11247120" cy="365760"/>
-          </a:xfrm>
-          <a:prstGeom prst="rect">
-            <a:avLst/>
-          </a:prstGeom>
-          <a:noFill/>
-        </p:spPr>
-        <p:txBody>
-          <a:bodyPr wrap="square" lIns="45720" rIns="45720" tIns="18288" bIns="18288" anchor="t">
+            <a:off x="457200" y="2743200"/>
+            <a:ext cx="11247120" cy="411480"/>
+          </a:xfrm>
+          <a:prstGeom prst="rect">
+            <a:avLst/>
+          </a:prstGeom>
+          <a:noFill/>
+        </p:spPr>
+        <p:txBody>
+          <a:bodyPr wrap="square" lIns="45720" rIns="45720" tIns="18288" bIns="18288" anchor="ctr">
             <a:spAutoFit/>
           </a:bodyPr>
           <a:lstStyle/>
@@ -24611,8 +24611,8 @@
         </p:nvSpPr>
         <p:spPr>
           <a:xfrm>
-            <a:off x="457200" y="3383280"/>
-            <a:ext cx="11247120" cy="960120"/>
+            <a:off x="457200" y="3291840"/>
+            <a:ext cx="11247120" cy="1005840"/>
           </a:xfrm>
           <a:prstGeom prst="rect">
             <a:avLst/>
@@ -24653,7 +24653,7 @@
         </p:nvSpPr>
         <p:spPr>
           <a:xfrm>
-            <a:off x="594360" y="3474720"/>
+            <a:off x="594360" y="3383280"/>
             <a:ext cx="2011680" cy="365760"/>
           </a:xfrm>
           <a:prstGeom prst="rect">
@@ -24688,8 +24688,8 @@
         </p:nvSpPr>
         <p:spPr>
           <a:xfrm>
-            <a:off x="2651760" y="3474720"/>
-            <a:ext cx="9418320" cy="777240"/>
+            <a:off x="2651760" y="3364992"/>
+            <a:ext cx="9418320" cy="868680"/>
           </a:xfrm>
           <a:prstGeom prst="rect">
             <a:avLst/>
@@ -24723,8 +24723,8 @@
         </p:nvSpPr>
         <p:spPr>
           <a:xfrm>
-            <a:off x="457200" y="4453128"/>
-            <a:ext cx="11247120" cy="960120"/>
+            <a:off x="457200" y="4343400"/>
+            <a:ext cx="11247120" cy="1005840"/>
           </a:xfrm>
           <a:prstGeom prst="rect">
             <a:avLst/>
@@ -24765,7 +24765,7 @@
         </p:nvSpPr>
         <p:spPr>
           <a:xfrm>
-            <a:off x="594360" y="4544568"/>
+            <a:off x="594360" y="4434840"/>
             <a:ext cx="2011680" cy="365760"/>
           </a:xfrm>
           <a:prstGeom prst="rect">
@@ -24800,8 +24800,8 @@
         </p:nvSpPr>
         <p:spPr>
           <a:xfrm>
-            <a:off x="2651760" y="4544568"/>
-            <a:ext cx="9418320" cy="777240"/>
+            <a:off x="2651760" y="4416552"/>
+            <a:ext cx="9418320" cy="868680"/>
           </a:xfrm>
           <a:prstGeom prst="rect">
             <a:avLst/>
@@ -24835,8 +24835,8 @@
         </p:nvSpPr>
         <p:spPr>
           <a:xfrm>
-            <a:off x="457200" y="5522976"/>
-            <a:ext cx="11247120" cy="960120"/>
+            <a:off x="457200" y="5394960"/>
+            <a:ext cx="11247120" cy="1005840"/>
           </a:xfrm>
           <a:prstGeom prst="rect">
             <a:avLst/>
@@ -24877,7 +24877,7 @@
         </p:nvSpPr>
         <p:spPr>
           <a:xfrm>
-            <a:off x="594360" y="5614416"/>
+            <a:off x="594360" y="5486400"/>
             <a:ext cx="2011680" cy="365760"/>
           </a:xfrm>
           <a:prstGeom prst="rect">
@@ -24912,8 +24912,8 @@
         </p:nvSpPr>
         <p:spPr>
           <a:xfrm>
-            <a:off x="2651760" y="5614416"/>
-            <a:ext cx="9418320" cy="777240"/>
+            <a:off x="2651760" y="5468112"/>
+            <a:ext cx="9418320" cy="868680"/>
           </a:xfrm>
           <a:prstGeom prst="rect">
             <a:avLst/>
@@ -25105,8 +25105,8 @@
         </p:nvSpPr>
         <p:spPr>
           <a:xfrm>
-            <a:off x="457200" y="1920240"/>
-            <a:ext cx="11247120" cy="1280160"/>
+            <a:off x="457200" y="1828800"/>
+            <a:ext cx="11247120" cy="1371600"/>
           </a:xfrm>
           <a:prstGeom prst="rect">
             <a:avLst/>
@@ -25147,8 +25147,8 @@
         </p:nvSpPr>
         <p:spPr>
           <a:xfrm>
-            <a:off x="457200" y="2011680"/>
-            <a:ext cx="11247120" cy="822960"/>
+            <a:off x="457200" y="1874519"/>
+            <a:ext cx="11247120" cy="868680"/>
           </a:xfrm>
           <a:prstGeom prst="rect">
             <a:avLst/>
@@ -25163,7 +25163,7 @@
           <a:p>
             <a:pPr algn="ctr"/>
             <a:r>
-              <a:rPr sz="4000" b="1">
+              <a:rPr sz="3800" b="1">
                 <a:solidFill>
                   <a:srgbClr val="1F2A44"/>
                 </a:solidFill>
@@ -25182,16 +25182,16 @@
         </p:nvSpPr>
         <p:spPr>
           <a:xfrm>
-            <a:off x="457200" y="2788920"/>
-            <a:ext cx="11247120" cy="365760"/>
-          </a:xfrm>
-          <a:prstGeom prst="rect">
-            <a:avLst/>
-          </a:prstGeom>
-          <a:noFill/>
-        </p:spPr>
-        <p:txBody>
-          <a:bodyPr wrap="square" lIns="45720" rIns="45720" tIns="18288" bIns="18288" anchor="t">
+            <a:off x="457200" y="2743200"/>
+            <a:ext cx="11247120" cy="411480"/>
+          </a:xfrm>
+          <a:prstGeom prst="rect">
+            <a:avLst/>
+          </a:prstGeom>
+          <a:noFill/>
+        </p:spPr>
+        <p:txBody>
+          <a:bodyPr wrap="square" lIns="45720" rIns="45720" tIns="18288" bIns="18288" anchor="ctr">
             <a:spAutoFit/>
           </a:bodyPr>
           <a:lstStyle/>
@@ -25217,8 +25217,8 @@
         </p:nvSpPr>
         <p:spPr>
           <a:xfrm>
-            <a:off x="457200" y="3383280"/>
-            <a:ext cx="11247120" cy="960120"/>
+            <a:off x="457200" y="3291840"/>
+            <a:ext cx="11247120" cy="1005840"/>
           </a:xfrm>
           <a:prstGeom prst="rect">
             <a:avLst/>
@@ -25259,7 +25259,7 @@
         </p:nvSpPr>
         <p:spPr>
           <a:xfrm>
-            <a:off x="594360" y="3474720"/>
+            <a:off x="594360" y="3383280"/>
             <a:ext cx="2011680" cy="365760"/>
           </a:xfrm>
           <a:prstGeom prst="rect">
@@ -25294,8 +25294,8 @@
         </p:nvSpPr>
         <p:spPr>
           <a:xfrm>
-            <a:off x="2651760" y="3474720"/>
-            <a:ext cx="9418320" cy="777240"/>
+            <a:off x="2651760" y="3364992"/>
+            <a:ext cx="9418320" cy="868680"/>
           </a:xfrm>
           <a:prstGeom prst="rect">
             <a:avLst/>
@@ -25329,8 +25329,8 @@
         </p:nvSpPr>
         <p:spPr>
           <a:xfrm>
-            <a:off x="457200" y="4453128"/>
-            <a:ext cx="11247120" cy="960120"/>
+            <a:off x="457200" y="4343400"/>
+            <a:ext cx="11247120" cy="1005840"/>
           </a:xfrm>
           <a:prstGeom prst="rect">
             <a:avLst/>
@@ -25371,7 +25371,7 @@
         </p:nvSpPr>
         <p:spPr>
           <a:xfrm>
-            <a:off x="594360" y="4544568"/>
+            <a:off x="594360" y="4434840"/>
             <a:ext cx="2011680" cy="365760"/>
           </a:xfrm>
           <a:prstGeom prst="rect">
@@ -25406,8 +25406,8 @@
         </p:nvSpPr>
         <p:spPr>
           <a:xfrm>
-            <a:off x="2651760" y="4544568"/>
-            <a:ext cx="9418320" cy="777240"/>
+            <a:off x="2651760" y="4416552"/>
+            <a:ext cx="9418320" cy="868680"/>
           </a:xfrm>
           <a:prstGeom prst="rect">
             <a:avLst/>
@@ -25441,8 +25441,8 @@
         </p:nvSpPr>
         <p:spPr>
           <a:xfrm>
-            <a:off x="457200" y="5522976"/>
-            <a:ext cx="11247120" cy="960120"/>
+            <a:off x="457200" y="5394960"/>
+            <a:ext cx="11247120" cy="1005840"/>
           </a:xfrm>
           <a:prstGeom prst="rect">
             <a:avLst/>
@@ -25483,7 +25483,7 @@
         </p:nvSpPr>
         <p:spPr>
           <a:xfrm>
-            <a:off x="594360" y="5614416"/>
+            <a:off x="594360" y="5486400"/>
             <a:ext cx="2011680" cy="365760"/>
           </a:xfrm>
           <a:prstGeom prst="rect">
@@ -25518,8 +25518,8 @@
         </p:nvSpPr>
         <p:spPr>
           <a:xfrm>
-            <a:off x="2651760" y="5614416"/>
-            <a:ext cx="9418320" cy="777240"/>
+            <a:off x="2651760" y="5468112"/>
+            <a:ext cx="9418320" cy="868680"/>
           </a:xfrm>
           <a:prstGeom prst="rect">
             <a:avLst/>
@@ -25711,8 +25711,8 @@
         </p:nvSpPr>
         <p:spPr>
           <a:xfrm>
-            <a:off x="457200" y="1920240"/>
-            <a:ext cx="11247120" cy="1280160"/>
+            <a:off x="457200" y="1828800"/>
+            <a:ext cx="11247120" cy="1371600"/>
           </a:xfrm>
           <a:prstGeom prst="rect">
             <a:avLst/>
@@ -25753,8 +25753,8 @@
         </p:nvSpPr>
         <p:spPr>
           <a:xfrm>
-            <a:off x="457200" y="2011680"/>
-            <a:ext cx="11247120" cy="822960"/>
+            <a:off x="457200" y="1874519"/>
+            <a:ext cx="11247120" cy="868680"/>
           </a:xfrm>
           <a:prstGeom prst="rect">
             <a:avLst/>
@@ -25769,7 +25769,7 @@
           <a:p>
             <a:pPr algn="ctr"/>
             <a:r>
-              <a:rPr sz="4000" b="1">
+              <a:rPr sz="3800" b="1">
                 <a:solidFill>
                   <a:srgbClr val="1F2A44"/>
                 </a:solidFill>
@@ -25788,16 +25788,16 @@
         </p:nvSpPr>
         <p:spPr>
           <a:xfrm>
-            <a:off x="457200" y="2788920"/>
-            <a:ext cx="11247120" cy="365760"/>
-          </a:xfrm>
-          <a:prstGeom prst="rect">
-            <a:avLst/>
-          </a:prstGeom>
-          <a:noFill/>
-        </p:spPr>
-        <p:txBody>
-          <a:bodyPr wrap="square" lIns="45720" rIns="45720" tIns="18288" bIns="18288" anchor="t">
+            <a:off x="457200" y="2743200"/>
+            <a:ext cx="11247120" cy="411480"/>
+          </a:xfrm>
+          <a:prstGeom prst="rect">
+            <a:avLst/>
+          </a:prstGeom>
+          <a:noFill/>
+        </p:spPr>
+        <p:txBody>
+          <a:bodyPr wrap="square" lIns="45720" rIns="45720" tIns="18288" bIns="18288" anchor="ctr">
             <a:spAutoFit/>
           </a:bodyPr>
           <a:lstStyle/>
@@ -25823,8 +25823,8 @@
         </p:nvSpPr>
         <p:spPr>
           <a:xfrm>
-            <a:off x="457200" y="3383280"/>
-            <a:ext cx="11247120" cy="960120"/>
+            <a:off x="457200" y="3291840"/>
+            <a:ext cx="11247120" cy="1005840"/>
           </a:xfrm>
           <a:prstGeom prst="rect">
             <a:avLst/>
@@ -25865,7 +25865,7 @@
         </p:nvSpPr>
         <p:spPr>
           <a:xfrm>
-            <a:off x="594360" y="3474720"/>
+            <a:off x="594360" y="3383280"/>
             <a:ext cx="2011680" cy="365760"/>
           </a:xfrm>
           <a:prstGeom prst="rect">
@@ -25900,8 +25900,8 @@
         </p:nvSpPr>
         <p:spPr>
           <a:xfrm>
-            <a:off x="2651760" y="3474720"/>
-            <a:ext cx="9418320" cy="777240"/>
+            <a:off x="2651760" y="3364992"/>
+            <a:ext cx="9418320" cy="868680"/>
           </a:xfrm>
           <a:prstGeom prst="rect">
             <a:avLst/>
@@ -25935,8 +25935,8 @@
         </p:nvSpPr>
         <p:spPr>
           <a:xfrm>
-            <a:off x="457200" y="4453128"/>
-            <a:ext cx="11247120" cy="960120"/>
+            <a:off x="457200" y="4343400"/>
+            <a:ext cx="11247120" cy="1005840"/>
           </a:xfrm>
           <a:prstGeom prst="rect">
             <a:avLst/>
@@ -25977,7 +25977,7 @@
         </p:nvSpPr>
         <p:spPr>
           <a:xfrm>
-            <a:off x="594360" y="4544568"/>
+            <a:off x="594360" y="4434840"/>
             <a:ext cx="2011680" cy="365760"/>
           </a:xfrm>
           <a:prstGeom prst="rect">
@@ -26012,8 +26012,8 @@
         </p:nvSpPr>
         <p:spPr>
           <a:xfrm>
-            <a:off x="2651760" y="4544568"/>
-            <a:ext cx="9418320" cy="777240"/>
+            <a:off x="2651760" y="4416552"/>
+            <a:ext cx="9418320" cy="868680"/>
           </a:xfrm>
           <a:prstGeom prst="rect">
             <a:avLst/>
@@ -26047,8 +26047,8 @@
         </p:nvSpPr>
         <p:spPr>
           <a:xfrm>
-            <a:off x="457200" y="5522976"/>
-            <a:ext cx="11247120" cy="960120"/>
+            <a:off x="457200" y="5394960"/>
+            <a:ext cx="11247120" cy="1005840"/>
           </a:xfrm>
           <a:prstGeom prst="rect">
             <a:avLst/>
@@ -26089,7 +26089,7 @@
         </p:nvSpPr>
         <p:spPr>
           <a:xfrm>
-            <a:off x="594360" y="5614416"/>
+            <a:off x="594360" y="5486400"/>
             <a:ext cx="2011680" cy="365760"/>
           </a:xfrm>
           <a:prstGeom prst="rect">
@@ -26124,8 +26124,8 @@
         </p:nvSpPr>
         <p:spPr>
           <a:xfrm>
-            <a:off x="2651760" y="5614416"/>
-            <a:ext cx="9418320" cy="777240"/>
+            <a:off x="2651760" y="5468112"/>
+            <a:ext cx="9418320" cy="868680"/>
           </a:xfrm>
           <a:prstGeom prst="rect">
             <a:avLst/>
@@ -26317,8 +26317,8 @@
         </p:nvSpPr>
         <p:spPr>
           <a:xfrm>
-            <a:off x="457200" y="1920240"/>
-            <a:ext cx="11247120" cy="1280160"/>
+            <a:off x="457200" y="1828800"/>
+            <a:ext cx="11247120" cy="1371600"/>
           </a:xfrm>
           <a:prstGeom prst="rect">
             <a:avLst/>
@@ -26359,8 +26359,8 @@
         </p:nvSpPr>
         <p:spPr>
           <a:xfrm>
-            <a:off x="457200" y="2011680"/>
-            <a:ext cx="11247120" cy="822960"/>
+            <a:off x="457200" y="1874519"/>
+            <a:ext cx="11247120" cy="868680"/>
           </a:xfrm>
           <a:prstGeom prst="rect">
             <a:avLst/>
@@ -26375,7 +26375,7 @@
           <a:p>
             <a:pPr algn="ctr"/>
             <a:r>
-              <a:rPr sz="4000" b="1">
+              <a:rPr sz="3800" b="1">
                 <a:solidFill>
                   <a:srgbClr val="1F2A44"/>
                 </a:solidFill>
@@ -26394,16 +26394,16 @@
         </p:nvSpPr>
         <p:spPr>
           <a:xfrm>
-            <a:off x="457200" y="2788920"/>
-            <a:ext cx="11247120" cy="365760"/>
-          </a:xfrm>
-          <a:prstGeom prst="rect">
-            <a:avLst/>
-          </a:prstGeom>
-          <a:noFill/>
-        </p:spPr>
-        <p:txBody>
-          <a:bodyPr wrap="square" lIns="45720" rIns="45720" tIns="18288" bIns="18288" anchor="t">
+            <a:off x="457200" y="2743200"/>
+            <a:ext cx="11247120" cy="411480"/>
+          </a:xfrm>
+          <a:prstGeom prst="rect">
+            <a:avLst/>
+          </a:prstGeom>
+          <a:noFill/>
+        </p:spPr>
+        <p:txBody>
+          <a:bodyPr wrap="square" lIns="45720" rIns="45720" tIns="18288" bIns="18288" anchor="ctr">
             <a:spAutoFit/>
           </a:bodyPr>
           <a:lstStyle/>
@@ -26429,8 +26429,8 @@
         </p:nvSpPr>
         <p:spPr>
           <a:xfrm>
-            <a:off x="457200" y="3383280"/>
-            <a:ext cx="11247120" cy="960120"/>
+            <a:off x="457200" y="3291840"/>
+            <a:ext cx="11247120" cy="1005840"/>
           </a:xfrm>
           <a:prstGeom prst="rect">
             <a:avLst/>
@@ -26471,7 +26471,7 @@
         </p:nvSpPr>
         <p:spPr>
           <a:xfrm>
-            <a:off x="594360" y="3474720"/>
+            <a:off x="594360" y="3383280"/>
             <a:ext cx="2011680" cy="365760"/>
           </a:xfrm>
           <a:prstGeom prst="rect">
@@ -26506,8 +26506,8 @@
         </p:nvSpPr>
         <p:spPr>
           <a:xfrm>
-            <a:off x="2651760" y="3474720"/>
-            <a:ext cx="9418320" cy="777240"/>
+            <a:off x="2651760" y="3364992"/>
+            <a:ext cx="9418320" cy="868680"/>
           </a:xfrm>
           <a:prstGeom prst="rect">
             <a:avLst/>
@@ -26541,8 +26541,8 @@
         </p:nvSpPr>
         <p:spPr>
           <a:xfrm>
-            <a:off x="457200" y="4453128"/>
-            <a:ext cx="11247120" cy="960120"/>
+            <a:off x="457200" y="4343400"/>
+            <a:ext cx="11247120" cy="1005840"/>
           </a:xfrm>
           <a:prstGeom prst="rect">
             <a:avLst/>
@@ -26583,7 +26583,7 @@
         </p:nvSpPr>
         <p:spPr>
           <a:xfrm>
-            <a:off x="594360" y="4544568"/>
+            <a:off x="594360" y="4434840"/>
             <a:ext cx="2011680" cy="365760"/>
           </a:xfrm>
           <a:prstGeom prst="rect">
@@ -26618,8 +26618,8 @@
         </p:nvSpPr>
         <p:spPr>
           <a:xfrm>
-            <a:off x="2651760" y="4544568"/>
-            <a:ext cx="9418320" cy="777240"/>
+            <a:off x="2651760" y="4416552"/>
+            <a:ext cx="9418320" cy="868680"/>
           </a:xfrm>
           <a:prstGeom prst="rect">
             <a:avLst/>
@@ -26653,8 +26653,8 @@
         </p:nvSpPr>
         <p:spPr>
           <a:xfrm>
-            <a:off x="457200" y="5522976"/>
-            <a:ext cx="11247120" cy="960120"/>
+            <a:off x="457200" y="5394960"/>
+            <a:ext cx="11247120" cy="1005840"/>
           </a:xfrm>
           <a:prstGeom prst="rect">
             <a:avLst/>
@@ -26695,7 +26695,7 @@
         </p:nvSpPr>
         <p:spPr>
           <a:xfrm>
-            <a:off x="594360" y="5614416"/>
+            <a:off x="594360" y="5486400"/>
             <a:ext cx="2011680" cy="365760"/>
           </a:xfrm>
           <a:prstGeom prst="rect">
@@ -26730,8 +26730,8 @@
         </p:nvSpPr>
         <p:spPr>
           <a:xfrm>
-            <a:off x="2651760" y="5614416"/>
-            <a:ext cx="9418320" cy="777240"/>
+            <a:off x="2651760" y="5468112"/>
+            <a:ext cx="9418320" cy="868680"/>
           </a:xfrm>
           <a:prstGeom prst="rect">
             <a:avLst/>
@@ -26923,8 +26923,8 @@
         </p:nvSpPr>
         <p:spPr>
           <a:xfrm>
-            <a:off x="457200" y="1920240"/>
-            <a:ext cx="11247120" cy="1280160"/>
+            <a:off x="457200" y="1828800"/>
+            <a:ext cx="11247120" cy="1371600"/>
           </a:xfrm>
           <a:prstGeom prst="rect">
             <a:avLst/>
@@ -26965,8 +26965,8 @@
         </p:nvSpPr>
         <p:spPr>
           <a:xfrm>
-            <a:off x="457200" y="2011680"/>
-            <a:ext cx="11247120" cy="822960"/>
+            <a:off x="457200" y="1874519"/>
+            <a:ext cx="11247120" cy="868680"/>
           </a:xfrm>
           <a:prstGeom prst="rect">
             <a:avLst/>
@@ -26981,7 +26981,7 @@
           <a:p>
             <a:pPr algn="ctr"/>
             <a:r>
-              <a:rPr sz="4000" b="1">
+              <a:rPr sz="3800" b="1">
                 <a:solidFill>
                   <a:srgbClr val="1F2A44"/>
                 </a:solidFill>
@@ -27000,16 +27000,16 @@
         </p:nvSpPr>
         <p:spPr>
           <a:xfrm>
-            <a:off x="457200" y="2788920"/>
-            <a:ext cx="11247120" cy="365760"/>
-          </a:xfrm>
-          <a:prstGeom prst="rect">
-            <a:avLst/>
-          </a:prstGeom>
-          <a:noFill/>
-        </p:spPr>
-        <p:txBody>
-          <a:bodyPr wrap="square" lIns="45720" rIns="45720" tIns="18288" bIns="18288" anchor="t">
+            <a:off x="457200" y="2743200"/>
+            <a:ext cx="11247120" cy="411480"/>
+          </a:xfrm>
+          <a:prstGeom prst="rect">
+            <a:avLst/>
+          </a:prstGeom>
+          <a:noFill/>
+        </p:spPr>
+        <p:txBody>
+          <a:bodyPr wrap="square" lIns="45720" rIns="45720" tIns="18288" bIns="18288" anchor="ctr">
             <a:spAutoFit/>
           </a:bodyPr>
           <a:lstStyle/>
@@ -27035,8 +27035,8 @@
         </p:nvSpPr>
         <p:spPr>
           <a:xfrm>
-            <a:off x="457200" y="3383280"/>
-            <a:ext cx="11247120" cy="960120"/>
+            <a:off x="457200" y="3291840"/>
+            <a:ext cx="11247120" cy="1005840"/>
           </a:xfrm>
           <a:prstGeom prst="rect">
             <a:avLst/>
@@ -27077,7 +27077,7 @@
         </p:nvSpPr>
         <p:spPr>
           <a:xfrm>
-            <a:off x="594360" y="3474720"/>
+            <a:off x="594360" y="3383280"/>
             <a:ext cx="2011680" cy="365760"/>
           </a:xfrm>
           <a:prstGeom prst="rect">
@@ -27112,8 +27112,8 @@
         </p:nvSpPr>
         <p:spPr>
           <a:xfrm>
-            <a:off x="2651760" y="3474720"/>
-            <a:ext cx="9418320" cy="777240"/>
+            <a:off x="2651760" y="3364992"/>
+            <a:ext cx="9418320" cy="868680"/>
           </a:xfrm>
           <a:prstGeom prst="rect">
             <a:avLst/>
@@ -27147,8 +27147,8 @@
         </p:nvSpPr>
         <p:spPr>
           <a:xfrm>
-            <a:off x="457200" y="4453128"/>
-            <a:ext cx="11247120" cy="960120"/>
+            <a:off x="457200" y="4343400"/>
+            <a:ext cx="11247120" cy="1005840"/>
           </a:xfrm>
           <a:prstGeom prst="rect">
             <a:avLst/>
@@ -27189,7 +27189,7 @@
         </p:nvSpPr>
         <p:spPr>
           <a:xfrm>
-            <a:off x="594360" y="4544568"/>
+            <a:off x="594360" y="4434840"/>
             <a:ext cx="2011680" cy="365760"/>
           </a:xfrm>
           <a:prstGeom prst="rect">
@@ -27224,8 +27224,8 @@
         </p:nvSpPr>
         <p:spPr>
           <a:xfrm>
-            <a:off x="2651760" y="4544568"/>
-            <a:ext cx="9418320" cy="777240"/>
+            <a:off x="2651760" y="4416552"/>
+            <a:ext cx="9418320" cy="868680"/>
           </a:xfrm>
           <a:prstGeom prst="rect">
             <a:avLst/>
@@ -27259,8 +27259,8 @@
         </p:nvSpPr>
         <p:spPr>
           <a:xfrm>
-            <a:off x="457200" y="5522976"/>
-            <a:ext cx="11247120" cy="960120"/>
+            <a:off x="457200" y="5394960"/>
+            <a:ext cx="11247120" cy="1005840"/>
           </a:xfrm>
           <a:prstGeom prst="rect">
             <a:avLst/>
@@ -27301,7 +27301,7 @@
         </p:nvSpPr>
         <p:spPr>
           <a:xfrm>
-            <a:off x="594360" y="5614416"/>
+            <a:off x="594360" y="5486400"/>
             <a:ext cx="2011680" cy="365760"/>
           </a:xfrm>
           <a:prstGeom prst="rect">
@@ -27336,8 +27336,8 @@
         </p:nvSpPr>
         <p:spPr>
           <a:xfrm>
-            <a:off x="2651760" y="5614416"/>
-            <a:ext cx="9418320" cy="777240"/>
+            <a:off x="2651760" y="5468112"/>
+            <a:ext cx="9418320" cy="868680"/>
           </a:xfrm>
           <a:prstGeom prst="rect">
             <a:avLst/>
@@ -27529,8 +27529,8 @@
         </p:nvSpPr>
         <p:spPr>
           <a:xfrm>
-            <a:off x="457200" y="1920240"/>
-            <a:ext cx="11247120" cy="1280160"/>
+            <a:off x="457200" y="1828800"/>
+            <a:ext cx="11247120" cy="1371600"/>
           </a:xfrm>
           <a:prstGeom prst="rect">
             <a:avLst/>
@@ -27571,8 +27571,8 @@
         </p:nvSpPr>
         <p:spPr>
           <a:xfrm>
-            <a:off x="457200" y="2011680"/>
-            <a:ext cx="11247120" cy="822960"/>
+            <a:off x="457200" y="1874519"/>
+            <a:ext cx="11247120" cy="868680"/>
           </a:xfrm>
           <a:prstGeom prst="rect">
             <a:avLst/>
@@ -27587,7 +27587,7 @@
           <a:p>
             <a:pPr algn="ctr"/>
             <a:r>
-              <a:rPr sz="4000" b="1">
+              <a:rPr sz="3800" b="1">
                 <a:solidFill>
                   <a:srgbClr val="1F2A44"/>
                 </a:solidFill>
@@ -27606,16 +27606,16 @@
         </p:nvSpPr>
         <p:spPr>
           <a:xfrm>
-            <a:off x="457200" y="2788920"/>
-            <a:ext cx="11247120" cy="365760"/>
-          </a:xfrm>
-          <a:prstGeom prst="rect">
-            <a:avLst/>
-          </a:prstGeom>
-          <a:noFill/>
-        </p:spPr>
-        <p:txBody>
-          <a:bodyPr wrap="square" lIns="45720" rIns="45720" tIns="18288" bIns="18288" anchor="t">
+            <a:off x="457200" y="2743200"/>
+            <a:ext cx="11247120" cy="411480"/>
+          </a:xfrm>
+          <a:prstGeom prst="rect">
+            <a:avLst/>
+          </a:prstGeom>
+          <a:noFill/>
+        </p:spPr>
+        <p:txBody>
+          <a:bodyPr wrap="square" lIns="45720" rIns="45720" tIns="18288" bIns="18288" anchor="ctr">
             <a:spAutoFit/>
           </a:bodyPr>
           <a:lstStyle/>
@@ -27641,8 +27641,8 @@
         </p:nvSpPr>
         <p:spPr>
           <a:xfrm>
-            <a:off x="457200" y="3383280"/>
-            <a:ext cx="11247120" cy="960120"/>
+            <a:off x="457200" y="3291840"/>
+            <a:ext cx="11247120" cy="1005840"/>
           </a:xfrm>
           <a:prstGeom prst="rect">
             <a:avLst/>
@@ -27683,7 +27683,7 @@
         </p:nvSpPr>
         <p:spPr>
           <a:xfrm>
-            <a:off x="594360" y="3474720"/>
+            <a:off x="594360" y="3383280"/>
             <a:ext cx="2011680" cy="365760"/>
           </a:xfrm>
           <a:prstGeom prst="rect">
@@ -27718,8 +27718,8 @@
         </p:nvSpPr>
         <p:spPr>
           <a:xfrm>
-            <a:off x="2651760" y="3474720"/>
-            <a:ext cx="9418320" cy="777240"/>
+            <a:off x="2651760" y="3364992"/>
+            <a:ext cx="9418320" cy="868680"/>
           </a:xfrm>
           <a:prstGeom prst="rect">
             <a:avLst/>
@@ -27753,8 +27753,8 @@
         </p:nvSpPr>
         <p:spPr>
           <a:xfrm>
-            <a:off x="457200" y="4453128"/>
-            <a:ext cx="11247120" cy="960120"/>
+            <a:off x="457200" y="4343400"/>
+            <a:ext cx="11247120" cy="1005840"/>
           </a:xfrm>
           <a:prstGeom prst="rect">
             <a:avLst/>
@@ -27795,7 +27795,7 @@
         </p:nvSpPr>
         <p:spPr>
           <a:xfrm>
-            <a:off x="594360" y="4544568"/>
+            <a:off x="594360" y="4434840"/>
             <a:ext cx="2011680" cy="365760"/>
           </a:xfrm>
           <a:prstGeom prst="rect">
@@ -27830,8 +27830,8 @@
         </p:nvSpPr>
         <p:spPr>
           <a:xfrm>
-            <a:off x="2651760" y="4544568"/>
-            <a:ext cx="9418320" cy="777240"/>
+            <a:off x="2651760" y="4416552"/>
+            <a:ext cx="9418320" cy="868680"/>
           </a:xfrm>
           <a:prstGeom prst="rect">
             <a:avLst/>
@@ -27865,8 +27865,8 @@
         </p:nvSpPr>
         <p:spPr>
           <a:xfrm>
-            <a:off x="457200" y="5522976"/>
-            <a:ext cx="11247120" cy="960120"/>
+            <a:off x="457200" y="5394960"/>
+            <a:ext cx="11247120" cy="1005840"/>
           </a:xfrm>
           <a:prstGeom prst="rect">
             <a:avLst/>
@@ -27907,7 +27907,7 @@
         </p:nvSpPr>
         <p:spPr>
           <a:xfrm>
-            <a:off x="594360" y="5614416"/>
+            <a:off x="594360" y="5486400"/>
             <a:ext cx="2011680" cy="365760"/>
           </a:xfrm>
           <a:prstGeom prst="rect">
@@ -27942,8 +27942,8 @@
         </p:nvSpPr>
         <p:spPr>
           <a:xfrm>
-            <a:off x="2651760" y="5614416"/>
-            <a:ext cx="9418320" cy="777240"/>
+            <a:off x="2651760" y="5468112"/>
+            <a:ext cx="9418320" cy="868680"/>
           </a:xfrm>
           <a:prstGeom prst="rect">
             <a:avLst/>
@@ -28135,8 +28135,8 @@
         </p:nvSpPr>
         <p:spPr>
           <a:xfrm>
-            <a:off x="457200" y="1920240"/>
-            <a:ext cx="11247120" cy="1280160"/>
+            <a:off x="457200" y="1828800"/>
+            <a:ext cx="11247120" cy="1371600"/>
           </a:xfrm>
           <a:prstGeom prst="rect">
             <a:avLst/>
@@ -28177,8 +28177,8 @@
         </p:nvSpPr>
         <p:spPr>
           <a:xfrm>
-            <a:off x="457200" y="2011680"/>
-            <a:ext cx="11247120" cy="822960"/>
+            <a:off x="457200" y="1874519"/>
+            <a:ext cx="11247120" cy="868680"/>
           </a:xfrm>
           <a:prstGeom prst="rect">
             <a:avLst/>
@@ -28193,7 +28193,7 @@
           <a:p>
             <a:pPr algn="ctr"/>
             <a:r>
-              <a:rPr sz="4000" b="1">
+              <a:rPr sz="3800" b="1">
                 <a:solidFill>
                   <a:srgbClr val="1F2A44"/>
                 </a:solidFill>
@@ -28212,16 +28212,16 @@
         </p:nvSpPr>
         <p:spPr>
           <a:xfrm>
-            <a:off x="457200" y="2788920"/>
-            <a:ext cx="11247120" cy="365760"/>
-          </a:xfrm>
-          <a:prstGeom prst="rect">
-            <a:avLst/>
-          </a:prstGeom>
-          <a:noFill/>
-        </p:spPr>
-        <p:txBody>
-          <a:bodyPr wrap="square" lIns="45720" rIns="45720" tIns="18288" bIns="18288" anchor="t">
+            <a:off x="457200" y="2743200"/>
+            <a:ext cx="11247120" cy="411480"/>
+          </a:xfrm>
+          <a:prstGeom prst="rect">
+            <a:avLst/>
+          </a:prstGeom>
+          <a:noFill/>
+        </p:spPr>
+        <p:txBody>
+          <a:bodyPr wrap="square" lIns="45720" rIns="45720" tIns="18288" bIns="18288" anchor="ctr">
             <a:spAutoFit/>
           </a:bodyPr>
           <a:lstStyle/>
@@ -28247,8 +28247,8 @@
         </p:nvSpPr>
         <p:spPr>
           <a:xfrm>
-            <a:off x="457200" y="3383280"/>
-            <a:ext cx="11247120" cy="960120"/>
+            <a:off x="457200" y="3291840"/>
+            <a:ext cx="11247120" cy="1005840"/>
           </a:xfrm>
           <a:prstGeom prst="rect">
             <a:avLst/>
@@ -28289,7 +28289,7 @@
         </p:nvSpPr>
         <p:spPr>
           <a:xfrm>
-            <a:off x="594360" y="3474720"/>
+            <a:off x="594360" y="3383280"/>
             <a:ext cx="2011680" cy="365760"/>
           </a:xfrm>
           <a:prstGeom prst="rect">
@@ -28324,8 +28324,8 @@
         </p:nvSpPr>
         <p:spPr>
           <a:xfrm>
-            <a:off x="2651760" y="3474720"/>
-            <a:ext cx="9418320" cy="777240"/>
+            <a:off x="2651760" y="3364992"/>
+            <a:ext cx="9418320" cy="868680"/>
           </a:xfrm>
           <a:prstGeom prst="rect">
             <a:avLst/>
@@ -28359,8 +28359,8 @@
         </p:nvSpPr>
         <p:spPr>
           <a:xfrm>
-            <a:off x="457200" y="4453128"/>
-            <a:ext cx="11247120" cy="960120"/>
+            <a:off x="457200" y="4343400"/>
+            <a:ext cx="11247120" cy="1005840"/>
           </a:xfrm>
           <a:prstGeom prst="rect">
             <a:avLst/>
@@ -28401,7 +28401,7 @@
         </p:nvSpPr>
         <p:spPr>
           <a:xfrm>
-            <a:off x="594360" y="4544568"/>
+            <a:off x="594360" y="4434840"/>
             <a:ext cx="2011680" cy="365760"/>
           </a:xfrm>
           <a:prstGeom prst="rect">
@@ -28436,8 +28436,8 @@
         </p:nvSpPr>
         <p:spPr>
           <a:xfrm>
-            <a:off x="2651760" y="4544568"/>
-            <a:ext cx="9418320" cy="777240"/>
+            <a:off x="2651760" y="4416552"/>
+            <a:ext cx="9418320" cy="868680"/>
           </a:xfrm>
           <a:prstGeom prst="rect">
             <a:avLst/>
@@ -28471,8 +28471,8 @@
         </p:nvSpPr>
         <p:spPr>
           <a:xfrm>
-            <a:off x="457200" y="5522976"/>
-            <a:ext cx="11247120" cy="960120"/>
+            <a:off x="457200" y="5394960"/>
+            <a:ext cx="11247120" cy="1005840"/>
           </a:xfrm>
           <a:prstGeom prst="rect">
             <a:avLst/>
@@ -28513,7 +28513,7 @@
         </p:nvSpPr>
         <p:spPr>
           <a:xfrm>
-            <a:off x="594360" y="5614416"/>
+            <a:off x="594360" y="5486400"/>
             <a:ext cx="2011680" cy="365760"/>
           </a:xfrm>
           <a:prstGeom prst="rect">
@@ -28548,8 +28548,8 @@
         </p:nvSpPr>
         <p:spPr>
           <a:xfrm>
-            <a:off x="2651760" y="5614416"/>
-            <a:ext cx="9418320" cy="777240"/>
+            <a:off x="2651760" y="5468112"/>
+            <a:ext cx="9418320" cy="868680"/>
           </a:xfrm>
           <a:prstGeom prst="rect">
             <a:avLst/>
@@ -28741,8 +28741,8 @@
         </p:nvSpPr>
         <p:spPr>
           <a:xfrm>
-            <a:off x="457200" y="1920240"/>
-            <a:ext cx="11247120" cy="1280160"/>
+            <a:off x="457200" y="1828800"/>
+            <a:ext cx="11247120" cy="1371600"/>
           </a:xfrm>
           <a:prstGeom prst="rect">
             <a:avLst/>
@@ -28783,8 +28783,8 @@
         </p:nvSpPr>
         <p:spPr>
           <a:xfrm>
-            <a:off x="457200" y="2011680"/>
-            <a:ext cx="11247120" cy="822960"/>
+            <a:off x="457200" y="1874519"/>
+            <a:ext cx="11247120" cy="868680"/>
           </a:xfrm>
           <a:prstGeom prst="rect">
             <a:avLst/>
@@ -28799,7 +28799,7 @@
           <a:p>
             <a:pPr algn="ctr"/>
             <a:r>
-              <a:rPr sz="4000" b="1">
+              <a:rPr sz="3800" b="1">
                 <a:solidFill>
                   <a:srgbClr val="1F2A44"/>
                 </a:solidFill>
@@ -28818,16 +28818,16 @@
         </p:nvSpPr>
         <p:spPr>
           <a:xfrm>
-            <a:off x="457200" y="2788920"/>
-            <a:ext cx="11247120" cy="365760"/>
-          </a:xfrm>
-          <a:prstGeom prst="rect">
-            <a:avLst/>
-          </a:prstGeom>
-          <a:noFill/>
-        </p:spPr>
-        <p:txBody>
-          <a:bodyPr wrap="square" lIns="45720" rIns="45720" tIns="18288" bIns="18288" anchor="t">
+            <a:off x="457200" y="2743200"/>
+            <a:ext cx="11247120" cy="411480"/>
+          </a:xfrm>
+          <a:prstGeom prst="rect">
+            <a:avLst/>
+          </a:prstGeom>
+          <a:noFill/>
+        </p:spPr>
+        <p:txBody>
+          <a:bodyPr wrap="square" lIns="45720" rIns="45720" tIns="18288" bIns="18288" anchor="ctr">
             <a:spAutoFit/>
           </a:bodyPr>
           <a:lstStyle/>
@@ -28853,8 +28853,8 @@
         </p:nvSpPr>
         <p:spPr>
           <a:xfrm>
-            <a:off x="457200" y="3383280"/>
-            <a:ext cx="11247120" cy="960120"/>
+            <a:off x="457200" y="3291840"/>
+            <a:ext cx="11247120" cy="1005840"/>
           </a:xfrm>
           <a:prstGeom prst="rect">
             <a:avLst/>
@@ -28895,7 +28895,7 @@
         </p:nvSpPr>
         <p:spPr>
           <a:xfrm>
-            <a:off x="594360" y="3474720"/>
+            <a:off x="594360" y="3383280"/>
             <a:ext cx="2011680" cy="365760"/>
           </a:xfrm>
           <a:prstGeom prst="rect">
@@ -28930,8 +28930,8 @@
         </p:nvSpPr>
         <p:spPr>
           <a:xfrm>
-            <a:off x="2651760" y="3474720"/>
-            <a:ext cx="9418320" cy="777240"/>
+            <a:off x="2651760" y="3364992"/>
+            <a:ext cx="9418320" cy="868680"/>
           </a:xfrm>
           <a:prstGeom prst="rect">
             <a:avLst/>
@@ -28965,8 +28965,8 @@
         </p:nvSpPr>
         <p:spPr>
           <a:xfrm>
-            <a:off x="457200" y="4453128"/>
-            <a:ext cx="11247120" cy="960120"/>
+            <a:off x="457200" y="4343400"/>
+            <a:ext cx="11247120" cy="1005840"/>
           </a:xfrm>
           <a:prstGeom prst="rect">
             <a:avLst/>
@@ -29007,7 +29007,7 @@
         </p:nvSpPr>
         <p:spPr>
           <a:xfrm>
-            <a:off x="594360" y="4544568"/>
+            <a:off x="594360" y="4434840"/>
             <a:ext cx="2011680" cy="365760"/>
           </a:xfrm>
           <a:prstGeom prst="rect">
@@ -29042,8 +29042,8 @@
         </p:nvSpPr>
         <p:spPr>
           <a:xfrm>
-            <a:off x="2651760" y="4544568"/>
-            <a:ext cx="9418320" cy="777240"/>
+            <a:off x="2651760" y="4416552"/>
+            <a:ext cx="9418320" cy="868680"/>
           </a:xfrm>
           <a:prstGeom prst="rect">
             <a:avLst/>
@@ -29077,8 +29077,8 @@
         </p:nvSpPr>
         <p:spPr>
           <a:xfrm>
-            <a:off x="457200" y="5522976"/>
-            <a:ext cx="11247120" cy="960120"/>
+            <a:off x="457200" y="5394960"/>
+            <a:ext cx="11247120" cy="1005840"/>
           </a:xfrm>
           <a:prstGeom prst="rect">
             <a:avLst/>
@@ -29119,7 +29119,7 @@
         </p:nvSpPr>
         <p:spPr>
           <a:xfrm>
-            <a:off x="594360" y="5614416"/>
+            <a:off x="594360" y="5486400"/>
             <a:ext cx="2011680" cy="365760"/>
           </a:xfrm>
           <a:prstGeom prst="rect">
@@ -29154,8 +29154,8 @@
         </p:nvSpPr>
         <p:spPr>
           <a:xfrm>
-            <a:off x="2651760" y="5614416"/>
-            <a:ext cx="9418320" cy="777240"/>
+            <a:off x="2651760" y="5468112"/>
+            <a:ext cx="9418320" cy="868680"/>
           </a:xfrm>
           <a:prstGeom prst="rect">
             <a:avLst/>
@@ -29347,8 +29347,8 @@
         </p:nvSpPr>
         <p:spPr>
           <a:xfrm>
-            <a:off x="457200" y="1920240"/>
-            <a:ext cx="11247120" cy="1280160"/>
+            <a:off x="457200" y="1828800"/>
+            <a:ext cx="11247120" cy="1371600"/>
           </a:xfrm>
           <a:prstGeom prst="rect">
             <a:avLst/>
@@ -29389,8 +29389,8 @@
         </p:nvSpPr>
         <p:spPr>
           <a:xfrm>
-            <a:off x="457200" y="2011680"/>
-            <a:ext cx="11247120" cy="822960"/>
+            <a:off x="457200" y="1874519"/>
+            <a:ext cx="11247120" cy="868680"/>
           </a:xfrm>
           <a:prstGeom prst="rect">
             <a:avLst/>
@@ -29405,7 +29405,7 @@
           <a:p>
             <a:pPr algn="ctr"/>
             <a:r>
-              <a:rPr sz="4000" b="1">
+              <a:rPr sz="3800" b="1">
                 <a:solidFill>
                   <a:srgbClr val="1F2A44"/>
                 </a:solidFill>
@@ -29424,16 +29424,16 @@
         </p:nvSpPr>
         <p:spPr>
           <a:xfrm>
-            <a:off x="457200" y="2788920"/>
-            <a:ext cx="11247120" cy="365760"/>
-          </a:xfrm>
-          <a:prstGeom prst="rect">
-            <a:avLst/>
-          </a:prstGeom>
-          <a:noFill/>
-        </p:spPr>
-        <p:txBody>
-          <a:bodyPr wrap="square" lIns="45720" rIns="45720" tIns="18288" bIns="18288" anchor="t">
+            <a:off x="457200" y="2743200"/>
+            <a:ext cx="11247120" cy="411480"/>
+          </a:xfrm>
+          <a:prstGeom prst="rect">
+            <a:avLst/>
+          </a:prstGeom>
+          <a:noFill/>
+        </p:spPr>
+        <p:txBody>
+          <a:bodyPr wrap="square" lIns="45720" rIns="45720" tIns="18288" bIns="18288" anchor="ctr">
             <a:spAutoFit/>
           </a:bodyPr>
           <a:lstStyle/>
@@ -29459,8 +29459,8 @@
         </p:nvSpPr>
         <p:spPr>
           <a:xfrm>
-            <a:off x="457200" y="3383280"/>
-            <a:ext cx="11247120" cy="960120"/>
+            <a:off x="457200" y="3291840"/>
+            <a:ext cx="11247120" cy="1005840"/>
           </a:xfrm>
           <a:prstGeom prst="rect">
             <a:avLst/>
@@ -29501,7 +29501,7 @@
         </p:nvSpPr>
         <p:spPr>
           <a:xfrm>
-            <a:off x="594360" y="3474720"/>
+            <a:off x="594360" y="3383280"/>
             <a:ext cx="2011680" cy="365760"/>
           </a:xfrm>
           <a:prstGeom prst="rect">
@@ -29536,8 +29536,8 @@
         </p:nvSpPr>
         <p:spPr>
           <a:xfrm>
-            <a:off x="2651760" y="3474720"/>
-            <a:ext cx="9418320" cy="777240"/>
+            <a:off x="2651760" y="3364992"/>
+            <a:ext cx="9418320" cy="868680"/>
           </a:xfrm>
           <a:prstGeom prst="rect">
             <a:avLst/>
@@ -29571,8 +29571,8 @@
         </p:nvSpPr>
         <p:spPr>
           <a:xfrm>
-            <a:off x="457200" y="4453128"/>
-            <a:ext cx="11247120" cy="960120"/>
+            <a:off x="457200" y="4343400"/>
+            <a:ext cx="11247120" cy="1005840"/>
           </a:xfrm>
           <a:prstGeom prst="rect">
             <a:avLst/>
@@ -29613,7 +29613,7 @@
         </p:nvSpPr>
         <p:spPr>
           <a:xfrm>
-            <a:off x="594360" y="4544568"/>
+            <a:off x="594360" y="4434840"/>
             <a:ext cx="2011680" cy="365760"/>
           </a:xfrm>
           <a:prstGeom prst="rect">
@@ -29648,8 +29648,8 @@
         </p:nvSpPr>
         <p:spPr>
           <a:xfrm>
-            <a:off x="2651760" y="4544568"/>
-            <a:ext cx="9418320" cy="777240"/>
+            <a:off x="2651760" y="4416552"/>
+            <a:ext cx="9418320" cy="868680"/>
           </a:xfrm>
           <a:prstGeom prst="rect">
             <a:avLst/>
@@ -29683,8 +29683,8 @@
         </p:nvSpPr>
         <p:spPr>
           <a:xfrm>
-            <a:off x="457200" y="5522976"/>
-            <a:ext cx="11247120" cy="960120"/>
+            <a:off x="457200" y="5394960"/>
+            <a:ext cx="11247120" cy="1005840"/>
           </a:xfrm>
           <a:prstGeom prst="rect">
             <a:avLst/>
@@ -29725,7 +29725,7 @@
         </p:nvSpPr>
         <p:spPr>
           <a:xfrm>
-            <a:off x="594360" y="5614416"/>
+            <a:off x="594360" y="5486400"/>
             <a:ext cx="2011680" cy="365760"/>
           </a:xfrm>
           <a:prstGeom prst="rect">
@@ -29760,8 +29760,8 @@
         </p:nvSpPr>
         <p:spPr>
           <a:xfrm>
-            <a:off x="2651760" y="5614416"/>
-            <a:ext cx="9418320" cy="777240"/>
+            <a:off x="2651760" y="5468112"/>
+            <a:ext cx="9418320" cy="868680"/>
           </a:xfrm>
           <a:prstGeom prst="rect">
             <a:avLst/>
@@ -29953,8 +29953,8 @@
         </p:nvSpPr>
         <p:spPr>
           <a:xfrm>
-            <a:off x="457200" y="1920240"/>
-            <a:ext cx="11247120" cy="1280160"/>
+            <a:off x="457200" y="1828800"/>
+            <a:ext cx="11247120" cy="1371600"/>
           </a:xfrm>
           <a:prstGeom prst="rect">
             <a:avLst/>
@@ -29995,8 +29995,8 @@
         </p:nvSpPr>
         <p:spPr>
           <a:xfrm>
-            <a:off x="457200" y="2011680"/>
-            <a:ext cx="11247120" cy="822960"/>
+            <a:off x="457200" y="1874519"/>
+            <a:ext cx="11247120" cy="868680"/>
           </a:xfrm>
           <a:prstGeom prst="rect">
             <a:avLst/>
@@ -30011,7 +30011,7 @@
           <a:p>
             <a:pPr algn="ctr"/>
             <a:r>
-              <a:rPr sz="4000" b="1">
+              <a:rPr sz="3800" b="1">
                 <a:solidFill>
                   <a:srgbClr val="1F2A44"/>
                 </a:solidFill>
@@ -30030,16 +30030,16 @@
         </p:nvSpPr>
         <p:spPr>
           <a:xfrm>
-            <a:off x="457200" y="2788920"/>
-            <a:ext cx="11247120" cy="365760"/>
-          </a:xfrm>
-          <a:prstGeom prst="rect">
-            <a:avLst/>
-          </a:prstGeom>
-          <a:noFill/>
-        </p:spPr>
-        <p:txBody>
-          <a:bodyPr wrap="square" lIns="45720" rIns="45720" tIns="18288" bIns="18288" anchor="t">
+            <a:off x="457200" y="2743200"/>
+            <a:ext cx="11247120" cy="411480"/>
+          </a:xfrm>
+          <a:prstGeom prst="rect">
+            <a:avLst/>
+          </a:prstGeom>
+          <a:noFill/>
+        </p:spPr>
+        <p:txBody>
+          <a:bodyPr wrap="square" lIns="45720" rIns="45720" tIns="18288" bIns="18288" anchor="ctr">
             <a:spAutoFit/>
           </a:bodyPr>
           <a:lstStyle/>
@@ -30065,8 +30065,8 @@
         </p:nvSpPr>
         <p:spPr>
           <a:xfrm>
-            <a:off x="457200" y="3383280"/>
-            <a:ext cx="11247120" cy="960120"/>
+            <a:off x="457200" y="3291840"/>
+            <a:ext cx="11247120" cy="1005840"/>
           </a:xfrm>
           <a:prstGeom prst="rect">
             <a:avLst/>
@@ -30107,7 +30107,7 @@
         </p:nvSpPr>
         <p:spPr>
           <a:xfrm>
-            <a:off x="594360" y="3474720"/>
+            <a:off x="594360" y="3383280"/>
             <a:ext cx="2011680" cy="365760"/>
           </a:xfrm>
           <a:prstGeom prst="rect">
@@ -30142,8 +30142,8 @@
         </p:nvSpPr>
         <p:spPr>
           <a:xfrm>
-            <a:off x="2651760" y="3474720"/>
-            <a:ext cx="9418320" cy="777240"/>
+            <a:off x="2651760" y="3364992"/>
+            <a:ext cx="9418320" cy="868680"/>
           </a:xfrm>
           <a:prstGeom prst="rect">
             <a:avLst/>
@@ -30177,8 +30177,8 @@
         </p:nvSpPr>
         <p:spPr>
           <a:xfrm>
-            <a:off x="457200" y="4453128"/>
-            <a:ext cx="11247120" cy="960120"/>
+            <a:off x="457200" y="4343400"/>
+            <a:ext cx="11247120" cy="1005840"/>
           </a:xfrm>
           <a:prstGeom prst="rect">
             <a:avLst/>
@@ -30219,7 +30219,7 @@
         </p:nvSpPr>
         <p:spPr>
           <a:xfrm>
-            <a:off x="594360" y="4544568"/>
+            <a:off x="594360" y="4434840"/>
             <a:ext cx="2011680" cy="365760"/>
           </a:xfrm>
           <a:prstGeom prst="rect">
@@ -30254,8 +30254,8 @@
         </p:nvSpPr>
         <p:spPr>
           <a:xfrm>
-            <a:off x="2651760" y="4544568"/>
-            <a:ext cx="9418320" cy="777240"/>
+            <a:off x="2651760" y="4416552"/>
+            <a:ext cx="9418320" cy="868680"/>
           </a:xfrm>
           <a:prstGeom prst="rect">
             <a:avLst/>
@@ -30289,8 +30289,8 @@
         </p:nvSpPr>
         <p:spPr>
           <a:xfrm>
-            <a:off x="457200" y="5522976"/>
-            <a:ext cx="11247120" cy="960120"/>
+            <a:off x="457200" y="5394960"/>
+            <a:ext cx="11247120" cy="1005840"/>
           </a:xfrm>
           <a:prstGeom prst="rect">
             <a:avLst/>
@@ -30331,7 +30331,7 @@
         </p:nvSpPr>
         <p:spPr>
           <a:xfrm>
-            <a:off x="594360" y="5614416"/>
+            <a:off x="594360" y="5486400"/>
             <a:ext cx="2011680" cy="365760"/>
           </a:xfrm>
           <a:prstGeom prst="rect">
@@ -30366,8 +30366,8 @@
         </p:nvSpPr>
         <p:spPr>
           <a:xfrm>
-            <a:off x="2651760" y="5614416"/>
-            <a:ext cx="9418320" cy="777240"/>
+            <a:off x="2651760" y="5468112"/>
+            <a:ext cx="9418320" cy="868680"/>
           </a:xfrm>
           <a:prstGeom prst="rect">
             <a:avLst/>
@@ -30559,8 +30559,8 @@
         </p:nvSpPr>
         <p:spPr>
           <a:xfrm>
-            <a:off x="457200" y="2011680"/>
-            <a:ext cx="11247120" cy="1386840"/>
+            <a:off x="457200" y="1920240"/>
+            <a:ext cx="11247120" cy="1438656"/>
           </a:xfrm>
           <a:prstGeom prst="rect">
             <a:avLst/>
@@ -30601,8 +30601,8 @@
         </p:nvSpPr>
         <p:spPr>
           <a:xfrm>
-            <a:off x="640080" y="2103120"/>
-            <a:ext cx="10881360" cy="411480"/>
+            <a:off x="640080" y="1993392"/>
+            <a:ext cx="10881360" cy="384048"/>
           </a:xfrm>
           <a:prstGeom prst="rect">
             <a:avLst/>
@@ -30636,8 +30636,8 @@
         </p:nvSpPr>
         <p:spPr>
           <a:xfrm>
-            <a:off x="640080" y="2560320"/>
-            <a:ext cx="10881360" cy="746760"/>
+            <a:off x="640080" y="2395728"/>
+            <a:ext cx="10881360" cy="908304"/>
           </a:xfrm>
           <a:prstGeom prst="rect">
             <a:avLst/>
@@ -30683,8 +30683,8 @@
         </p:nvSpPr>
         <p:spPr>
           <a:xfrm>
-            <a:off x="457200" y="3535680"/>
-            <a:ext cx="11247120" cy="1386840"/>
+            <a:off x="457200" y="3486912"/>
+            <a:ext cx="11247120" cy="1438656"/>
           </a:xfrm>
           <a:prstGeom prst="rect">
             <a:avLst/>
@@ -30725,8 +30725,8 @@
         </p:nvSpPr>
         <p:spPr>
           <a:xfrm>
-            <a:off x="640080" y="3627120"/>
-            <a:ext cx="10881360" cy="411480"/>
+            <a:off x="640080" y="3560064"/>
+            <a:ext cx="10881360" cy="384048"/>
           </a:xfrm>
           <a:prstGeom prst="rect">
             <a:avLst/>
@@ -30760,8 +30760,8 @@
         </p:nvSpPr>
         <p:spPr>
           <a:xfrm>
-            <a:off x="640080" y="4084320"/>
-            <a:ext cx="10881360" cy="746760"/>
+            <a:off x="640080" y="3962400"/>
+            <a:ext cx="10881360" cy="908304"/>
           </a:xfrm>
           <a:prstGeom prst="rect">
             <a:avLst/>
@@ -30807,8 +30807,8 @@
         </p:nvSpPr>
         <p:spPr>
           <a:xfrm>
-            <a:off x="457200" y="5059680"/>
-            <a:ext cx="11247120" cy="1386840"/>
+            <a:off x="457200" y="5053584"/>
+            <a:ext cx="11247120" cy="1438656"/>
           </a:xfrm>
           <a:prstGeom prst="rect">
             <a:avLst/>
@@ -30849,8 +30849,8 @@
         </p:nvSpPr>
         <p:spPr>
           <a:xfrm>
-            <a:off x="640080" y="5151120"/>
-            <a:ext cx="10881360" cy="411480"/>
+            <a:off x="640080" y="5126736"/>
+            <a:ext cx="10881360" cy="384048"/>
           </a:xfrm>
           <a:prstGeom prst="rect">
             <a:avLst/>
@@ -30884,8 +30884,8 @@
         </p:nvSpPr>
         <p:spPr>
           <a:xfrm>
-            <a:off x="640080" y="5608320"/>
-            <a:ext cx="10881360" cy="746760"/>
+            <a:off x="640080" y="5529072"/>
+            <a:ext cx="10881360" cy="908304"/>
           </a:xfrm>
           <a:prstGeom prst="rect">
             <a:avLst/>
@@ -31089,8 +31089,8 @@
         </p:nvSpPr>
         <p:spPr>
           <a:xfrm>
-            <a:off x="457200" y="1920240"/>
-            <a:ext cx="11247120" cy="1280160"/>
+            <a:off x="457200" y="1828800"/>
+            <a:ext cx="11247120" cy="1371600"/>
           </a:xfrm>
           <a:prstGeom prst="rect">
             <a:avLst/>
@@ -31131,8 +31131,8 @@
         </p:nvSpPr>
         <p:spPr>
           <a:xfrm>
-            <a:off x="457200" y="2011680"/>
-            <a:ext cx="11247120" cy="822960"/>
+            <a:off x="457200" y="1874519"/>
+            <a:ext cx="11247120" cy="868680"/>
           </a:xfrm>
           <a:prstGeom prst="rect">
             <a:avLst/>
@@ -31147,7 +31147,7 @@
           <a:p>
             <a:pPr algn="ctr"/>
             <a:r>
-              <a:rPr sz="4000" b="1">
+              <a:rPr sz="3800" b="1">
                 <a:solidFill>
                   <a:srgbClr val="1F2A44"/>
                 </a:solidFill>
@@ -31166,16 +31166,16 @@
         </p:nvSpPr>
         <p:spPr>
           <a:xfrm>
-            <a:off x="457200" y="2788920"/>
-            <a:ext cx="11247120" cy="365760"/>
-          </a:xfrm>
-          <a:prstGeom prst="rect">
-            <a:avLst/>
-          </a:prstGeom>
-          <a:noFill/>
-        </p:spPr>
-        <p:txBody>
-          <a:bodyPr wrap="square" lIns="45720" rIns="45720" tIns="18288" bIns="18288" anchor="t">
+            <a:off x="457200" y="2743200"/>
+            <a:ext cx="11247120" cy="411480"/>
+          </a:xfrm>
+          <a:prstGeom prst="rect">
+            <a:avLst/>
+          </a:prstGeom>
+          <a:noFill/>
+        </p:spPr>
+        <p:txBody>
+          <a:bodyPr wrap="square" lIns="45720" rIns="45720" tIns="18288" bIns="18288" anchor="ctr">
             <a:spAutoFit/>
           </a:bodyPr>
           <a:lstStyle/>
@@ -31201,8 +31201,8 @@
         </p:nvSpPr>
         <p:spPr>
           <a:xfrm>
-            <a:off x="457200" y="3383280"/>
-            <a:ext cx="11247120" cy="960120"/>
+            <a:off x="457200" y="3291840"/>
+            <a:ext cx="11247120" cy="1005840"/>
           </a:xfrm>
           <a:prstGeom prst="rect">
             <a:avLst/>
@@ -31243,7 +31243,7 @@
         </p:nvSpPr>
         <p:spPr>
           <a:xfrm>
-            <a:off x="594360" y="3474720"/>
+            <a:off x="594360" y="3383280"/>
             <a:ext cx="2011680" cy="365760"/>
           </a:xfrm>
           <a:prstGeom prst="rect">
@@ -31278,8 +31278,8 @@
         </p:nvSpPr>
         <p:spPr>
           <a:xfrm>
-            <a:off x="2651760" y="3474720"/>
-            <a:ext cx="9418320" cy="777240"/>
+            <a:off x="2651760" y="3364992"/>
+            <a:ext cx="9418320" cy="868680"/>
           </a:xfrm>
           <a:prstGeom prst="rect">
             <a:avLst/>
@@ -31313,8 +31313,8 @@
         </p:nvSpPr>
         <p:spPr>
           <a:xfrm>
-            <a:off x="457200" y="4453128"/>
-            <a:ext cx="11247120" cy="960120"/>
+            <a:off x="457200" y="4343400"/>
+            <a:ext cx="11247120" cy="1005840"/>
           </a:xfrm>
           <a:prstGeom prst="rect">
             <a:avLst/>
@@ -31355,7 +31355,7 @@
         </p:nvSpPr>
         <p:spPr>
           <a:xfrm>
-            <a:off x="594360" y="4544568"/>
+            <a:off x="594360" y="4434840"/>
             <a:ext cx="2011680" cy="365760"/>
           </a:xfrm>
           <a:prstGeom prst="rect">
@@ -31390,8 +31390,8 @@
         </p:nvSpPr>
         <p:spPr>
           <a:xfrm>
-            <a:off x="2651760" y="4544568"/>
-            <a:ext cx="9418320" cy="777240"/>
+            <a:off x="2651760" y="4416552"/>
+            <a:ext cx="9418320" cy="868680"/>
           </a:xfrm>
           <a:prstGeom prst="rect">
             <a:avLst/>
@@ -31425,8 +31425,8 @@
         </p:nvSpPr>
         <p:spPr>
           <a:xfrm>
-            <a:off x="457200" y="5522976"/>
-            <a:ext cx="11247120" cy="960120"/>
+            <a:off x="457200" y="5394960"/>
+            <a:ext cx="11247120" cy="1005840"/>
           </a:xfrm>
           <a:prstGeom prst="rect">
             <a:avLst/>
@@ -31467,7 +31467,7 @@
         </p:nvSpPr>
         <p:spPr>
           <a:xfrm>
-            <a:off x="594360" y="5614416"/>
+            <a:off x="594360" y="5486400"/>
             <a:ext cx="2011680" cy="365760"/>
           </a:xfrm>
           <a:prstGeom prst="rect">
@@ -31502,8 +31502,8 @@
         </p:nvSpPr>
         <p:spPr>
           <a:xfrm>
-            <a:off x="2651760" y="5614416"/>
-            <a:ext cx="9418320" cy="777240"/>
+            <a:off x="2651760" y="5468112"/>
+            <a:ext cx="9418320" cy="868680"/>
           </a:xfrm>
           <a:prstGeom prst="rect">
             <a:avLst/>
@@ -31695,8 +31695,8 @@
         </p:nvSpPr>
         <p:spPr>
           <a:xfrm>
-            <a:off x="457200" y="1920240"/>
-            <a:ext cx="11247120" cy="1280160"/>
+            <a:off x="457200" y="1828800"/>
+            <a:ext cx="11247120" cy="1371600"/>
           </a:xfrm>
           <a:prstGeom prst="rect">
             <a:avLst/>
@@ -31737,8 +31737,8 @@
         </p:nvSpPr>
         <p:spPr>
           <a:xfrm>
-            <a:off x="457200" y="2011680"/>
-            <a:ext cx="11247120" cy="822960"/>
+            <a:off x="457200" y="1874519"/>
+            <a:ext cx="11247120" cy="868680"/>
           </a:xfrm>
           <a:prstGeom prst="rect">
             <a:avLst/>
@@ -31753,7 +31753,7 @@
           <a:p>
             <a:pPr algn="ctr"/>
             <a:r>
-              <a:rPr sz="4000" b="1">
+              <a:rPr sz="3800" b="1">
                 <a:solidFill>
                   <a:srgbClr val="1F2A44"/>
                 </a:solidFill>
@@ -31772,16 +31772,16 @@
         </p:nvSpPr>
         <p:spPr>
           <a:xfrm>
-            <a:off x="457200" y="2788920"/>
-            <a:ext cx="11247120" cy="365760"/>
-          </a:xfrm>
-          <a:prstGeom prst="rect">
-            <a:avLst/>
-          </a:prstGeom>
-          <a:noFill/>
-        </p:spPr>
-        <p:txBody>
-          <a:bodyPr wrap="square" lIns="45720" rIns="45720" tIns="18288" bIns="18288" anchor="t">
+            <a:off x="457200" y="2743200"/>
+            <a:ext cx="11247120" cy="411480"/>
+          </a:xfrm>
+          <a:prstGeom prst="rect">
+            <a:avLst/>
+          </a:prstGeom>
+          <a:noFill/>
+        </p:spPr>
+        <p:txBody>
+          <a:bodyPr wrap="square" lIns="45720" rIns="45720" tIns="18288" bIns="18288" anchor="ctr">
             <a:spAutoFit/>
           </a:bodyPr>
           <a:lstStyle/>
@@ -31807,8 +31807,8 @@
         </p:nvSpPr>
         <p:spPr>
           <a:xfrm>
-            <a:off x="457200" y="3383280"/>
-            <a:ext cx="11247120" cy="960120"/>
+            <a:off x="457200" y="3291840"/>
+            <a:ext cx="11247120" cy="1005840"/>
           </a:xfrm>
           <a:prstGeom prst="rect">
             <a:avLst/>
@@ -31849,7 +31849,7 @@
         </p:nvSpPr>
         <p:spPr>
           <a:xfrm>
-            <a:off x="594360" y="3474720"/>
+            <a:off x="594360" y="3383280"/>
             <a:ext cx="2011680" cy="365760"/>
           </a:xfrm>
           <a:prstGeom prst="rect">
@@ -31884,8 +31884,8 @@
         </p:nvSpPr>
         <p:spPr>
           <a:xfrm>
-            <a:off x="2651760" y="3474720"/>
-            <a:ext cx="9418320" cy="777240"/>
+            <a:off x="2651760" y="3364992"/>
+            <a:ext cx="9418320" cy="868680"/>
           </a:xfrm>
           <a:prstGeom prst="rect">
             <a:avLst/>
@@ -31919,8 +31919,8 @@
         </p:nvSpPr>
         <p:spPr>
           <a:xfrm>
-            <a:off x="457200" y="4453128"/>
-            <a:ext cx="11247120" cy="960120"/>
+            <a:off x="457200" y="4343400"/>
+            <a:ext cx="11247120" cy="1005840"/>
           </a:xfrm>
           <a:prstGeom prst="rect">
             <a:avLst/>
@@ -31961,7 +31961,7 @@
         </p:nvSpPr>
         <p:spPr>
           <a:xfrm>
-            <a:off x="594360" y="4544568"/>
+            <a:off x="594360" y="4434840"/>
             <a:ext cx="2011680" cy="365760"/>
           </a:xfrm>
           <a:prstGeom prst="rect">
@@ -31996,8 +31996,8 @@
         </p:nvSpPr>
         <p:spPr>
           <a:xfrm>
-            <a:off x="2651760" y="4544568"/>
-            <a:ext cx="9418320" cy="777240"/>
+            <a:off x="2651760" y="4416552"/>
+            <a:ext cx="9418320" cy="868680"/>
           </a:xfrm>
           <a:prstGeom prst="rect">
             <a:avLst/>
@@ -32031,8 +32031,8 @@
         </p:nvSpPr>
         <p:spPr>
           <a:xfrm>
-            <a:off x="457200" y="5522976"/>
-            <a:ext cx="11247120" cy="960120"/>
+            <a:off x="457200" y="5394960"/>
+            <a:ext cx="11247120" cy="1005840"/>
           </a:xfrm>
           <a:prstGeom prst="rect">
             <a:avLst/>
@@ -32073,7 +32073,7 @@
         </p:nvSpPr>
         <p:spPr>
           <a:xfrm>
-            <a:off x="594360" y="5614416"/>
+            <a:off x="594360" y="5486400"/>
             <a:ext cx="2011680" cy="365760"/>
           </a:xfrm>
           <a:prstGeom prst="rect">
@@ -32108,8 +32108,8 @@
         </p:nvSpPr>
         <p:spPr>
           <a:xfrm>
-            <a:off x="2651760" y="5614416"/>
-            <a:ext cx="9418320" cy="777240"/>
+            <a:off x="2651760" y="5468112"/>
+            <a:ext cx="9418320" cy="868680"/>
           </a:xfrm>
           <a:prstGeom prst="rect">
             <a:avLst/>
@@ -32301,8 +32301,8 @@
         </p:nvSpPr>
         <p:spPr>
           <a:xfrm>
-            <a:off x="457200" y="1920240"/>
-            <a:ext cx="11247120" cy="1280160"/>
+            <a:off x="457200" y="1828800"/>
+            <a:ext cx="11247120" cy="1371600"/>
           </a:xfrm>
           <a:prstGeom prst="rect">
             <a:avLst/>
@@ -32343,8 +32343,8 @@
         </p:nvSpPr>
         <p:spPr>
           <a:xfrm>
-            <a:off x="457200" y="2011680"/>
-            <a:ext cx="11247120" cy="822960"/>
+            <a:off x="457200" y="1874519"/>
+            <a:ext cx="11247120" cy="868680"/>
           </a:xfrm>
           <a:prstGeom prst="rect">
             <a:avLst/>
@@ -32359,7 +32359,7 @@
           <a:p>
             <a:pPr algn="ctr"/>
             <a:r>
-              <a:rPr sz="4000" b="1">
+              <a:rPr sz="3800" b="1">
                 <a:solidFill>
                   <a:srgbClr val="1F2A44"/>
                 </a:solidFill>
@@ -32378,16 +32378,16 @@
         </p:nvSpPr>
         <p:spPr>
           <a:xfrm>
-            <a:off x="457200" y="2788920"/>
-            <a:ext cx="11247120" cy="365760"/>
-          </a:xfrm>
-          <a:prstGeom prst="rect">
-            <a:avLst/>
-          </a:prstGeom>
-          <a:noFill/>
-        </p:spPr>
-        <p:txBody>
-          <a:bodyPr wrap="square" lIns="45720" rIns="45720" tIns="18288" bIns="18288" anchor="t">
+            <a:off x="457200" y="2743200"/>
+            <a:ext cx="11247120" cy="411480"/>
+          </a:xfrm>
+          <a:prstGeom prst="rect">
+            <a:avLst/>
+          </a:prstGeom>
+          <a:noFill/>
+        </p:spPr>
+        <p:txBody>
+          <a:bodyPr wrap="square" lIns="45720" rIns="45720" tIns="18288" bIns="18288" anchor="ctr">
             <a:spAutoFit/>
           </a:bodyPr>
           <a:lstStyle/>
@@ -32413,8 +32413,8 @@
         </p:nvSpPr>
         <p:spPr>
           <a:xfrm>
-            <a:off x="457200" y="3383280"/>
-            <a:ext cx="11247120" cy="960120"/>
+            <a:off x="457200" y="3291840"/>
+            <a:ext cx="11247120" cy="1005840"/>
           </a:xfrm>
           <a:prstGeom prst="rect">
             <a:avLst/>
@@ -32455,7 +32455,7 @@
         </p:nvSpPr>
         <p:spPr>
           <a:xfrm>
-            <a:off x="594360" y="3474720"/>
+            <a:off x="594360" y="3383280"/>
             <a:ext cx="2011680" cy="365760"/>
           </a:xfrm>
           <a:prstGeom prst="rect">
@@ -32490,8 +32490,8 @@
         </p:nvSpPr>
         <p:spPr>
           <a:xfrm>
-            <a:off x="2651760" y="3474720"/>
-            <a:ext cx="9418320" cy="777240"/>
+            <a:off x="2651760" y="3364992"/>
+            <a:ext cx="9418320" cy="868680"/>
           </a:xfrm>
           <a:prstGeom prst="rect">
             <a:avLst/>
@@ -32525,8 +32525,8 @@
         </p:nvSpPr>
         <p:spPr>
           <a:xfrm>
-            <a:off x="457200" y="4453128"/>
-            <a:ext cx="11247120" cy="960120"/>
+            <a:off x="457200" y="4343400"/>
+            <a:ext cx="11247120" cy="1005840"/>
           </a:xfrm>
           <a:prstGeom prst="rect">
             <a:avLst/>
@@ -32567,7 +32567,7 @@
         </p:nvSpPr>
         <p:spPr>
           <a:xfrm>
-            <a:off x="594360" y="4544568"/>
+            <a:off x="594360" y="4434840"/>
             <a:ext cx="2011680" cy="365760"/>
           </a:xfrm>
           <a:prstGeom prst="rect">
@@ -32602,8 +32602,8 @@
         </p:nvSpPr>
         <p:spPr>
           <a:xfrm>
-            <a:off x="2651760" y="4544568"/>
-            <a:ext cx="9418320" cy="777240"/>
+            <a:off x="2651760" y="4416552"/>
+            <a:ext cx="9418320" cy="868680"/>
           </a:xfrm>
           <a:prstGeom prst="rect">
             <a:avLst/>
@@ -32637,8 +32637,8 @@
         </p:nvSpPr>
         <p:spPr>
           <a:xfrm>
-            <a:off x="457200" y="5522976"/>
-            <a:ext cx="11247120" cy="960120"/>
+            <a:off x="457200" y="5394960"/>
+            <a:ext cx="11247120" cy="1005840"/>
           </a:xfrm>
           <a:prstGeom prst="rect">
             <a:avLst/>
@@ -32679,7 +32679,7 @@
         </p:nvSpPr>
         <p:spPr>
           <a:xfrm>
-            <a:off x="594360" y="5614416"/>
+            <a:off x="594360" y="5486400"/>
             <a:ext cx="2011680" cy="365760"/>
           </a:xfrm>
           <a:prstGeom prst="rect">
@@ -32714,8 +32714,8 @@
         </p:nvSpPr>
         <p:spPr>
           <a:xfrm>
-            <a:off x="2651760" y="5614416"/>
-            <a:ext cx="9418320" cy="777240"/>
+            <a:off x="2651760" y="5468112"/>
+            <a:ext cx="9418320" cy="868680"/>
           </a:xfrm>
           <a:prstGeom prst="rect">
             <a:avLst/>
@@ -32907,8 +32907,8 @@
         </p:nvSpPr>
         <p:spPr>
           <a:xfrm>
-            <a:off x="457200" y="1920240"/>
-            <a:ext cx="11247120" cy="1280160"/>
+            <a:off x="457200" y="1828800"/>
+            <a:ext cx="11247120" cy="1371600"/>
           </a:xfrm>
           <a:prstGeom prst="rect">
             <a:avLst/>
@@ -32949,8 +32949,8 @@
         </p:nvSpPr>
         <p:spPr>
           <a:xfrm>
-            <a:off x="457200" y="2011680"/>
-            <a:ext cx="11247120" cy="822960"/>
+            <a:off x="457200" y="1874519"/>
+            <a:ext cx="11247120" cy="868680"/>
           </a:xfrm>
           <a:prstGeom prst="rect">
             <a:avLst/>
@@ -32965,7 +32965,7 @@
           <a:p>
             <a:pPr algn="ctr"/>
             <a:r>
-              <a:rPr sz="4000" b="1">
+              <a:rPr sz="3800" b="1">
                 <a:solidFill>
                   <a:srgbClr val="1F2A44"/>
                 </a:solidFill>
@@ -32984,16 +32984,16 @@
         </p:nvSpPr>
         <p:spPr>
           <a:xfrm>
-            <a:off x="457200" y="2788920"/>
-            <a:ext cx="11247120" cy="365760"/>
-          </a:xfrm>
-          <a:prstGeom prst="rect">
-            <a:avLst/>
-          </a:prstGeom>
-          <a:noFill/>
-        </p:spPr>
-        <p:txBody>
-          <a:bodyPr wrap="square" lIns="45720" rIns="45720" tIns="18288" bIns="18288" anchor="t">
+            <a:off x="457200" y="2743200"/>
+            <a:ext cx="11247120" cy="411480"/>
+          </a:xfrm>
+          <a:prstGeom prst="rect">
+            <a:avLst/>
+          </a:prstGeom>
+          <a:noFill/>
+        </p:spPr>
+        <p:txBody>
+          <a:bodyPr wrap="square" lIns="45720" rIns="45720" tIns="18288" bIns="18288" anchor="ctr">
             <a:spAutoFit/>
           </a:bodyPr>
           <a:lstStyle/>
@@ -33019,8 +33019,8 @@
         </p:nvSpPr>
         <p:spPr>
           <a:xfrm>
-            <a:off x="457200" y="3383280"/>
-            <a:ext cx="11247120" cy="960120"/>
+            <a:off x="457200" y="3291840"/>
+            <a:ext cx="11247120" cy="1005840"/>
           </a:xfrm>
           <a:prstGeom prst="rect">
             <a:avLst/>
@@ -33061,7 +33061,7 @@
         </p:nvSpPr>
         <p:spPr>
           <a:xfrm>
-            <a:off x="594360" y="3474720"/>
+            <a:off x="594360" y="3383280"/>
             <a:ext cx="2011680" cy="365760"/>
           </a:xfrm>
           <a:prstGeom prst="rect">
@@ -33096,8 +33096,8 @@
         </p:nvSpPr>
         <p:spPr>
           <a:xfrm>
-            <a:off x="2651760" y="3474720"/>
-            <a:ext cx="9418320" cy="777240"/>
+            <a:off x="2651760" y="3364992"/>
+            <a:ext cx="9418320" cy="868680"/>
           </a:xfrm>
           <a:prstGeom prst="rect">
             <a:avLst/>
@@ -33131,8 +33131,8 @@
         </p:nvSpPr>
         <p:spPr>
           <a:xfrm>
-            <a:off x="457200" y="4453128"/>
-            <a:ext cx="11247120" cy="960120"/>
+            <a:off x="457200" y="4343400"/>
+            <a:ext cx="11247120" cy="1005840"/>
           </a:xfrm>
           <a:prstGeom prst="rect">
             <a:avLst/>
@@ -33173,7 +33173,7 @@
         </p:nvSpPr>
         <p:spPr>
           <a:xfrm>
-            <a:off x="594360" y="4544568"/>
+            <a:off x="594360" y="4434840"/>
             <a:ext cx="2011680" cy="365760"/>
           </a:xfrm>
           <a:prstGeom prst="rect">
@@ -33208,8 +33208,8 @@
         </p:nvSpPr>
         <p:spPr>
           <a:xfrm>
-            <a:off x="2651760" y="4544568"/>
-            <a:ext cx="9418320" cy="777240"/>
+            <a:off x="2651760" y="4416552"/>
+            <a:ext cx="9418320" cy="868680"/>
           </a:xfrm>
           <a:prstGeom prst="rect">
             <a:avLst/>
@@ -33243,8 +33243,8 @@
         </p:nvSpPr>
         <p:spPr>
           <a:xfrm>
-            <a:off x="457200" y="5522976"/>
-            <a:ext cx="11247120" cy="960120"/>
+            <a:off x="457200" y="5394960"/>
+            <a:ext cx="11247120" cy="1005840"/>
           </a:xfrm>
           <a:prstGeom prst="rect">
             <a:avLst/>
@@ -33285,7 +33285,7 @@
         </p:nvSpPr>
         <p:spPr>
           <a:xfrm>
-            <a:off x="594360" y="5614416"/>
+            <a:off x="594360" y="5486400"/>
             <a:ext cx="2011680" cy="365760"/>
           </a:xfrm>
           <a:prstGeom prst="rect">
@@ -33320,8 +33320,8 @@
         </p:nvSpPr>
         <p:spPr>
           <a:xfrm>
-            <a:off x="2651760" y="5614416"/>
-            <a:ext cx="9418320" cy="777240"/>
+            <a:off x="2651760" y="5468112"/>
+            <a:ext cx="9418320" cy="868680"/>
           </a:xfrm>
           <a:prstGeom prst="rect">
             <a:avLst/>
@@ -33513,8 +33513,8 @@
         </p:nvSpPr>
         <p:spPr>
           <a:xfrm>
-            <a:off x="457200" y="1920240"/>
-            <a:ext cx="11247120" cy="1280160"/>
+            <a:off x="457200" y="1828800"/>
+            <a:ext cx="11247120" cy="1371600"/>
           </a:xfrm>
           <a:prstGeom prst="rect">
             <a:avLst/>
@@ -33555,8 +33555,8 @@
         </p:nvSpPr>
         <p:spPr>
           <a:xfrm>
-            <a:off x="457200" y="2011680"/>
-            <a:ext cx="11247120" cy="822960"/>
+            <a:off x="457200" y="1874519"/>
+            <a:ext cx="11247120" cy="868680"/>
           </a:xfrm>
           <a:prstGeom prst="rect">
             <a:avLst/>
@@ -33571,7 +33571,7 @@
           <a:p>
             <a:pPr algn="ctr"/>
             <a:r>
-              <a:rPr sz="4000" b="1">
+              <a:rPr sz="3800" b="1">
                 <a:solidFill>
                   <a:srgbClr val="1F2A44"/>
                 </a:solidFill>
@@ -33590,16 +33590,16 @@
         </p:nvSpPr>
         <p:spPr>
           <a:xfrm>
-            <a:off x="457200" y="2788920"/>
-            <a:ext cx="11247120" cy="365760"/>
-          </a:xfrm>
-          <a:prstGeom prst="rect">
-            <a:avLst/>
-          </a:prstGeom>
-          <a:noFill/>
-        </p:spPr>
-        <p:txBody>
-          <a:bodyPr wrap="square" lIns="45720" rIns="45720" tIns="18288" bIns="18288" anchor="t">
+            <a:off x="457200" y="2743200"/>
+            <a:ext cx="11247120" cy="411480"/>
+          </a:xfrm>
+          <a:prstGeom prst="rect">
+            <a:avLst/>
+          </a:prstGeom>
+          <a:noFill/>
+        </p:spPr>
+        <p:txBody>
+          <a:bodyPr wrap="square" lIns="45720" rIns="45720" tIns="18288" bIns="18288" anchor="ctr">
             <a:spAutoFit/>
           </a:bodyPr>
           <a:lstStyle/>
@@ -33625,8 +33625,8 @@
         </p:nvSpPr>
         <p:spPr>
           <a:xfrm>
-            <a:off x="457200" y="3383280"/>
-            <a:ext cx="11247120" cy="960120"/>
+            <a:off x="457200" y="3291840"/>
+            <a:ext cx="11247120" cy="1005840"/>
           </a:xfrm>
           <a:prstGeom prst="rect">
             <a:avLst/>
@@ -33667,7 +33667,7 @@
         </p:nvSpPr>
         <p:spPr>
           <a:xfrm>
-            <a:off x="594360" y="3474720"/>
+            <a:off x="594360" y="3383280"/>
             <a:ext cx="2011680" cy="365760"/>
           </a:xfrm>
           <a:prstGeom prst="rect">
@@ -33702,8 +33702,8 @@
         </p:nvSpPr>
         <p:spPr>
           <a:xfrm>
-            <a:off x="2651760" y="3474720"/>
-            <a:ext cx="9418320" cy="777240"/>
+            <a:off x="2651760" y="3364992"/>
+            <a:ext cx="9418320" cy="868680"/>
           </a:xfrm>
           <a:prstGeom prst="rect">
             <a:avLst/>
@@ -33737,8 +33737,8 @@
         </p:nvSpPr>
         <p:spPr>
           <a:xfrm>
-            <a:off x="457200" y="4453128"/>
-            <a:ext cx="11247120" cy="960120"/>
+            <a:off x="457200" y="4343400"/>
+            <a:ext cx="11247120" cy="1005840"/>
           </a:xfrm>
           <a:prstGeom prst="rect">
             <a:avLst/>
@@ -33779,7 +33779,7 @@
         </p:nvSpPr>
         <p:spPr>
           <a:xfrm>
-            <a:off x="594360" y="4544568"/>
+            <a:off x="594360" y="4434840"/>
             <a:ext cx="2011680" cy="365760"/>
           </a:xfrm>
           <a:prstGeom prst="rect">
@@ -33814,8 +33814,8 @@
         </p:nvSpPr>
         <p:spPr>
           <a:xfrm>
-            <a:off x="2651760" y="4544568"/>
-            <a:ext cx="9418320" cy="777240"/>
+            <a:off x="2651760" y="4416552"/>
+            <a:ext cx="9418320" cy="868680"/>
           </a:xfrm>
           <a:prstGeom prst="rect">
             <a:avLst/>
@@ -33849,8 +33849,8 @@
         </p:nvSpPr>
         <p:spPr>
           <a:xfrm>
-            <a:off x="457200" y="5522976"/>
-            <a:ext cx="11247120" cy="960120"/>
+            <a:off x="457200" y="5394960"/>
+            <a:ext cx="11247120" cy="1005840"/>
           </a:xfrm>
           <a:prstGeom prst="rect">
             <a:avLst/>
@@ -33891,7 +33891,7 @@
         </p:nvSpPr>
         <p:spPr>
           <a:xfrm>
-            <a:off x="594360" y="5614416"/>
+            <a:off x="594360" y="5486400"/>
             <a:ext cx="2011680" cy="365760"/>
           </a:xfrm>
           <a:prstGeom prst="rect">
@@ -33926,8 +33926,8 @@
         </p:nvSpPr>
         <p:spPr>
           <a:xfrm>
-            <a:off x="2651760" y="5614416"/>
-            <a:ext cx="9418320" cy="777240"/>
+            <a:off x="2651760" y="5468112"/>
+            <a:ext cx="9418320" cy="868680"/>
           </a:xfrm>
           <a:prstGeom prst="rect">
             <a:avLst/>
@@ -34119,8 +34119,8 @@
         </p:nvSpPr>
         <p:spPr>
           <a:xfrm>
-            <a:off x="457200" y="1920240"/>
-            <a:ext cx="11247120" cy="1280160"/>
+            <a:off x="457200" y="1828800"/>
+            <a:ext cx="11247120" cy="1371600"/>
           </a:xfrm>
           <a:prstGeom prst="rect">
             <a:avLst/>
@@ -34161,8 +34161,8 @@
         </p:nvSpPr>
         <p:spPr>
           <a:xfrm>
-            <a:off x="457200" y="2011680"/>
-            <a:ext cx="11247120" cy="822960"/>
+            <a:off x="457200" y="1874519"/>
+            <a:ext cx="11247120" cy="868680"/>
           </a:xfrm>
           <a:prstGeom prst="rect">
             <a:avLst/>
@@ -34177,7 +34177,7 @@
           <a:p>
             <a:pPr algn="ctr"/>
             <a:r>
-              <a:rPr sz="4000" b="1">
+              <a:rPr sz="3800" b="1">
                 <a:solidFill>
                   <a:srgbClr val="1F2A44"/>
                 </a:solidFill>
@@ -34196,16 +34196,16 @@
         </p:nvSpPr>
         <p:spPr>
           <a:xfrm>
-            <a:off x="457200" y="2788920"/>
-            <a:ext cx="11247120" cy="365760"/>
-          </a:xfrm>
-          <a:prstGeom prst="rect">
-            <a:avLst/>
-          </a:prstGeom>
-          <a:noFill/>
-        </p:spPr>
-        <p:txBody>
-          <a:bodyPr wrap="square" lIns="45720" rIns="45720" tIns="18288" bIns="18288" anchor="t">
+            <a:off x="457200" y="2743200"/>
+            <a:ext cx="11247120" cy="411480"/>
+          </a:xfrm>
+          <a:prstGeom prst="rect">
+            <a:avLst/>
+          </a:prstGeom>
+          <a:noFill/>
+        </p:spPr>
+        <p:txBody>
+          <a:bodyPr wrap="square" lIns="45720" rIns="45720" tIns="18288" bIns="18288" anchor="ctr">
             <a:spAutoFit/>
           </a:bodyPr>
           <a:lstStyle/>
@@ -34231,8 +34231,8 @@
         </p:nvSpPr>
         <p:spPr>
           <a:xfrm>
-            <a:off x="457200" y="3383280"/>
-            <a:ext cx="11247120" cy="960120"/>
+            <a:off x="457200" y="3291840"/>
+            <a:ext cx="11247120" cy="1005840"/>
           </a:xfrm>
           <a:prstGeom prst="rect">
             <a:avLst/>
@@ -34273,7 +34273,7 @@
         </p:nvSpPr>
         <p:spPr>
           <a:xfrm>
-            <a:off x="594360" y="3474720"/>
+            <a:off x="594360" y="3383280"/>
             <a:ext cx="2011680" cy="365760"/>
           </a:xfrm>
           <a:prstGeom prst="rect">
@@ -34308,8 +34308,8 @@
         </p:nvSpPr>
         <p:spPr>
           <a:xfrm>
-            <a:off x="2651760" y="3474720"/>
-            <a:ext cx="9418320" cy="777240"/>
+            <a:off x="2651760" y="3364992"/>
+            <a:ext cx="9418320" cy="868680"/>
           </a:xfrm>
           <a:prstGeom prst="rect">
             <a:avLst/>
@@ -34343,8 +34343,8 @@
         </p:nvSpPr>
         <p:spPr>
           <a:xfrm>
-            <a:off x="457200" y="4453128"/>
-            <a:ext cx="11247120" cy="960120"/>
+            <a:off x="457200" y="4343400"/>
+            <a:ext cx="11247120" cy="1005840"/>
           </a:xfrm>
           <a:prstGeom prst="rect">
             <a:avLst/>
@@ -34385,7 +34385,7 @@
         </p:nvSpPr>
         <p:spPr>
           <a:xfrm>
-            <a:off x="594360" y="4544568"/>
+            <a:off x="594360" y="4434840"/>
             <a:ext cx="2011680" cy="365760"/>
           </a:xfrm>
           <a:prstGeom prst="rect">
@@ -34420,8 +34420,8 @@
         </p:nvSpPr>
         <p:spPr>
           <a:xfrm>
-            <a:off x="2651760" y="4544568"/>
-            <a:ext cx="9418320" cy="777240"/>
+            <a:off x="2651760" y="4416552"/>
+            <a:ext cx="9418320" cy="868680"/>
           </a:xfrm>
           <a:prstGeom prst="rect">
             <a:avLst/>
@@ -34455,8 +34455,8 @@
         </p:nvSpPr>
         <p:spPr>
           <a:xfrm>
-            <a:off x="457200" y="5522976"/>
-            <a:ext cx="11247120" cy="960120"/>
+            <a:off x="457200" y="5394960"/>
+            <a:ext cx="11247120" cy="1005840"/>
           </a:xfrm>
           <a:prstGeom prst="rect">
             <a:avLst/>
@@ -34497,7 +34497,7 @@
         </p:nvSpPr>
         <p:spPr>
           <a:xfrm>
-            <a:off x="594360" y="5614416"/>
+            <a:off x="594360" y="5486400"/>
             <a:ext cx="2011680" cy="365760"/>
           </a:xfrm>
           <a:prstGeom prst="rect">
@@ -34532,8 +34532,8 @@
         </p:nvSpPr>
         <p:spPr>
           <a:xfrm>
-            <a:off x="2651760" y="5614416"/>
-            <a:ext cx="9418320" cy="777240"/>
+            <a:off x="2651760" y="5468112"/>
+            <a:ext cx="9418320" cy="868680"/>
           </a:xfrm>
           <a:prstGeom prst="rect">
             <a:avLst/>
@@ -34725,8 +34725,8 @@
         </p:nvSpPr>
         <p:spPr>
           <a:xfrm>
-            <a:off x="457200" y="1920240"/>
-            <a:ext cx="11247120" cy="1280160"/>
+            <a:off x="457200" y="1828800"/>
+            <a:ext cx="11247120" cy="1371600"/>
           </a:xfrm>
           <a:prstGeom prst="rect">
             <a:avLst/>
@@ -34767,8 +34767,8 @@
         </p:nvSpPr>
         <p:spPr>
           <a:xfrm>
-            <a:off x="457200" y="2011680"/>
-            <a:ext cx="11247120" cy="822960"/>
+            <a:off x="457200" y="1874519"/>
+            <a:ext cx="11247120" cy="868680"/>
           </a:xfrm>
           <a:prstGeom prst="rect">
             <a:avLst/>
@@ -34783,7 +34783,7 @@
           <a:p>
             <a:pPr algn="ctr"/>
             <a:r>
-              <a:rPr sz="4000" b="1">
+              <a:rPr sz="3800" b="1">
                 <a:solidFill>
                   <a:srgbClr val="1F2A44"/>
                 </a:solidFill>
@@ -34802,16 +34802,16 @@
         </p:nvSpPr>
         <p:spPr>
           <a:xfrm>
-            <a:off x="457200" y="2788920"/>
-            <a:ext cx="11247120" cy="365760"/>
-          </a:xfrm>
-          <a:prstGeom prst="rect">
-            <a:avLst/>
-          </a:prstGeom>
-          <a:noFill/>
-        </p:spPr>
-        <p:txBody>
-          <a:bodyPr wrap="square" lIns="45720" rIns="45720" tIns="18288" bIns="18288" anchor="t">
+            <a:off x="457200" y="2743200"/>
+            <a:ext cx="11247120" cy="411480"/>
+          </a:xfrm>
+          <a:prstGeom prst="rect">
+            <a:avLst/>
+          </a:prstGeom>
+          <a:noFill/>
+        </p:spPr>
+        <p:txBody>
+          <a:bodyPr wrap="square" lIns="45720" rIns="45720" tIns="18288" bIns="18288" anchor="ctr">
             <a:spAutoFit/>
           </a:bodyPr>
           <a:lstStyle/>
@@ -34837,8 +34837,8 @@
         </p:nvSpPr>
         <p:spPr>
           <a:xfrm>
-            <a:off x="457200" y="3383280"/>
-            <a:ext cx="11247120" cy="960120"/>
+            <a:off x="457200" y="3291840"/>
+            <a:ext cx="11247120" cy="1005840"/>
           </a:xfrm>
           <a:prstGeom prst="rect">
             <a:avLst/>
@@ -34879,7 +34879,7 @@
         </p:nvSpPr>
         <p:spPr>
           <a:xfrm>
-            <a:off x="594360" y="3474720"/>
+            <a:off x="594360" y="3383280"/>
             <a:ext cx="2011680" cy="365760"/>
           </a:xfrm>
           <a:prstGeom prst="rect">
@@ -34914,8 +34914,8 @@
         </p:nvSpPr>
         <p:spPr>
           <a:xfrm>
-            <a:off x="2651760" y="3474720"/>
-            <a:ext cx="9418320" cy="777240"/>
+            <a:off x="2651760" y="3364992"/>
+            <a:ext cx="9418320" cy="868680"/>
           </a:xfrm>
           <a:prstGeom prst="rect">
             <a:avLst/>
@@ -34949,8 +34949,8 @@
         </p:nvSpPr>
         <p:spPr>
           <a:xfrm>
-            <a:off x="457200" y="4453128"/>
-            <a:ext cx="11247120" cy="960120"/>
+            <a:off x="457200" y="4343400"/>
+            <a:ext cx="11247120" cy="1005840"/>
           </a:xfrm>
           <a:prstGeom prst="rect">
             <a:avLst/>
@@ -34991,7 +34991,7 @@
         </p:nvSpPr>
         <p:spPr>
           <a:xfrm>
-            <a:off x="594360" y="4544568"/>
+            <a:off x="594360" y="4434840"/>
             <a:ext cx="2011680" cy="365760"/>
           </a:xfrm>
           <a:prstGeom prst="rect">
@@ -35026,8 +35026,8 @@
         </p:nvSpPr>
         <p:spPr>
           <a:xfrm>
-            <a:off x="2651760" y="4544568"/>
-            <a:ext cx="9418320" cy="777240"/>
+            <a:off x="2651760" y="4416552"/>
+            <a:ext cx="9418320" cy="868680"/>
           </a:xfrm>
           <a:prstGeom prst="rect">
             <a:avLst/>
@@ -35061,8 +35061,8 @@
         </p:nvSpPr>
         <p:spPr>
           <a:xfrm>
-            <a:off x="457200" y="5522976"/>
-            <a:ext cx="11247120" cy="960120"/>
+            <a:off x="457200" y="5394960"/>
+            <a:ext cx="11247120" cy="1005840"/>
           </a:xfrm>
           <a:prstGeom prst="rect">
             <a:avLst/>
@@ -35103,7 +35103,7 @@
         </p:nvSpPr>
         <p:spPr>
           <a:xfrm>
-            <a:off x="594360" y="5614416"/>
+            <a:off x="594360" y="5486400"/>
             <a:ext cx="2011680" cy="365760"/>
           </a:xfrm>
           <a:prstGeom prst="rect">
@@ -35138,8 +35138,8 @@
         </p:nvSpPr>
         <p:spPr>
           <a:xfrm>
-            <a:off x="2651760" y="5614416"/>
-            <a:ext cx="9418320" cy="777240"/>
+            <a:off x="2651760" y="5468112"/>
+            <a:ext cx="9418320" cy="868680"/>
           </a:xfrm>
           <a:prstGeom prst="rect">
             <a:avLst/>
@@ -35331,8 +35331,8 @@
         </p:nvSpPr>
         <p:spPr>
           <a:xfrm>
-            <a:off x="457200" y="2011680"/>
-            <a:ext cx="11247120" cy="1386840"/>
+            <a:off x="457200" y="1920240"/>
+            <a:ext cx="11247120" cy="1438656"/>
           </a:xfrm>
           <a:prstGeom prst="rect">
             <a:avLst/>
@@ -35373,8 +35373,8 @@
         </p:nvSpPr>
         <p:spPr>
           <a:xfrm>
-            <a:off x="640080" y="2103120"/>
-            <a:ext cx="10881360" cy="411480"/>
+            <a:off x="640080" y="1993392"/>
+            <a:ext cx="10881360" cy="384048"/>
           </a:xfrm>
           <a:prstGeom prst="rect">
             <a:avLst/>
@@ -35408,8 +35408,8 @@
         </p:nvSpPr>
         <p:spPr>
           <a:xfrm>
-            <a:off x="640080" y="2560320"/>
-            <a:ext cx="10881360" cy="746760"/>
+            <a:off x="640080" y="2395728"/>
+            <a:ext cx="10881360" cy="908304"/>
           </a:xfrm>
           <a:prstGeom prst="rect">
             <a:avLst/>
@@ -35467,8 +35467,8 @@
         </p:nvSpPr>
         <p:spPr>
           <a:xfrm>
-            <a:off x="457200" y="3535680"/>
-            <a:ext cx="11247120" cy="1386840"/>
+            <a:off x="457200" y="3486912"/>
+            <a:ext cx="11247120" cy="1438656"/>
           </a:xfrm>
           <a:prstGeom prst="rect">
             <a:avLst/>
@@ -35509,8 +35509,8 @@
         </p:nvSpPr>
         <p:spPr>
           <a:xfrm>
-            <a:off x="640080" y="3627120"/>
-            <a:ext cx="10881360" cy="411480"/>
+            <a:off x="640080" y="3560064"/>
+            <a:ext cx="10881360" cy="384048"/>
           </a:xfrm>
           <a:prstGeom prst="rect">
             <a:avLst/>
@@ -35544,8 +35544,8 @@
         </p:nvSpPr>
         <p:spPr>
           <a:xfrm>
-            <a:off x="640080" y="4084320"/>
-            <a:ext cx="10881360" cy="746760"/>
+            <a:off x="640080" y="3962400"/>
+            <a:ext cx="10881360" cy="908304"/>
           </a:xfrm>
           <a:prstGeom prst="rect">
             <a:avLst/>
@@ -35603,8 +35603,8 @@
         </p:nvSpPr>
         <p:spPr>
           <a:xfrm>
-            <a:off x="457200" y="5059680"/>
-            <a:ext cx="11247120" cy="1386840"/>
+            <a:off x="457200" y="5053584"/>
+            <a:ext cx="11247120" cy="1438656"/>
           </a:xfrm>
           <a:prstGeom prst="rect">
             <a:avLst/>
@@ -35645,8 +35645,8 @@
         </p:nvSpPr>
         <p:spPr>
           <a:xfrm>
-            <a:off x="640080" y="5151120"/>
-            <a:ext cx="10881360" cy="411480"/>
+            <a:off x="640080" y="5126736"/>
+            <a:ext cx="10881360" cy="384048"/>
           </a:xfrm>
           <a:prstGeom prst="rect">
             <a:avLst/>
@@ -35680,8 +35680,8 @@
         </p:nvSpPr>
         <p:spPr>
           <a:xfrm>
-            <a:off x="640080" y="5608320"/>
-            <a:ext cx="10881360" cy="746760"/>
+            <a:off x="640080" y="5529072"/>
+            <a:ext cx="10881360" cy="908304"/>
           </a:xfrm>
           <a:prstGeom prst="rect">
             <a:avLst/>
@@ -35897,8 +35897,8 @@
         </p:nvSpPr>
         <p:spPr>
           <a:xfrm>
-            <a:off x="457200" y="2011680"/>
-            <a:ext cx="11247120" cy="1386840"/>
+            <a:off x="457200" y="1920240"/>
+            <a:ext cx="11247120" cy="1438656"/>
           </a:xfrm>
           <a:prstGeom prst="rect">
             <a:avLst/>
@@ -35939,8 +35939,8 @@
         </p:nvSpPr>
         <p:spPr>
           <a:xfrm>
-            <a:off x="640080" y="2103120"/>
-            <a:ext cx="10881360" cy="411480"/>
+            <a:off x="640080" y="1993392"/>
+            <a:ext cx="10881360" cy="384048"/>
           </a:xfrm>
           <a:prstGeom prst="rect">
             <a:avLst/>
@@ -35974,8 +35974,8 @@
         </p:nvSpPr>
         <p:spPr>
           <a:xfrm>
-            <a:off x="640080" y="2560320"/>
-            <a:ext cx="10881360" cy="746760"/>
+            <a:off x="640080" y="2395728"/>
+            <a:ext cx="10881360" cy="908304"/>
           </a:xfrm>
           <a:prstGeom prst="rect">
             <a:avLst/>
@@ -36033,8 +36033,8 @@
         </p:nvSpPr>
         <p:spPr>
           <a:xfrm>
-            <a:off x="457200" y="3535680"/>
-            <a:ext cx="11247120" cy="1386840"/>
+            <a:off x="457200" y="3486912"/>
+            <a:ext cx="11247120" cy="1438656"/>
           </a:xfrm>
           <a:prstGeom prst="rect">
             <a:avLst/>
@@ -36075,8 +36075,8 @@
         </p:nvSpPr>
         <p:spPr>
           <a:xfrm>
-            <a:off x="640080" y="3627120"/>
-            <a:ext cx="10881360" cy="411480"/>
+            <a:off x="640080" y="3560064"/>
+            <a:ext cx="10881360" cy="384048"/>
           </a:xfrm>
           <a:prstGeom prst="rect">
             <a:avLst/>
@@ -36110,8 +36110,8 @@
         </p:nvSpPr>
         <p:spPr>
           <a:xfrm>
-            <a:off x="640080" y="4084320"/>
-            <a:ext cx="10881360" cy="746760"/>
+            <a:off x="640080" y="3962400"/>
+            <a:ext cx="10881360" cy="908304"/>
           </a:xfrm>
           <a:prstGeom prst="rect">
             <a:avLst/>
@@ -36157,8 +36157,8 @@
         </p:nvSpPr>
         <p:spPr>
           <a:xfrm>
-            <a:off x="457200" y="5059680"/>
-            <a:ext cx="11247120" cy="1386840"/>
+            <a:off x="457200" y="5053584"/>
+            <a:ext cx="11247120" cy="1438656"/>
           </a:xfrm>
           <a:prstGeom prst="rect">
             <a:avLst/>
@@ -36199,8 +36199,8 @@
         </p:nvSpPr>
         <p:spPr>
           <a:xfrm>
-            <a:off x="640080" y="5151120"/>
-            <a:ext cx="10881360" cy="411480"/>
+            <a:off x="640080" y="5126736"/>
+            <a:ext cx="10881360" cy="384048"/>
           </a:xfrm>
           <a:prstGeom prst="rect">
             <a:avLst/>
@@ -36234,8 +36234,8 @@
         </p:nvSpPr>
         <p:spPr>
           <a:xfrm>
-            <a:off x="640080" y="5608320"/>
-            <a:ext cx="10881360" cy="746760"/>
+            <a:off x="640080" y="5529072"/>
+            <a:ext cx="10881360" cy="908304"/>
           </a:xfrm>
           <a:prstGeom prst="rect">
             <a:avLst/>
@@ -36451,8 +36451,8 @@
         </p:nvSpPr>
         <p:spPr>
           <a:xfrm>
-            <a:off x="457200" y="2011680"/>
-            <a:ext cx="11247120" cy="1386840"/>
+            <a:off x="457200" y="1920240"/>
+            <a:ext cx="11247120" cy="1438656"/>
           </a:xfrm>
           <a:prstGeom prst="rect">
             <a:avLst/>
@@ -36493,8 +36493,8 @@
         </p:nvSpPr>
         <p:spPr>
           <a:xfrm>
-            <a:off x="640080" y="2103120"/>
-            <a:ext cx="10881360" cy="411480"/>
+            <a:off x="640080" y="1993392"/>
+            <a:ext cx="10881360" cy="384048"/>
           </a:xfrm>
           <a:prstGeom prst="rect">
             <a:avLst/>
@@ -36528,8 +36528,8 @@
         </p:nvSpPr>
         <p:spPr>
           <a:xfrm>
-            <a:off x="640080" y="2560320"/>
-            <a:ext cx="10881360" cy="746760"/>
+            <a:off x="640080" y="2395728"/>
+            <a:ext cx="10881360" cy="908304"/>
           </a:xfrm>
           <a:prstGeom prst="rect">
             <a:avLst/>
@@ -36587,8 +36587,8 @@
         </p:nvSpPr>
         <p:spPr>
           <a:xfrm>
-            <a:off x="457200" y="3535680"/>
-            <a:ext cx="11247120" cy="1386840"/>
+            <a:off x="457200" y="3486912"/>
+            <a:ext cx="11247120" cy="1438656"/>
           </a:xfrm>
           <a:prstGeom prst="rect">
             <a:avLst/>
@@ -36629,8 +36629,8 @@
         </p:nvSpPr>
         <p:spPr>
           <a:xfrm>
-            <a:off x="640080" y="3627120"/>
-            <a:ext cx="10881360" cy="411480"/>
+            <a:off x="640080" y="3560064"/>
+            <a:ext cx="10881360" cy="384048"/>
           </a:xfrm>
           <a:prstGeom prst="rect">
             <a:avLst/>
@@ -36664,8 +36664,8 @@
         </p:nvSpPr>
         <p:spPr>
           <a:xfrm>
-            <a:off x="640080" y="4084320"/>
-            <a:ext cx="10881360" cy="746760"/>
+            <a:off x="640080" y="3962400"/>
+            <a:ext cx="10881360" cy="908304"/>
           </a:xfrm>
           <a:prstGeom prst="rect">
             <a:avLst/>
@@ -36711,8 +36711,8 @@
         </p:nvSpPr>
         <p:spPr>
           <a:xfrm>
-            <a:off x="457200" y="5059680"/>
-            <a:ext cx="11247120" cy="1386840"/>
+            <a:off x="457200" y="5053584"/>
+            <a:ext cx="11247120" cy="1438656"/>
           </a:xfrm>
           <a:prstGeom prst="rect">
             <a:avLst/>
@@ -36753,8 +36753,8 @@
         </p:nvSpPr>
         <p:spPr>
           <a:xfrm>
-            <a:off x="640080" y="5151120"/>
-            <a:ext cx="10881360" cy="411480"/>
+            <a:off x="640080" y="5126736"/>
+            <a:ext cx="10881360" cy="384048"/>
           </a:xfrm>
           <a:prstGeom prst="rect">
             <a:avLst/>
@@ -36788,8 +36788,8 @@
         </p:nvSpPr>
         <p:spPr>
           <a:xfrm>
-            <a:off x="640080" y="5608320"/>
-            <a:ext cx="10881360" cy="746760"/>
+            <a:off x="640080" y="5529072"/>
+            <a:ext cx="10881360" cy="908304"/>
           </a:xfrm>
           <a:prstGeom prst="rect">
             <a:avLst/>
@@ -37005,8 +37005,8 @@
         </p:nvSpPr>
         <p:spPr>
           <a:xfrm>
-            <a:off x="457200" y="2011680"/>
-            <a:ext cx="11247120" cy="1386840"/>
+            <a:off x="457200" y="1920240"/>
+            <a:ext cx="11247120" cy="1438656"/>
           </a:xfrm>
           <a:prstGeom prst="rect">
             <a:avLst/>
@@ -37047,8 +37047,8 @@
         </p:nvSpPr>
         <p:spPr>
           <a:xfrm>
-            <a:off x="640080" y="2103120"/>
-            <a:ext cx="10881360" cy="411480"/>
+            <a:off x="640080" y="1993392"/>
+            <a:ext cx="10881360" cy="384048"/>
           </a:xfrm>
           <a:prstGeom prst="rect">
             <a:avLst/>
@@ -37082,8 +37082,8 @@
         </p:nvSpPr>
         <p:spPr>
           <a:xfrm>
-            <a:off x="640080" y="2560320"/>
-            <a:ext cx="10881360" cy="746760"/>
+            <a:off x="640080" y="2395728"/>
+            <a:ext cx="10881360" cy="908304"/>
           </a:xfrm>
           <a:prstGeom prst="rect">
             <a:avLst/>
@@ -37129,8 +37129,8 @@
         </p:nvSpPr>
         <p:spPr>
           <a:xfrm>
-            <a:off x="457200" y="3535680"/>
-            <a:ext cx="11247120" cy="1386840"/>
+            <a:off x="457200" y="3486912"/>
+            <a:ext cx="11247120" cy="1438656"/>
           </a:xfrm>
           <a:prstGeom prst="rect">
             <a:avLst/>
@@ -37171,8 +37171,8 @@
         </p:nvSpPr>
         <p:spPr>
           <a:xfrm>
-            <a:off x="640080" y="3627120"/>
-            <a:ext cx="10881360" cy="411480"/>
+            <a:off x="640080" y="3560064"/>
+            <a:ext cx="10881360" cy="384048"/>
           </a:xfrm>
           <a:prstGeom prst="rect">
             <a:avLst/>
@@ -37206,8 +37206,8 @@
         </p:nvSpPr>
         <p:spPr>
           <a:xfrm>
-            <a:off x="640080" y="4084320"/>
-            <a:ext cx="10881360" cy="746760"/>
+            <a:off x="640080" y="3962400"/>
+            <a:ext cx="10881360" cy="908304"/>
           </a:xfrm>
           <a:prstGeom prst="rect">
             <a:avLst/>
@@ -37265,8 +37265,8 @@
         </p:nvSpPr>
         <p:spPr>
           <a:xfrm>
-            <a:off x="457200" y="5059680"/>
-            <a:ext cx="11247120" cy="1386840"/>
+            <a:off x="457200" y="5053584"/>
+            <a:ext cx="11247120" cy="1438656"/>
           </a:xfrm>
           <a:prstGeom prst="rect">
             <a:avLst/>
@@ -37307,8 +37307,8 @@
         </p:nvSpPr>
         <p:spPr>
           <a:xfrm>
-            <a:off x="640080" y="5151120"/>
-            <a:ext cx="10881360" cy="411480"/>
+            <a:off x="640080" y="5126736"/>
+            <a:ext cx="10881360" cy="384048"/>
           </a:xfrm>
           <a:prstGeom prst="rect">
             <a:avLst/>
@@ -37342,8 +37342,8 @@
         </p:nvSpPr>
         <p:spPr>
           <a:xfrm>
-            <a:off x="640080" y="5608320"/>
-            <a:ext cx="10881360" cy="746760"/>
+            <a:off x="640080" y="5529072"/>
+            <a:ext cx="10881360" cy="908304"/>
           </a:xfrm>
           <a:prstGeom prst="rect">
             <a:avLst/>
@@ -37491,7 +37491,112 @@
         </p:nvSpPr>
         <p:spPr>
           <a:xfrm>
-            <a:off x="457200" y="1097280"/>
+            <a:off x="457200" y="868680"/>
+            <a:ext cx="11247120" cy="365760"/>
+          </a:xfrm>
+          <a:prstGeom prst="rect">
+            <a:avLst/>
+          </a:prstGeom>
+          <a:noFill/>
+        </p:spPr>
+        <p:txBody>
+          <a:bodyPr wrap="square" lIns="45720" rIns="45720" tIns="18288" bIns="18288" anchor="ctr">
+            <a:spAutoFit/>
+          </a:bodyPr>
+          <a:lstStyle/>
+          <a:p>
+            <a:pPr algn="ctr"/>
+            <a:r>
+              <a:rPr sz="1500" b="0">
+                <a:solidFill>
+                  <a:srgbClr val="556070"/>
+                </a:solidFill>
+                <a:latin typeface="맑은 고딕"/>
+              </a:rPr>
+              <a:t>전국책의 가장 빛나는 한 구절</a:t>
+            </a:r>
+          </a:p>
+        </p:txBody>
+      </p:sp>
+      <p:sp>
+        <p:nvSpPr>
+          <p:cNvPr id="5" name="TextBox 4"/>
+          <p:cNvSpPr txBox="1"/>
+          <p:nvPr/>
+        </p:nvSpPr>
+        <p:spPr>
+          <a:xfrm>
+            <a:off x="457200" y="1417320"/>
+            <a:ext cx="11247120" cy="1143000"/>
+          </a:xfrm>
+          <a:prstGeom prst="rect">
+            <a:avLst/>
+          </a:prstGeom>
+          <a:noFill/>
+        </p:spPr>
+        <p:txBody>
+          <a:bodyPr wrap="square" lIns="45720" rIns="45720" tIns="18288" bIns="18288" anchor="ctr">
+            <a:spAutoFit/>
+          </a:bodyPr>
+          <a:lstStyle/>
+          <a:p>
+            <a:pPr algn="ctr"/>
+            <a:r>
+              <a:rPr sz="5800" b="1">
+                <a:solidFill>
+                  <a:srgbClr val="1F2A44"/>
+                </a:solidFill>
+                <a:latin typeface="Batang"/>
+              </a:rPr>
+              <a:t>風 蕭 蕭 兮  易 水 寒</a:t>
+            </a:r>
+          </a:p>
+        </p:txBody>
+      </p:sp>
+      <p:sp>
+        <p:nvSpPr>
+          <p:cNvPr id="6" name="TextBox 5"/>
+          <p:cNvSpPr txBox="1"/>
+          <p:nvPr/>
+        </p:nvSpPr>
+        <p:spPr>
+          <a:xfrm>
+            <a:off x="457200" y="2651760"/>
+            <a:ext cx="11247120" cy="1143000"/>
+          </a:xfrm>
+          <a:prstGeom prst="rect">
+            <a:avLst/>
+          </a:prstGeom>
+          <a:noFill/>
+        </p:spPr>
+        <p:txBody>
+          <a:bodyPr wrap="square" lIns="45720" rIns="45720" tIns="18288" bIns="18288" anchor="ctr">
+            <a:spAutoFit/>
+          </a:bodyPr>
+          <a:lstStyle/>
+          <a:p>
+            <a:pPr algn="ctr"/>
+            <a:r>
+              <a:rPr sz="5800" b="1">
+                <a:solidFill>
+                  <a:srgbClr val="8B1A1A"/>
+                </a:solidFill>
+                <a:latin typeface="Batang"/>
+              </a:rPr>
+              <a:t>壯 士 一 去 兮  不 復 還</a:t>
+            </a:r>
+          </a:p>
+        </p:txBody>
+      </p:sp>
+      <p:sp>
+        <p:nvSpPr>
+          <p:cNvPr id="7" name="TextBox 6"/>
+          <p:cNvSpPr txBox="1"/>
+          <p:nvPr/>
+        </p:nvSpPr>
+        <p:spPr>
+          <a:xfrm>
+            <a:off x="457200" y="4023360"/>
             <a:ext cx="11247120" cy="457200"/>
           </a:xfrm>
           <a:prstGeom prst="rect">
@@ -37500,34 +37605,104 @@
           <a:noFill/>
         </p:spPr>
         <p:txBody>
-          <a:bodyPr wrap="square" lIns="45720" rIns="45720" tIns="18288" bIns="18288" anchor="t">
+          <a:bodyPr wrap="square" lIns="45720" rIns="45720" tIns="18288" bIns="18288" anchor="ctr">
             <a:spAutoFit/>
           </a:bodyPr>
           <a:lstStyle/>
           <a:p>
             <a:pPr algn="ctr"/>
             <a:r>
-              <a:rPr sz="1600" b="0">
+              <a:rPr sz="2000" b="0">
+                <a:solidFill>
+                  <a:srgbClr val="1F2A44"/>
+                </a:solidFill>
+                <a:latin typeface="맑은 고딕"/>
+              </a:rPr>
+              <a:t>바람은 쓸쓸하고 — 역수는 차갑다.</a:t>
+            </a:r>
+          </a:p>
+        </p:txBody>
+      </p:sp>
+      <p:sp>
+        <p:nvSpPr>
+          <p:cNvPr id="8" name="TextBox 7"/>
+          <p:cNvSpPr txBox="1"/>
+          <p:nvPr/>
+        </p:nvSpPr>
+        <p:spPr>
+          <a:xfrm>
+            <a:off x="457200" y="4526280"/>
+            <a:ext cx="11247120" cy="457200"/>
+          </a:xfrm>
+          <a:prstGeom prst="rect">
+            <a:avLst/>
+          </a:prstGeom>
+          <a:noFill/>
+        </p:spPr>
+        <p:txBody>
+          <a:bodyPr wrap="square" lIns="45720" rIns="45720" tIns="18288" bIns="18288" anchor="ctr">
+            <a:spAutoFit/>
+          </a:bodyPr>
+          <a:lstStyle/>
+          <a:p>
+            <a:pPr algn="ctr"/>
+            <a:r>
+              <a:rPr sz="2000" b="0">
+                <a:solidFill>
+                  <a:srgbClr val="1F2A44"/>
+                </a:solidFill>
+                <a:latin typeface="맑은 고딕"/>
+              </a:rPr>
+              <a:t>장사 한 번 가면 — 다시 오지 못한다.</a:t>
+            </a:r>
+          </a:p>
+        </p:txBody>
+      </p:sp>
+      <p:sp>
+        <p:nvSpPr>
+          <p:cNvPr id="9" name="TextBox 8"/>
+          <p:cNvSpPr txBox="1"/>
+          <p:nvPr/>
+        </p:nvSpPr>
+        <p:spPr>
+          <a:xfrm>
+            <a:off x="457200" y="5486400"/>
+            <a:ext cx="11247120" cy="365760"/>
+          </a:xfrm>
+          <a:prstGeom prst="rect">
+            <a:avLst/>
+          </a:prstGeom>
+          <a:noFill/>
+        </p:spPr>
+        <p:txBody>
+          <a:bodyPr wrap="square" lIns="45720" rIns="45720" tIns="18288" bIns="18288" anchor="ctr">
+            <a:spAutoFit/>
+          </a:bodyPr>
+          <a:lstStyle/>
+          <a:p>
+            <a:pPr algn="ctr"/>
+            <a:r>
+              <a:rPr sz="1400" b="0">
                 <a:solidFill>
                   <a:srgbClr val="556070"/>
                 </a:solidFill>
                 <a:latin typeface="맑은 고딕"/>
               </a:rPr>
-              <a:t>전국책의 가장 빛나는 한 구절</a:t>
-            </a:r>
-          </a:p>
-        </p:txBody>
-      </p:sp>
-      <p:sp>
-        <p:nvSpPr>
-          <p:cNvPr id="5" name="TextBox 4"/>
-          <p:cNvSpPr txBox="1"/>
-          <p:nvPr/>
-        </p:nvSpPr>
-        <p:spPr>
-          <a:xfrm>
-            <a:off x="457200" y="1920240"/>
-            <a:ext cx="11247120" cy="1005840"/>
+              <a:t>— 형가(荊軻) · 진왕 암살을 떠나며</a:t>
+            </a:r>
+          </a:p>
+        </p:txBody>
+      </p:sp>
+      <p:sp>
+        <p:nvSpPr>
+          <p:cNvPr id="10" name="TextBox 9"/>
+          <p:cNvSpPr txBox="1"/>
+          <p:nvPr/>
+        </p:nvSpPr>
+        <p:spPr>
+          <a:xfrm>
+            <a:off x="457200" y="5943600"/>
+            <a:ext cx="11247120" cy="411480"/>
           </a:xfrm>
           <a:prstGeom prst="rect">
             <a:avLst/>
@@ -37542,182 +37717,7 @@
           <a:p>
             <a:pPr algn="ctr"/>
             <a:r>
-              <a:rPr sz="7200" b="1">
-                <a:solidFill>
-                  <a:srgbClr val="1F2A44"/>
-                </a:solidFill>
-                <a:latin typeface="Batang"/>
-              </a:rPr>
-              <a:t>風 蕭 蕭 兮  易 水 寒</a:t>
-            </a:r>
-          </a:p>
-        </p:txBody>
-      </p:sp>
-      <p:sp>
-        <p:nvSpPr>
-          <p:cNvPr id="6" name="TextBox 5"/>
-          <p:cNvSpPr txBox="1"/>
-          <p:nvPr/>
-        </p:nvSpPr>
-        <p:spPr>
-          <a:xfrm>
-            <a:off x="457200" y="3017520"/>
-            <a:ext cx="11247120" cy="1005840"/>
-          </a:xfrm>
-          <a:prstGeom prst="rect">
-            <a:avLst/>
-          </a:prstGeom>
-          <a:noFill/>
-        </p:spPr>
-        <p:txBody>
-          <a:bodyPr wrap="square" lIns="45720" rIns="45720" tIns="18288" bIns="18288" anchor="ctr">
-            <a:spAutoFit/>
-          </a:bodyPr>
-          <a:lstStyle/>
-          <a:p>
-            <a:pPr algn="ctr"/>
-            <a:r>
-              <a:rPr sz="7200" b="1">
-                <a:solidFill>
-                  <a:srgbClr val="8B1A1A"/>
-                </a:solidFill>
-                <a:latin typeface="Batang"/>
-              </a:rPr>
-              <a:t>壯 士 一 去 兮  不 復 還</a:t>
-            </a:r>
-          </a:p>
-        </p:txBody>
-      </p:sp>
-      <p:sp>
-        <p:nvSpPr>
-          <p:cNvPr id="7" name="TextBox 6"/>
-          <p:cNvSpPr txBox="1"/>
-          <p:nvPr/>
-        </p:nvSpPr>
-        <p:spPr>
-          <a:xfrm>
-            <a:off x="457200" y="4160520"/>
-            <a:ext cx="11247120" cy="457200"/>
-          </a:xfrm>
-          <a:prstGeom prst="rect">
-            <a:avLst/>
-          </a:prstGeom>
-          <a:noFill/>
-        </p:spPr>
-        <p:txBody>
-          <a:bodyPr wrap="square" lIns="45720" rIns="45720" tIns="18288" bIns="18288" anchor="t">
-            <a:spAutoFit/>
-          </a:bodyPr>
-          <a:lstStyle/>
-          <a:p>
-            <a:pPr algn="ctr"/>
-            <a:r>
-              <a:rPr sz="2000" b="0">
-                <a:solidFill>
-                  <a:srgbClr val="1F2A44"/>
-                </a:solidFill>
-                <a:latin typeface="맑은 고딕"/>
-              </a:rPr>
-              <a:t>바람은 쓸쓸하고 — 역수는 차갑다.</a:t>
-            </a:r>
-          </a:p>
-        </p:txBody>
-      </p:sp>
-      <p:sp>
-        <p:nvSpPr>
-          <p:cNvPr id="8" name="TextBox 7"/>
-          <p:cNvSpPr txBox="1"/>
-          <p:nvPr/>
-        </p:nvSpPr>
-        <p:spPr>
-          <a:xfrm>
-            <a:off x="457200" y="4663440"/>
-            <a:ext cx="11247120" cy="457200"/>
-          </a:xfrm>
-          <a:prstGeom prst="rect">
-            <a:avLst/>
-          </a:prstGeom>
-          <a:noFill/>
-        </p:spPr>
-        <p:txBody>
-          <a:bodyPr wrap="square" lIns="45720" rIns="45720" tIns="18288" bIns="18288" anchor="t">
-            <a:spAutoFit/>
-          </a:bodyPr>
-          <a:lstStyle/>
-          <a:p>
-            <a:pPr algn="ctr"/>
-            <a:r>
-              <a:rPr sz="2000" b="0">
-                <a:solidFill>
-                  <a:srgbClr val="1F2A44"/>
-                </a:solidFill>
-                <a:latin typeface="맑은 고딕"/>
-              </a:rPr>
-              <a:t>장사 한 번 가면 — 다시 오지 못한다.</a:t>
-            </a:r>
-          </a:p>
-        </p:txBody>
-      </p:sp>
-      <p:sp>
-        <p:nvSpPr>
-          <p:cNvPr id="9" name="TextBox 8"/>
-          <p:cNvSpPr txBox="1"/>
-          <p:nvPr/>
-        </p:nvSpPr>
-        <p:spPr>
-          <a:xfrm>
-            <a:off x="457200" y="5577840"/>
-            <a:ext cx="11247120" cy="365760"/>
-          </a:xfrm>
-          <a:prstGeom prst="rect">
-            <a:avLst/>
-          </a:prstGeom>
-          <a:noFill/>
-        </p:spPr>
-        <p:txBody>
-          <a:bodyPr wrap="square" lIns="45720" rIns="45720" tIns="18288" bIns="18288" anchor="t">
-            <a:spAutoFit/>
-          </a:bodyPr>
-          <a:lstStyle/>
-          <a:p>
-            <a:pPr algn="ctr"/>
-            <a:r>
-              <a:rPr sz="1400" b="0">
-                <a:solidFill>
-                  <a:srgbClr val="556070"/>
-                </a:solidFill>
-                <a:latin typeface="맑은 고딕"/>
-              </a:rPr>
-              <a:t>— 형가(荊軻) · 진왕 암살을 떠나며</a:t>
-            </a:r>
-          </a:p>
-        </p:txBody>
-      </p:sp>
-      <p:sp>
-        <p:nvSpPr>
-          <p:cNvPr id="10" name="TextBox 9"/>
-          <p:cNvSpPr txBox="1"/>
-          <p:nvPr/>
-        </p:nvSpPr>
-        <p:spPr>
-          <a:xfrm>
-            <a:off x="457200" y="5989320"/>
-            <a:ext cx="11247120" cy="365760"/>
-          </a:xfrm>
-          <a:prstGeom prst="rect">
-            <a:avLst/>
-          </a:prstGeom>
-          <a:noFill/>
-        </p:spPr>
-        <p:txBody>
-          <a:bodyPr wrap="square" lIns="45720" rIns="45720" tIns="18288" bIns="18288" anchor="t">
-            <a:spAutoFit/>
-          </a:bodyPr>
-          <a:lstStyle/>
-          <a:p>
-            <a:pPr algn="ctr"/>
-            <a:r>
-              <a:rPr sz="1500" b="1">
+              <a:rPr sz="1600" b="1">
                 <a:solidFill>
                   <a:srgbClr val="8B1A1A"/>
                 </a:solidFill>
@@ -37894,8 +37894,8 @@
         </p:nvSpPr>
         <p:spPr>
           <a:xfrm>
-            <a:off x="457200" y="2011680"/>
-            <a:ext cx="11247120" cy="1386840"/>
+            <a:off x="457200" y="1920240"/>
+            <a:ext cx="11247120" cy="1438656"/>
           </a:xfrm>
           <a:prstGeom prst="rect">
             <a:avLst/>
@@ -37936,8 +37936,8 @@
         </p:nvSpPr>
         <p:spPr>
           <a:xfrm>
-            <a:off x="640080" y="2103120"/>
-            <a:ext cx="10881360" cy="411480"/>
+            <a:off x="640080" y="1993392"/>
+            <a:ext cx="10881360" cy="384048"/>
           </a:xfrm>
           <a:prstGeom prst="rect">
             <a:avLst/>
@@ -37971,8 +37971,8 @@
         </p:nvSpPr>
         <p:spPr>
           <a:xfrm>
-            <a:off x="640080" y="2560320"/>
-            <a:ext cx="10881360" cy="746760"/>
+            <a:off x="640080" y="2395728"/>
+            <a:ext cx="10881360" cy="908304"/>
           </a:xfrm>
           <a:prstGeom prst="rect">
             <a:avLst/>
@@ -38018,8 +38018,8 @@
         </p:nvSpPr>
         <p:spPr>
           <a:xfrm>
-            <a:off x="457200" y="3535680"/>
-            <a:ext cx="11247120" cy="1386840"/>
+            <a:off x="457200" y="3486912"/>
+            <a:ext cx="11247120" cy="1438656"/>
           </a:xfrm>
           <a:prstGeom prst="rect">
             <a:avLst/>
@@ -38060,8 +38060,8 @@
         </p:nvSpPr>
         <p:spPr>
           <a:xfrm>
-            <a:off x="640080" y="3627120"/>
-            <a:ext cx="10881360" cy="411480"/>
+            <a:off x="640080" y="3560064"/>
+            <a:ext cx="10881360" cy="384048"/>
           </a:xfrm>
           <a:prstGeom prst="rect">
             <a:avLst/>
@@ -38095,8 +38095,8 @@
         </p:nvSpPr>
         <p:spPr>
           <a:xfrm>
-            <a:off x="640080" y="4084320"/>
-            <a:ext cx="10881360" cy="746760"/>
+            <a:off x="640080" y="3962400"/>
+            <a:ext cx="10881360" cy="908304"/>
           </a:xfrm>
           <a:prstGeom prst="rect">
             <a:avLst/>
@@ -38142,8 +38142,8 @@
         </p:nvSpPr>
         <p:spPr>
           <a:xfrm>
-            <a:off x="457200" y="5059680"/>
-            <a:ext cx="11247120" cy="1386840"/>
+            <a:off x="457200" y="5053584"/>
+            <a:ext cx="11247120" cy="1438656"/>
           </a:xfrm>
           <a:prstGeom prst="rect">
             <a:avLst/>
@@ -38184,8 +38184,8 @@
         </p:nvSpPr>
         <p:spPr>
           <a:xfrm>
-            <a:off x="640080" y="5151120"/>
-            <a:ext cx="10881360" cy="411480"/>
+            <a:off x="640080" y="5126736"/>
+            <a:ext cx="10881360" cy="384048"/>
           </a:xfrm>
           <a:prstGeom prst="rect">
             <a:avLst/>
@@ -38219,8 +38219,8 @@
         </p:nvSpPr>
         <p:spPr>
           <a:xfrm>
-            <a:off x="640080" y="5608320"/>
-            <a:ext cx="10881360" cy="746760"/>
+            <a:off x="640080" y="5529072"/>
+            <a:ext cx="10881360" cy="908304"/>
           </a:xfrm>
           <a:prstGeom prst="rect">
             <a:avLst/>
@@ -38424,8 +38424,8 @@
         </p:nvSpPr>
         <p:spPr>
           <a:xfrm>
-            <a:off x="457200" y="2011680"/>
-            <a:ext cx="11247120" cy="1386840"/>
+            <a:off x="457200" y="1920240"/>
+            <a:ext cx="11247120" cy="1438656"/>
           </a:xfrm>
           <a:prstGeom prst="rect">
             <a:avLst/>
@@ -38466,8 +38466,8 @@
         </p:nvSpPr>
         <p:spPr>
           <a:xfrm>
-            <a:off x="640080" y="2103120"/>
-            <a:ext cx="10881360" cy="411480"/>
+            <a:off x="640080" y="1993392"/>
+            <a:ext cx="10881360" cy="384048"/>
           </a:xfrm>
           <a:prstGeom prst="rect">
             <a:avLst/>
@@ -38501,8 +38501,8 @@
         </p:nvSpPr>
         <p:spPr>
           <a:xfrm>
-            <a:off x="640080" y="2560320"/>
-            <a:ext cx="10881360" cy="746760"/>
+            <a:off x="640080" y="2395728"/>
+            <a:ext cx="10881360" cy="908304"/>
           </a:xfrm>
           <a:prstGeom prst="rect">
             <a:avLst/>
@@ -38572,8 +38572,8 @@
         </p:nvSpPr>
         <p:spPr>
           <a:xfrm>
-            <a:off x="457200" y="3535680"/>
-            <a:ext cx="11247120" cy="1386840"/>
+            <a:off x="457200" y="3486912"/>
+            <a:ext cx="11247120" cy="1438656"/>
           </a:xfrm>
           <a:prstGeom prst="rect">
             <a:avLst/>
@@ -38614,8 +38614,8 @@
         </p:nvSpPr>
         <p:spPr>
           <a:xfrm>
-            <a:off x="640080" y="3627120"/>
-            <a:ext cx="10881360" cy="411480"/>
+            <a:off x="640080" y="3560064"/>
+            <a:ext cx="10881360" cy="384048"/>
           </a:xfrm>
           <a:prstGeom prst="rect">
             <a:avLst/>
@@ -38649,8 +38649,8 @@
         </p:nvSpPr>
         <p:spPr>
           <a:xfrm>
-            <a:off x="640080" y="4084320"/>
-            <a:ext cx="10881360" cy="746760"/>
+            <a:off x="640080" y="3962400"/>
+            <a:ext cx="10881360" cy="908304"/>
           </a:xfrm>
           <a:prstGeom prst="rect">
             <a:avLst/>
@@ -38696,8 +38696,8 @@
         </p:nvSpPr>
         <p:spPr>
           <a:xfrm>
-            <a:off x="457200" y="5059680"/>
-            <a:ext cx="11247120" cy="1386840"/>
+            <a:off x="457200" y="5053584"/>
+            <a:ext cx="11247120" cy="1438656"/>
           </a:xfrm>
           <a:prstGeom prst="rect">
             <a:avLst/>
@@ -38738,8 +38738,8 @@
         </p:nvSpPr>
         <p:spPr>
           <a:xfrm>
-            <a:off x="640080" y="5151120"/>
-            <a:ext cx="10881360" cy="411480"/>
+            <a:off x="640080" y="5126736"/>
+            <a:ext cx="10881360" cy="384048"/>
           </a:xfrm>
           <a:prstGeom prst="rect">
             <a:avLst/>
@@ -38773,8 +38773,8 @@
         </p:nvSpPr>
         <p:spPr>
           <a:xfrm>
-            <a:off x="640080" y="5608320"/>
-            <a:ext cx="10881360" cy="746760"/>
+            <a:off x="640080" y="5529072"/>
+            <a:ext cx="10881360" cy="908304"/>
           </a:xfrm>
           <a:prstGeom prst="rect">
             <a:avLst/>
@@ -38978,8 +38978,8 @@
         </p:nvSpPr>
         <p:spPr>
           <a:xfrm>
-            <a:off x="457200" y="2011680"/>
-            <a:ext cx="11247120" cy="1386840"/>
+            <a:off x="457200" y="1920240"/>
+            <a:ext cx="11247120" cy="1438656"/>
           </a:xfrm>
           <a:prstGeom prst="rect">
             <a:avLst/>
@@ -39020,8 +39020,8 @@
         </p:nvSpPr>
         <p:spPr>
           <a:xfrm>
-            <a:off x="640080" y="2103120"/>
-            <a:ext cx="10881360" cy="411480"/>
+            <a:off x="640080" y="1993392"/>
+            <a:ext cx="10881360" cy="384048"/>
           </a:xfrm>
           <a:prstGeom prst="rect">
             <a:avLst/>
@@ -39055,8 +39055,8 @@
         </p:nvSpPr>
         <p:spPr>
           <a:xfrm>
-            <a:off x="640080" y="2560320"/>
-            <a:ext cx="10881360" cy="746760"/>
+            <a:off x="640080" y="2395728"/>
+            <a:ext cx="10881360" cy="908304"/>
           </a:xfrm>
           <a:prstGeom prst="rect">
             <a:avLst/>
@@ -39102,8 +39102,8 @@
         </p:nvSpPr>
         <p:spPr>
           <a:xfrm>
-            <a:off x="457200" y="3535680"/>
-            <a:ext cx="11247120" cy="1386840"/>
+            <a:off x="457200" y="3486912"/>
+            <a:ext cx="11247120" cy="1438656"/>
           </a:xfrm>
           <a:prstGeom prst="rect">
             <a:avLst/>
@@ -39144,8 +39144,8 @@
         </p:nvSpPr>
         <p:spPr>
           <a:xfrm>
-            <a:off x="640080" y="3627120"/>
-            <a:ext cx="10881360" cy="411480"/>
+            <a:off x="640080" y="3560064"/>
+            <a:ext cx="10881360" cy="384048"/>
           </a:xfrm>
           <a:prstGeom prst="rect">
             <a:avLst/>
@@ -39179,8 +39179,8 @@
         </p:nvSpPr>
         <p:spPr>
           <a:xfrm>
-            <a:off x="640080" y="4084320"/>
-            <a:ext cx="10881360" cy="746760"/>
+            <a:off x="640080" y="3962400"/>
+            <a:ext cx="10881360" cy="908304"/>
           </a:xfrm>
           <a:prstGeom prst="rect">
             <a:avLst/>
@@ -39226,8 +39226,8 @@
         </p:nvSpPr>
         <p:spPr>
           <a:xfrm>
-            <a:off x="457200" y="5059680"/>
-            <a:ext cx="11247120" cy="1386840"/>
+            <a:off x="457200" y="5053584"/>
+            <a:ext cx="11247120" cy="1438656"/>
           </a:xfrm>
           <a:prstGeom prst="rect">
             <a:avLst/>
@@ -39268,8 +39268,8 @@
         </p:nvSpPr>
         <p:spPr>
           <a:xfrm>
-            <a:off x="640080" y="5151120"/>
-            <a:ext cx="10881360" cy="411480"/>
+            <a:off x="640080" y="5126736"/>
+            <a:ext cx="10881360" cy="384048"/>
           </a:xfrm>
           <a:prstGeom prst="rect">
             <a:avLst/>
@@ -39303,8 +39303,8 @@
         </p:nvSpPr>
         <p:spPr>
           <a:xfrm>
-            <a:off x="640080" y="5608320"/>
-            <a:ext cx="10881360" cy="746760"/>
+            <a:off x="640080" y="5529072"/>
+            <a:ext cx="10881360" cy="908304"/>
           </a:xfrm>
           <a:prstGeom prst="rect">
             <a:avLst/>
